--- a/output/education/2026-03-26_ai-medical-education-integrated/ai-medical-education-integrated_slides_allstaff.pptx
+++ b/output/education/2026-03-26_ai-medical-education-integrated/ai-medical-education-integrated_slides_allstaff.pptx
@@ -3135,6 +3135,7 @@
               </a:defRPr>
             </a:pPr>
             <a:r>
+              <a:rPr/>
               <a:t>AI時代の医療者に求められること</a:t>
             </a:r>
           </a:p>
@@ -3171,6 +3172,7 @@
               </a:defRPr>
             </a:pPr>
             <a:r>
+              <a:rPr/>
               <a:t>対象: 全スタッフ（看護師・介護士・事務職員を含む）</a:t>
             </a:r>
           </a:p>
@@ -3207,6 +3209,7 @@
               </a:defRPr>
             </a:pPr>
             <a:r>
+              <a:rPr/>
               <a:t>時間: 15分</a:t>
             </a:r>
           </a:p>
@@ -3243,6 +3246,7 @@
               </a:defRPr>
             </a:pPr>
             <a:r>
+              <a:rPr/>
               <a:t>日付: 2026-03-26</a:t>
             </a:r>
           </a:p>
@@ -3256,7 +3260,7 @@
         </p:nvSpPr>
         <p:spPr>
           <a:xfrm>
-            <a:off x="548640" y="1783080"/>
+            <a:off x="548640" y="1801368"/>
             <a:ext cx="7772400" cy="320040"/>
           </a:xfrm>
           <a:prstGeom prst="rect">
@@ -3279,6 +3283,7 @@
               </a:defRPr>
             </a:pPr>
             <a:r>
+              <a:rPr/>
               <a:t>IDモデル: ガニェの9教授事象</a:t>
             </a:r>
           </a:p>
@@ -3292,7 +3297,7 @@
         </p:nvSpPr>
         <p:spPr>
           <a:xfrm>
-            <a:off x="548640" y="2103120"/>
+            <a:off x="548640" y="2139696"/>
             <a:ext cx="7772400" cy="320040"/>
           </a:xfrm>
           <a:prstGeom prst="rect">
@@ -3315,6 +3320,7 @@
               </a:defRPr>
             </a:pPr>
             <a:r>
+              <a:rPr/>
               <a:t>ブルーム: 理解 → 適用 → 評価</a:t>
             </a:r>
           </a:p>
@@ -3377,6 +3383,7 @@
               </a:defRPr>
             </a:pPr>
             <a:r>
+              <a:rPr/>
               <a:t>スライド1: 知っていますか？この数字（0-2分）</a:t>
             </a:r>
           </a:p>
@@ -3421,7 +3428,9 @@
           <a:bodyPr rtlCol="0" anchor="ctr"/>
           <a:lstStyle/>
           <a:p>
-            <a:pPr algn="ctr"/>
+            <a:pPr algn="ctr">
+              <a:defRPr/>
+            </a:pPr>
           </a:p>
         </p:txBody>
       </p:sp>
@@ -3466,7 +3475,9 @@
           <a:bodyPr rtlCol="0" anchor="ctr"/>
           <a:lstStyle/>
           <a:p>
-            <a:pPr algn="ctr"/>
+            <a:pPr algn="ctr">
+              <a:defRPr/>
+            </a:pPr>
           </a:p>
         </p:txBody>
       </p:sp>
@@ -3501,10 +3512,12 @@
               </a:defRPr>
             </a:pPr>
             <a:r>
+              <a:rPr/>
               <a:t>「病院でAIを使っている医師が、80%を超えました。」</a:t>
             </a:r>
             <a:br/>
             <a:r>
+              <a:rPr/>
               <a:t>— AMA（アメリカ医師会）2026年調査より</a:t>
             </a:r>
           </a:p>
@@ -3542,6 +3555,7 @@
               <a:buChar char="●"/>
             </a:pPr>
             <a:r>
+              <a:rPr/>
               <a:t>2023年には約40%だったのが、たった3年で2倍に</a:t>
             </a:r>
           </a:p>
@@ -3556,6 +3570,7 @@
               <a:buChar char="●"/>
             </a:pPr>
             <a:r>
+              <a:rPr/>
               <a:t>そのうち76%以上が「AIのおかげで診療の質が上がった」と回答</a:t>
             </a:r>
           </a:p>
@@ -3600,7 +3615,9 @@
           <a:bodyPr rtlCol="0" anchor="ctr"/>
           <a:lstStyle/>
           <a:p>
-            <a:pPr algn="ctr"/>
+            <a:pPr algn="ctr">
+              <a:defRPr/>
+            </a:pPr>
           </a:p>
         </p:txBody>
       </p:sp>
@@ -3645,7 +3662,9 @@
           <a:bodyPr rtlCol="0" anchor="ctr"/>
           <a:lstStyle/>
           <a:p>
-            <a:pPr algn="ctr"/>
+            <a:pPr algn="ctr">
+              <a:defRPr/>
+            </a:pPr>
           </a:p>
         </p:txBody>
       </p:sp>
@@ -3680,14 +3699,17 @@
               </a:defRPr>
             </a:pPr>
             <a:r>
+              <a:rPr/>
               <a:t>「AIはもう"未来の話"ではなく、"今の話"です。</a:t>
             </a:r>
             <a:br/>
             <a:r>
+              <a:rPr/>
               <a:t>でも、AIって本当にすごいの？ 怖くないの？</a:t>
             </a:r>
             <a:br/>
             <a:r>
+              <a:rPr/>
               <a:t>今日の15分で、一緒に考えましょう。」</a:t>
             </a:r>
           </a:p>
@@ -3724,6 +3746,7 @@
               </a:defRPr>
             </a:pPr>
             <a:r>
+              <a:rPr/>
               <a:t>この15分の後、あなたは：</a:t>
             </a:r>
           </a:p>
@@ -3761,6 +3784,7 @@
               <a:buChar char="●"/>
             </a:pPr>
             <a:r>
+              <a:rPr/>
               <a:t>AIの得意なこと・苦手なことがわかる</a:t>
             </a:r>
           </a:p>
@@ -3775,6 +3799,7 @@
               <a:buChar char="●"/>
             </a:pPr>
             <a:r>
+              <a:rPr/>
               <a:t>AIが間違える理由をイメージできる</a:t>
             </a:r>
           </a:p>
@@ -3789,6 +3814,7 @@
               <a:buChar char="●"/>
             </a:pPr>
             <a:r>
+              <a:rPr/>
               <a:t>自分の仕事でAIとどう付き合うか考えられる</a:t>
             </a:r>
           </a:p>
@@ -3851,6 +3877,7 @@
               </a:defRPr>
             </a:pPr>
             <a:r>
+              <a:rPr/>
               <a:t>スライド2: AIの「得意」と「苦手」（2-5分）</a:t>
             </a:r>
           </a:p>
@@ -4547,7 +4574,9 @@
           <a:bodyPr rtlCol="0" anchor="ctr"/>
           <a:lstStyle/>
           <a:p>
-            <a:pPr algn="ctr"/>
+            <a:pPr algn="ctr">
+              <a:defRPr/>
+            </a:pPr>
           </a:p>
         </p:txBody>
       </p:sp>
@@ -4592,7 +4621,9 @@
           <a:bodyPr rtlCol="0" anchor="ctr"/>
           <a:lstStyle/>
           <a:p>
-            <a:pPr algn="ctr"/>
+            <a:pPr algn="ctr">
+              <a:defRPr/>
+            </a:pPr>
           </a:p>
         </p:txBody>
       </p:sp>
@@ -4605,7 +4636,7 @@
         <p:spPr>
           <a:xfrm>
             <a:off x="777240" y="4462271"/>
-            <a:ext cx="7406640" cy="36576"/>
+            <a:ext cx="7406640" cy="287020"/>
           </a:xfrm>
           <a:prstGeom prst="rect">
             <a:avLst/>
@@ -4627,14 +4658,17 @@
               </a:defRPr>
             </a:pPr>
             <a:r>
+              <a:rPr/>
               <a:t>たとえるなら：</a:t>
             </a:r>
             <a:br/>
             <a:r>
+              <a:rPr/>
               <a:t>AIは「ものすごく優秀だけど、空気が読めない新人スタッフ」。</a:t>
             </a:r>
             <a:br/>
             <a:r>
+              <a:rPr/>
               <a:t>データの処理は速いけど、患者さんの涙の意味はわからない。</a:t>
             </a:r>
           </a:p>
@@ -4697,6 +4731,7 @@
               </a:defRPr>
             </a:pPr>
             <a:r>
+              <a:rPr/>
               <a:t>スライド3: AIも「間違える」— 知っておいてほしい話（5-8分）</a:t>
             </a:r>
           </a:p>
@@ -4733,6 +4768,7 @@
               </a:defRPr>
             </a:pPr>
             <a:r>
+              <a:rPr/>
               <a:t>最新の研究（PNAS 2026年発表）で、AIの「くせ」がわかってきました：</a:t>
             </a:r>
           </a:p>
@@ -4777,7 +4813,9 @@
           <a:bodyPr rtlCol="0" anchor="ctr"/>
           <a:lstStyle/>
           <a:p>
-            <a:pPr algn="ctr"/>
+            <a:pPr algn="ctr">
+              <a:defRPr/>
+            </a:pPr>
           </a:p>
         </p:txBody>
       </p:sp>
@@ -4822,7 +4860,9 @@
           <a:bodyPr rtlCol="0" anchor="ctr"/>
           <a:lstStyle/>
           <a:p>
-            <a:pPr algn="ctr"/>
+            <a:pPr algn="ctr">
+              <a:defRPr/>
+            </a:pPr>
           </a:p>
         </p:txBody>
       </p:sp>
@@ -4857,26 +4897,32 @@
               </a:defRPr>
             </a:pPr>
             <a:r>
+              <a:rPr/>
               <a:t>例え話:</a:t>
             </a:r>
             <a:br/>
             <a:r>
+              <a:rPr/>
               <a:t>「廊下で患者さんが転びそうになっている。</a:t>
             </a:r>
             <a:br/>
             <a:r>
+              <a:rPr/>
               <a:t>手を出して支えたら → もしケガさせたら自分のせい？</a:t>
             </a:r>
             <a:br/>
             <a:r>
+              <a:rPr/>
               <a:t>何もしなかったら → たまたま転んだだけ？」</a:t>
             </a:r>
             <a:br/>
             <a:r>
+              <a:rPr/>
               <a:t>AIは「何もしない方が安全」と判断しがちです。</a:t>
             </a:r>
             <a:br/>
             <a:r>
+              <a:rPr/>
               <a:t>でも医療では、「何もしないこと」も判断であり、責任がある。</a:t>
             </a:r>
           </a:p>
@@ -4921,7 +4967,9 @@
           <a:bodyPr rtlCol="0" anchor="ctr"/>
           <a:lstStyle/>
           <a:p>
-            <a:pPr algn="ctr"/>
+            <a:pPr algn="ctr">
+              <a:defRPr/>
+            </a:pPr>
           </a:p>
         </p:txBody>
       </p:sp>
@@ -4966,7 +5014,9 @@
           <a:bodyPr rtlCol="0" anchor="ctr"/>
           <a:lstStyle/>
           <a:p>
-            <a:pPr algn="ctr"/>
+            <a:pPr algn="ctr">
+              <a:defRPr/>
+            </a:pPr>
           </a:p>
         </p:txBody>
       </p:sp>
@@ -5001,10 +5051,12 @@
               </a:defRPr>
             </a:pPr>
             <a:r>
+              <a:rPr/>
               <a:t>最初に見た数字に影響されて、後から入った情報を軽視してしまう。</a:t>
             </a:r>
             <a:br/>
             <a:r>
+              <a:rPr/>
               <a:t>人間にもある「くせ」ですが、AIはこれをさらに強めてしまうことがある。</a:t>
             </a:r>
           </a:p>
@@ -5049,7 +5101,9 @@
           <a:bodyPr rtlCol="0" anchor="ctr"/>
           <a:lstStyle/>
           <a:p>
-            <a:pPr algn="ctr"/>
+            <a:pPr algn="ctr">
+              <a:defRPr/>
+            </a:pPr>
           </a:p>
         </p:txBody>
       </p:sp>
@@ -5094,7 +5148,9 @@
           <a:bodyPr rtlCol="0" anchor="ctr"/>
           <a:lstStyle/>
           <a:p>
-            <a:pPr algn="ctr"/>
+            <a:pPr algn="ctr">
+              <a:defRPr/>
+            </a:pPr>
           </a:p>
         </p:txBody>
       </p:sp>
@@ -5129,14 +5185,17 @@
               </a:defRPr>
             </a:pPr>
             <a:r>
+              <a:rPr/>
               <a:t>「成功率90%の手術です」と聞くと安心するけど、</a:t>
             </a:r>
             <a:br/>
             <a:r>
+              <a:rPr/>
               <a:t>「10人に1人は失敗します」と聞くと不安になる。</a:t>
             </a:r>
             <a:br/>
             <a:r>
+              <a:rPr/>
               <a:t>同じことなのに、伝え方で印象が変わる — AIにもこの傾向がある。</a:t>
             </a:r>
           </a:p>
@@ -5181,7 +5240,9 @@
           <a:bodyPr rtlCol="0" anchor="ctr"/>
           <a:lstStyle/>
           <a:p>
-            <a:pPr algn="ctr"/>
+            <a:pPr algn="ctr">
+              <a:defRPr/>
+            </a:pPr>
           </a:p>
         </p:txBody>
       </p:sp>
@@ -5226,7 +5287,9 @@
           <a:bodyPr rtlCol="0" anchor="ctr"/>
           <a:lstStyle/>
           <a:p>
-            <a:pPr algn="ctr"/>
+            <a:pPr algn="ctr">
+              <a:defRPr/>
+            </a:pPr>
           </a:p>
         </p:txBody>
       </p:sp>
@@ -5261,10 +5324,12 @@
               </a:defRPr>
             </a:pPr>
             <a:r>
+              <a:rPr/>
               <a:t>AIの答えを「そのまま信じる」のではなく、「本当かな？」と立ち止まる。</a:t>
             </a:r>
             <a:br/>
             <a:r>
+              <a:rPr/>
               <a:t>これが、AI時代に一番大切なスキルです。</a:t>
             </a:r>
           </a:p>
@@ -5327,6 +5392,7 @@
               </a:defRPr>
             </a:pPr>
             <a:r>
+              <a:rPr/>
               <a:t>スライド4: 実際の医療現場ではどう使われている？（8-9分）</a:t>
             </a:r>
           </a:p>
@@ -5363,6 +5429,7 @@
               </a:defRPr>
             </a:pPr>
             <a:r>
+              <a:rPr/>
               <a:t>BJC Healthcareという病院グループでは：</a:t>
             </a:r>
           </a:p>
@@ -5400,6 +5467,7 @@
               <a:buChar char="●"/>
             </a:pPr>
             <a:r>
+              <a:rPr/>
               <a:t>35,000人以上の患者データをもとに</a:t>
             </a:r>
           </a:p>
@@ -5414,6 +5482,7 @@
               <a:buChar char="●"/>
             </a:pPr>
             <a:r>
+              <a:rPr/>
               <a:t>AIが「この患者さんは今後のケア計画について話し合うタイミングかもしれません」と提案</a:t>
             </a:r>
           </a:p>
@@ -5428,6 +5497,7 @@
               <a:buChar char="●"/>
             </a:pPr>
             <a:r>
+              <a:rPr/>
               <a:t>最終判断は必ず医師やケアチームが行う</a:t>
             </a:r>
           </a:p>
@@ -5472,7 +5542,9 @@
           <a:bodyPr rtlCol="0" anchor="ctr"/>
           <a:lstStyle/>
           <a:p>
-            <a:pPr algn="ctr"/>
+            <a:pPr algn="ctr">
+              <a:defRPr/>
+            </a:pPr>
           </a:p>
         </p:txBody>
       </p:sp>
@@ -5517,7 +5589,9 @@
           <a:bodyPr rtlCol="0" anchor="ctr"/>
           <a:lstStyle/>
           <a:p>
-            <a:pPr algn="ctr"/>
+            <a:pPr algn="ctr">
+              <a:defRPr/>
+            </a:pPr>
           </a:p>
         </p:txBody>
       </p:sp>
@@ -5552,6 +5626,7 @@
               </a:defRPr>
             </a:pPr>
             <a:r>
+              <a:rPr/>
               <a:t>ポイント: AIは「提案する」だけ。「決める」のは人間。</a:t>
             </a:r>
           </a:p>
@@ -5872,7 +5947,9 @@
           <a:bodyPr rtlCol="0" anchor="ctr"/>
           <a:lstStyle/>
           <a:p>
-            <a:pPr algn="ctr"/>
+            <a:pPr algn="ctr">
+              <a:defRPr/>
+            </a:pPr>
           </a:p>
         </p:txBody>
       </p:sp>
@@ -5917,7 +5994,9 @@
           <a:bodyPr rtlCol="0" anchor="ctr"/>
           <a:lstStyle/>
           <a:p>
-            <a:pPr algn="ctr"/>
+            <a:pPr algn="ctr">
+              <a:defRPr/>
+            </a:pPr>
           </a:p>
         </p:txBody>
       </p:sp>
@@ -5930,7 +6009,7 @@
         <p:spPr>
           <a:xfrm>
             <a:off x="777240" y="4325112"/>
-            <a:ext cx="7406640" cy="173736"/>
+            <a:ext cx="7406640" cy="287020"/>
           </a:xfrm>
           <a:prstGeom prst="rect">
             <a:avLst/>
@@ -5952,6 +6031,7 @@
               </a:defRPr>
             </a:pPr>
             <a:r>
+              <a:rPr/>
               <a:t>AIはチームの一員。でも、リーダーは常に人間です。</a:t>
             </a:r>
           </a:p>
@@ -6014,6 +6094,7 @@
               </a:defRPr>
             </a:pPr>
             <a:r>
+              <a:rPr/>
               <a:t>スライド5: みんなで考えよう（9-13分）</a:t>
             </a:r>
           </a:p>
@@ -6050,6 +6131,7 @@
               </a:defRPr>
             </a:pPr>
             <a:r>
+              <a:rPr/>
               <a:t>3-4人のグループで話し合ってみましょう：</a:t>
             </a:r>
           </a:p>
@@ -6094,7 +6176,9 @@
           <a:bodyPr rtlCol="0" anchor="ctr"/>
           <a:lstStyle/>
           <a:p>
-            <a:pPr algn="ctr"/>
+            <a:pPr algn="ctr">
+              <a:defRPr/>
+            </a:pPr>
           </a:p>
         </p:txBody>
       </p:sp>
@@ -6139,7 +6223,9 @@
           <a:bodyPr rtlCol="0" anchor="ctr"/>
           <a:lstStyle/>
           <a:p>
-            <a:pPr algn="ctr"/>
+            <a:pPr algn="ctr">
+              <a:defRPr/>
+            </a:pPr>
           </a:p>
         </p:txBody>
       </p:sp>
@@ -6174,18 +6260,22 @@
               </a:defRPr>
             </a:pPr>
             <a:r>
+              <a:rPr/>
               <a:t>テーマ:</a:t>
             </a:r>
             <a:br/>
             <a:r>
+              <a:rPr/>
               <a:t>「あなたの業務の中で...」</a:t>
             </a:r>
             <a:br/>
             <a:r>
+              <a:rPr/>
               <a:t>1. AIに手伝ってもらいたいことは？</a:t>
             </a:r>
             <a:br/>
             <a:r>
+              <a:rPr/>
               <a:t>2. 絶対に人がやるべきことは？</a:t>
             </a:r>
           </a:p>
@@ -6200,7 +6290,7 @@
         <p:spPr>
           <a:xfrm>
             <a:off x="548640" y="2071420"/>
-            <a:ext cx="7772400" cy="320040"/>
+            <a:ext cx="7772400" cy="322579"/>
           </a:xfrm>
           <a:prstGeom prst="rect">
             <a:avLst/>
@@ -6222,6 +6312,7 @@
               </a:defRPr>
             </a:pPr>
             <a:r>
+              <a:rPr/>
               <a:t>考えるヒント:</a:t>
             </a:r>
           </a:p>
@@ -6259,6 +6350,7 @@
               <a:buChar char="●"/>
             </a:pPr>
             <a:r>
+              <a:rPr/>
               <a:t>毎日繰り返しているデータ入力や記録作業は？</a:t>
             </a:r>
           </a:p>
@@ -6273,6 +6365,7 @@
               <a:buChar char="●"/>
             </a:pPr>
             <a:r>
+              <a:rPr/>
               <a:t>「ダブルチェック」で時間がかかっている業務は？</a:t>
             </a:r>
           </a:p>
@@ -6287,6 +6380,7 @@
               <a:buChar char="●"/>
             </a:pPr>
             <a:r>
+              <a:rPr/>
               <a:t>患者さんやご家族と直接向き合う場面は？</a:t>
             </a:r>
           </a:p>
@@ -6301,6 +6395,7 @@
               <a:buChar char="●"/>
             </a:pPr>
             <a:r>
+              <a:rPr/>
               <a:t>「この仕事、間違えたら大変」という判断業務は？</a:t>
             </a:r>
           </a:p>
@@ -6345,7 +6440,9 @@
           <a:bodyPr rtlCol="0" anchor="ctr"/>
           <a:lstStyle/>
           <a:p>
-            <a:pPr algn="ctr"/>
+            <a:pPr algn="ctr">
+              <a:defRPr/>
+            </a:pPr>
           </a:p>
         </p:txBody>
       </p:sp>
@@ -6390,7 +6487,9 @@
           <a:bodyPr rtlCol="0" anchor="ctr"/>
           <a:lstStyle/>
           <a:p>
-            <a:pPr algn="ctr"/>
+            <a:pPr algn="ctr">
+              <a:defRPr/>
+            </a:pPr>
           </a:p>
         </p:txBody>
       </p:sp>
@@ -6425,10 +6524,12 @@
               </a:defRPr>
             </a:pPr>
             <a:r>
+              <a:rPr/>
               <a:t>考え方のコツ:</a:t>
             </a:r>
             <a:br/>
             <a:r>
+              <a:rPr/>
               <a:t>「AIに任せて楽になること」と「人間だからこそ意味があること」を分けてみよう。</a:t>
             </a:r>
           </a:p>
@@ -6443,7 +6544,7 @@
         <p:spPr>
           <a:xfrm>
             <a:off x="548640" y="4311700"/>
-            <a:ext cx="7772400" cy="260299"/>
+            <a:ext cx="7772400" cy="304799"/>
           </a:xfrm>
           <a:prstGeom prst="rect">
             <a:avLst/>
@@ -6466,6 +6567,7 @@
               <a:buChar char="●"/>
             </a:pPr>
             <a:r>
+              <a:rPr/>
               <a:t>各グループから1つずつ共有</a:t>
             </a:r>
           </a:p>
@@ -6528,6 +6630,7 @@
               </a:defRPr>
             </a:pPr>
             <a:r>
+              <a:rPr/>
               <a:t>スライド6: まとめ — だから、あなたが大切（13-15分）</a:t>
             </a:r>
           </a:p>
@@ -6966,7 +7069,9 @@
           <a:bodyPr rtlCol="0" anchor="ctr"/>
           <a:lstStyle/>
           <a:p>
-            <a:pPr algn="ctr"/>
+            <a:pPr algn="ctr">
+              <a:defRPr/>
+            </a:pPr>
           </a:p>
         </p:txBody>
       </p:sp>
@@ -7011,7 +7116,9 @@
           <a:bodyPr rtlCol="0" anchor="ctr"/>
           <a:lstStyle/>
           <a:p>
-            <a:pPr algn="ctr"/>
+            <a:pPr algn="ctr">
+              <a:defRPr/>
+            </a:pPr>
           </a:p>
         </p:txBody>
       </p:sp>
@@ -7046,26 +7153,32 @@
               </a:defRPr>
             </a:pPr>
             <a:r>
+              <a:rPr/>
               <a:t>テクノロジーは変わります。</a:t>
             </a:r>
             <a:br/>
             <a:r>
+              <a:rPr/>
               <a:t>でも、患者さんの手を握れるのは、あなただけです。</a:t>
             </a:r>
             <a:br/>
             <a:r>
+              <a:rPr/>
               <a:t>AIが得意なことはAIに任せて、</a:t>
             </a:r>
             <a:br/>
             <a:r>
+              <a:rPr/>
               <a:t>あなたにしかできないこと — 笑顔、声かけ、気づき、寄り添い —</a:t>
             </a:r>
             <a:br/>
             <a:r>
+              <a:rPr/>
               <a:t>に、もっと時間を使えるようになる。</a:t>
             </a:r>
             <a:br/>
             <a:r>
+              <a:rPr/>
               <a:t>それが「AIと一緒に働く未来」です。</a:t>
             </a:r>
           </a:p>
@@ -7110,7 +7223,9 @@
           <a:bodyPr rtlCol="0" anchor="ctr"/>
           <a:lstStyle/>
           <a:p>
-            <a:pPr algn="ctr"/>
+            <a:pPr algn="ctr">
+              <a:defRPr/>
+            </a:pPr>
           </a:p>
         </p:txBody>
       </p:sp>
@@ -7155,7 +7270,9 @@
           <a:bodyPr rtlCol="0" anchor="ctr"/>
           <a:lstStyle/>
           <a:p>
-            <a:pPr algn="ctr"/>
+            <a:pPr algn="ctr">
+              <a:defRPr/>
+            </a:pPr>
           </a:p>
         </p:txBody>
       </p:sp>
@@ -7190,6 +7307,7 @@
               </a:defRPr>
             </a:pPr>
             <a:r>
+              <a:rPr/>
               <a:t>「今日聞いた話の中で、1つだけ誰かに伝えるとしたら、何を選びますか？」</a:t>
             </a:r>
           </a:p>
@@ -7204,7 +7322,7 @@
         <p:spPr>
           <a:xfrm>
             <a:off x="548640" y="4488180"/>
-            <a:ext cx="7772400" cy="83820"/>
+            <a:ext cx="7772400" cy="304799"/>
           </a:xfrm>
           <a:prstGeom prst="rect">
             <a:avLst/>
@@ -7227,6 +7345,7 @@
               <a:buChar char="●"/>
             </a:pPr>
             <a:r>
+              <a:rPr/>
               <a:t>日常業務の中で「これ、AIに手伝ってもらえないかな？」とアンテナを立ててみる</a:t>
             </a:r>
           </a:p>
@@ -7241,6 +7360,7 @@
               <a:buChar char="●"/>
             </a:pPr>
             <a:r>
+              <a:rPr/>
               <a:t>AIの答えに接したとき「本当かな？」と一度立ち止まってみる</a:t>
             </a:r>
           </a:p>
@@ -7255,6 +7375,7 @@
               <a:buChar char="●"/>
             </a:pPr>
             <a:r>
+              <a:rPr/>
               <a:t>わからないことがあれば、いつでも相談してください</a:t>
             </a:r>
           </a:p>
@@ -7317,6 +7438,7 @@
               </a:defRPr>
             </a:pPr>
             <a:r>
+              <a:rPr/>
               <a:t>参考文献</a:t>
             </a:r>
           </a:p>
@@ -7354,6 +7476,7 @@
               <a:buChar char="●"/>
             </a:pPr>
             <a:r>
+              <a:rPr/>
               <a:t>AMA (2026) — 医師のAI活用調査（80%超が臨床でAI活用）。IME 2026 Conference, University of Miami Miller School of Medicine. https://news.med.miami.edu/innovations-in-medical-education-2026-explores-the-power-of-ai/</a:t>
             </a:r>
           </a:p>
@@ -7368,6 +7491,7 @@
               <a:buChar char="●"/>
             </a:pPr>
             <a:r>
+              <a:rPr/>
               <a:t>AMA (2026) — Boost health AI training across medical education continuum. https://www.ama-assn.org/practice-management/digital-health/boost-health-ai-training-across-medical-education-continuum</a:t>
             </a:r>
           </a:p>
@@ -7382,6 +7506,7 @@
               <a:buChar char="●"/>
             </a:pPr>
             <a:r>
+              <a:rPr/>
               <a:t>Healthcare IT News (2026) — BJC Healthcare ACO, マルチAIエージェントによる臨床意思決定支援（HIMSS26発表）。https://www.healthcareitnews.com/news/how-multi-ai-agents-can-improve-clinical-decision-support</a:t>
             </a:r>
           </a:p>
@@ -7396,6 +7521,7 @@
               <a:buChar char="●"/>
             </a:pPr>
             <a:r>
+              <a:rPr/>
               <a:t>PNAS (2026) — LLMの認知バイアス増幅に関する研究（不作為バイアス・フレーミング効果）。https://www.pnas.org/doi/10.1073/pnas.2412015122</a:t>
             </a:r>
           </a:p>
@@ -7458,6 +7584,7 @@
               </a:defRPr>
             </a:pPr>
             <a:r>
+              <a:rPr/>
               <a:t>ファシリテーター向けメモ</a:t>
             </a:r>
           </a:p>
@@ -7495,6 +7622,7 @@
               <a:buChar char="●"/>
             </a:pPr>
             <a:r>
+              <a:rPr/>
               <a:t>[ ] プロジェクター or モニター</a:t>
             </a:r>
           </a:p>
@@ -7509,6 +7637,7 @@
               <a:buChar char="●"/>
             </a:pPr>
             <a:r>
+              <a:rPr/>
               <a:t>[ ] タイマー（グループワーク3分計測用）</a:t>
             </a:r>
           </a:p>
@@ -7523,6 +7652,7 @@
               <a:buChar char="●"/>
             </a:pPr>
             <a:r>
+              <a:rPr/>
               <a:t>[ ] 付箋（グループワーク用、任意）</a:t>
             </a:r>
           </a:p>
@@ -7560,6 +7690,7 @@
               <a:buChar char="●"/>
             </a:pPr>
             <a:r>
+              <a:rPr/>
               <a:t>スライド1: 「80%」の数字を最初に見せてインパクトを与える。「自分もAI使ったことある？」と問いかけて参加感を出す</a:t>
             </a:r>
           </a:p>
@@ -7574,6 +7705,7 @@
               <a:buChar char="●"/>
             </a:pPr>
             <a:r>
+              <a:rPr/>
               <a:t>スライド2: 「空気が読めない新人スタッフ」の例えは笑いを誘いやすい。場が和んだところで「でも仕事は速い」と続ける</a:t>
             </a:r>
           </a:p>
@@ -7588,6 +7720,7 @@
               <a:buChar char="●"/>
             </a:pPr>
             <a:r>
+              <a:rPr/>
               <a:t>スライド3: バイアスの話は難しくなりがちなので、必ず例え話で説明する。「転びそうな患者さん」の例は全職種がイメージしやすい</a:t>
             </a:r>
           </a:p>
@@ -7602,6 +7735,7 @@
               <a:buChar char="●"/>
             </a:pPr>
             <a:r>
+              <a:rPr/>
               <a:t>スライド4: 「AIは提案、人間が決定」を繰り返し強調する</a:t>
             </a:r>
           </a:p>
@@ -7616,6 +7750,7 @@
               <a:buChar char="●"/>
             </a:pPr>
             <a:r>
+              <a:rPr/>
               <a:t>スライド5: グループワークでは「正解はない」ことを最初に伝える。迷うこと自体が学び</a:t>
             </a:r>
           </a:p>
@@ -7630,6 +7765,7 @@
               <a:buChar char="●"/>
             </a:pPr>
             <a:r>
+              <a:rPr/>
               <a:t>スライド6: 最後のメッセージは落ち着いたトーンで。「あなたが大切」を心を込めて</a:t>
             </a:r>
           </a:p>
@@ -7667,6 +7803,7 @@
               <a:buChar char="●"/>
             </a:pPr>
             <a:r>
+              <a:rPr/>
               <a:t>3/21版：「AIエージェント」の概念紹介が中心（AIチームの比喩）</a:t>
             </a:r>
           </a:p>
@@ -7681,6 +7818,7 @@
               <a:buChar char="●"/>
             </a:pPr>
             <a:r>
+              <a:rPr/>
               <a:t>今回：「最新データで見るAIの光と影」がテーマ。AIの限界やバイアスにも踏み込んだ内容</a:t>
             </a:r>
           </a:p>
@@ -7695,6 +7833,7 @@
               <a:buChar char="●"/>
             </a:pPr>
             <a:r>
+              <a:rPr/>
               <a:t>両方受けた方には：「前回は"AIって何ができるか"、今回は"AIとどう付き合うか"」と伝える</a:t>
             </a:r>
           </a:p>

--- a/output/education/2026-03-26_ai-medical-education-integrated/ai-medical-education-integrated_slides_allstaff.pptx
+++ b/output/education/2026-03-26_ai-medical-education-integrated/ai-medical-education-integrated_slides_allstaff.pptx
@@ -11,9 +11,6 @@
     <p:sldId id="259" r:id="rId10"/>
     <p:sldId id="260" r:id="rId11"/>
     <p:sldId id="261" r:id="rId12"/>
-    <p:sldId id="262" r:id="rId13"/>
-    <p:sldId id="263" r:id="rId14"/>
-    <p:sldId id="264" r:id="rId15"/>
   </p:sldIdLst>
   <p:sldSz cx="9144000" cy="5143500" type="screen4x3"/>
   <p:notesSz cx="6858000" cy="9144000"/>
@@ -3112,8 +3109,8 @@
         </p:nvSpPr>
         <p:spPr>
           <a:xfrm>
-            <a:off x="457200" y="182880"/>
-            <a:ext cx="8229600" cy="548640"/>
+            <a:off x="457200" y="731520"/>
+            <a:ext cx="8229600" cy="640080"/>
           </a:xfrm>
           <a:prstGeom prst="rect">
             <a:avLst/>
@@ -3121,13 +3118,13 @@
           <a:noFill/>
         </p:spPr>
         <p:txBody>
-          <a:bodyPr wrap="square">
+          <a:bodyPr wrap="square" lIns="45720" rIns="45720" tIns="27432" bIns="27432">
             <a:spAutoFit/>
           </a:bodyPr>
           <a:lstStyle/>
           <a:p>
-            <a:pPr algn="l">
-              <a:defRPr sz="2200" b="1">
+            <a:pPr algn="ctr">
+              <a:defRPr sz="3200" b="1">
                 <a:solidFill>
                   <a:srgbClr val="FAF3E8"/>
                 </a:solidFill>
@@ -3135,8 +3132,7 @@
               </a:defRPr>
             </a:pPr>
             <a:r>
-              <a:rPr/>
-              <a:t>AI時代の医療者に求められること</a:t>
+              <a:t>AI × 医学教育</a:t>
             </a:r>
           </a:p>
         </p:txBody>
@@ -3149,8 +3145,8 @@
         </p:nvSpPr>
         <p:spPr>
           <a:xfrm>
-            <a:off x="548640" y="822960"/>
-            <a:ext cx="7772400" cy="320040"/>
+            <a:off x="457200" y="1463040"/>
+            <a:ext cx="8229600" cy="457200"/>
           </a:xfrm>
           <a:prstGeom prst="rect">
             <a:avLst/>
@@ -3158,36 +3154,78 @@
           <a:noFill/>
         </p:spPr>
         <p:txBody>
-          <a:bodyPr wrap="square">
+          <a:bodyPr wrap="square" lIns="45720" rIns="45720" tIns="27432" bIns="27432">
             <a:spAutoFit/>
           </a:bodyPr>
           <a:lstStyle/>
           <a:p>
-            <a:pPr algn="l">
-              <a:defRPr sz="1100" b="0">
-                <a:solidFill>
-                  <a:srgbClr val="FAF3E8"/>
+            <a:pPr algn="ctr">
+              <a:defRPr sz="1800" b="0">
+                <a:solidFill>
+                  <a:srgbClr val="D47B56"/>
                 </a:solidFill>
                 <a:latin typeface="Calibri"/>
               </a:defRPr>
             </a:pPr>
             <a:r>
-              <a:rPr/>
-              <a:t>対象: 全スタッフ（看護師・介護士・事務職員を含む）</a:t>
-            </a:r>
-          </a:p>
-        </p:txBody>
-      </p:sp>
-      <p:sp>
-        <p:nvSpPr>
-          <p:cNvPr id="4" name="TextBox 3"/>
+              <a:t>— 知っておきたい3つのこと</a:t>
+            </a:r>
+          </a:p>
+        </p:txBody>
+      </p:sp>
+      <p:sp>
+        <p:nvSpPr>
+          <p:cNvPr id="4" name="Rectangle 3"/>
+          <p:cNvSpPr/>
+          <p:nvPr/>
+        </p:nvSpPr>
+        <p:spPr>
+          <a:xfrm>
+            <a:off x="2743200" y="2103120"/>
+            <a:ext cx="3657600" cy="54864"/>
+          </a:xfrm>
+          <a:prstGeom prst="rect">
+            <a:avLst/>
+          </a:prstGeom>
+          <a:solidFill>
+            <a:srgbClr val="D47B56"/>
+          </a:solidFill>
+          <a:ln>
+            <a:noFill/>
+          </a:ln>
+        </p:spPr>
+        <p:style>
+          <a:lnRef idx="1">
+            <a:schemeClr val="accent1"/>
+          </a:lnRef>
+          <a:fillRef idx="3">
+            <a:schemeClr val="accent1"/>
+          </a:fillRef>
+          <a:effectRef idx="2">
+            <a:schemeClr val="accent1"/>
+          </a:effectRef>
+          <a:fontRef idx="minor">
+            <a:schemeClr val="lt1"/>
+          </a:fontRef>
+        </p:style>
+        <p:txBody>
+          <a:bodyPr rtlCol="0" anchor="ctr"/>
+          <a:lstStyle/>
+          <a:p>
+            <a:pPr algn="ctr"/>
+          </a:p>
+        </p:txBody>
+      </p:sp>
+      <p:sp>
+        <p:nvSpPr>
+          <p:cNvPr id="5" name="TextBox 4"/>
           <p:cNvSpPr txBox="1"/>
           <p:nvPr/>
         </p:nvSpPr>
         <p:spPr>
           <a:xfrm>
-            <a:off x="548640" y="1143000"/>
-            <a:ext cx="7772400" cy="320040"/>
+            <a:off x="457200" y="2468880"/>
+            <a:ext cx="8229600" cy="274320"/>
           </a:xfrm>
           <a:prstGeom prst="rect">
             <a:avLst/>
@@ -3195,36 +3233,78 @@
           <a:noFill/>
         </p:spPr>
         <p:txBody>
-          <a:bodyPr wrap="square">
+          <a:bodyPr wrap="square" lIns="45720" rIns="45720" tIns="27432" bIns="27432">
             <a:spAutoFit/>
           </a:bodyPr>
           <a:lstStyle/>
           <a:p>
-            <a:pPr algn="l">
-              <a:defRPr sz="1100" b="0">
-                <a:solidFill>
-                  <a:srgbClr val="FAF3E8"/>
+            <a:pPr algn="ctr">
+              <a:defRPr sz="1200" b="0">
+                <a:solidFill>
+                  <a:srgbClr val="9E8A7E"/>
                 </a:solidFill>
                 <a:latin typeface="Calibri"/>
               </a:defRPr>
             </a:pPr>
             <a:r>
-              <a:rPr/>
-              <a:t>時間: 15分</a:t>
-            </a:r>
-          </a:p>
-        </p:txBody>
-      </p:sp>
-      <p:sp>
-        <p:nvSpPr>
-          <p:cNvPr id="5" name="TextBox 4"/>
+              <a:t>全スタッフ向け 20分</a:t>
+            </a:r>
+          </a:p>
+        </p:txBody>
+      </p:sp>
+      <p:sp>
+        <p:nvSpPr>
+          <p:cNvPr id="6" name="Rectangle 5"/>
+          <p:cNvSpPr/>
+          <p:nvPr/>
+        </p:nvSpPr>
+        <p:spPr>
+          <a:xfrm>
+            <a:off x="1371600" y="3017520"/>
+            <a:ext cx="6400800" cy="1097280"/>
+          </a:xfrm>
+          <a:prstGeom prst="rect">
+            <a:avLst/>
+          </a:prstGeom>
+          <a:solidFill>
+            <a:srgbClr val="D47B56"/>
+          </a:solidFill>
+          <a:ln>
+            <a:noFill/>
+          </a:ln>
+        </p:spPr>
+        <p:style>
+          <a:lnRef idx="1">
+            <a:schemeClr val="accent1"/>
+          </a:lnRef>
+          <a:fillRef idx="3">
+            <a:schemeClr val="accent1"/>
+          </a:fillRef>
+          <a:effectRef idx="2">
+            <a:schemeClr val="accent1"/>
+          </a:effectRef>
+          <a:fontRef idx="minor">
+            <a:schemeClr val="lt1"/>
+          </a:fontRef>
+        </p:style>
+        <p:txBody>
+          <a:bodyPr rtlCol="0" anchor="ctr"/>
+          <a:lstStyle/>
+          <a:p>
+            <a:pPr algn="ctr"/>
+          </a:p>
+        </p:txBody>
+      </p:sp>
+      <p:sp>
+        <p:nvSpPr>
+          <p:cNvPr id="7" name="TextBox 6"/>
           <p:cNvSpPr txBox="1"/>
           <p:nvPr/>
         </p:nvSpPr>
         <p:spPr>
           <a:xfrm>
-            <a:off x="548640" y="1463040"/>
-            <a:ext cx="7772400" cy="320040"/>
+            <a:off x="1371600" y="3108960"/>
+            <a:ext cx="6400800" cy="457200"/>
           </a:xfrm>
           <a:prstGeom prst="rect">
             <a:avLst/>
@@ -3232,36 +3312,35 @@
           <a:noFill/>
         </p:spPr>
         <p:txBody>
-          <a:bodyPr wrap="square">
+          <a:bodyPr wrap="square" lIns="45720" rIns="45720" tIns="27432" bIns="27432">
             <a:spAutoFit/>
           </a:bodyPr>
           <a:lstStyle/>
           <a:p>
-            <a:pPr algn="l">
-              <a:defRPr sz="1100" b="0">
-                <a:solidFill>
-                  <a:srgbClr val="FAF3E8"/>
+            <a:pPr algn="ctr">
+              <a:defRPr sz="1800" b="1">
+                <a:solidFill>
+                  <a:srgbClr val="7A5C4F"/>
                 </a:solidFill>
                 <a:latin typeface="Calibri"/>
               </a:defRPr>
             </a:pPr>
             <a:r>
-              <a:rPr/>
-              <a:t>日付: 2026-03-26</a:t>
-            </a:r>
-          </a:p>
-        </p:txBody>
-      </p:sp>
-      <p:sp>
-        <p:nvSpPr>
-          <p:cNvPr id="6" name="TextBox 5"/>
+              <a:t>80%超の医師がAIを臨床で使い始めている</a:t>
+            </a:r>
+          </a:p>
+        </p:txBody>
+      </p:sp>
+      <p:sp>
+        <p:nvSpPr>
+          <p:cNvPr id="8" name="TextBox 7"/>
           <p:cNvSpPr txBox="1"/>
           <p:nvPr/>
         </p:nvSpPr>
         <p:spPr>
           <a:xfrm>
-            <a:off x="548640" y="1801368"/>
-            <a:ext cx="7772400" cy="320040"/>
+            <a:off x="1371600" y="3566160"/>
+            <a:ext cx="6400800" cy="365760"/>
           </a:xfrm>
           <a:prstGeom prst="rect">
             <a:avLst/>
@@ -3269,59 +3348,21 @@
           <a:noFill/>
         </p:spPr>
         <p:txBody>
-          <a:bodyPr wrap="square">
+          <a:bodyPr wrap="square" lIns="45720" rIns="45720" tIns="27432" bIns="27432">
             <a:spAutoFit/>
           </a:bodyPr>
           <a:lstStyle/>
           <a:p>
-            <a:pPr algn="l">
-              <a:defRPr sz="1100" b="0">
-                <a:solidFill>
-                  <a:srgbClr val="FAF3E8"/>
+            <a:pPr algn="ctr">
+              <a:defRPr sz="1400" b="0">
+                <a:solidFill>
+                  <a:srgbClr val="7A5C4F"/>
                 </a:solidFill>
                 <a:latin typeface="Calibri"/>
               </a:defRPr>
             </a:pPr>
             <a:r>
-              <a:rPr/>
-              <a:t>IDモデル: ガニェの9教授事象</a:t>
-            </a:r>
-          </a:p>
-        </p:txBody>
-      </p:sp>
-      <p:sp>
-        <p:nvSpPr>
-          <p:cNvPr id="7" name="TextBox 6"/>
-          <p:cNvSpPr txBox="1"/>
-          <p:nvPr/>
-        </p:nvSpPr>
-        <p:spPr>
-          <a:xfrm>
-            <a:off x="548640" y="2139696"/>
-            <a:ext cx="7772400" cy="320040"/>
-          </a:xfrm>
-          <a:prstGeom prst="rect">
-            <a:avLst/>
-          </a:prstGeom>
-          <a:noFill/>
-        </p:spPr>
-        <p:txBody>
-          <a:bodyPr wrap="square">
-            <a:spAutoFit/>
-          </a:bodyPr>
-          <a:lstStyle/>
-          <a:p>
-            <a:pPr algn="l">
-              <a:defRPr sz="1100" b="0">
-                <a:solidFill>
-                  <a:srgbClr val="FAF3E8"/>
-                </a:solidFill>
-                <a:latin typeface="Calibri"/>
-              </a:defRPr>
-            </a:pPr>
-            <a:r>
-              <a:rPr/>
-              <a:t>ブルーム: 理解 → 適用 → 評価</a:t>
+              <a:t>でも「使い方」を教わった人はほとんどいない</a:t>
             </a:r>
           </a:p>
         </p:txBody>
@@ -3360,8 +3401,8 @@
         </p:nvSpPr>
         <p:spPr>
           <a:xfrm>
-            <a:off x="457200" y="182880"/>
-            <a:ext cx="8229600" cy="548640"/>
+            <a:off x="457200" y="274320"/>
+            <a:ext cx="8229600" cy="457200"/>
           </a:xfrm>
           <a:prstGeom prst="rect">
             <a:avLst/>
@@ -3369,7 +3410,7 @@
           <a:noFill/>
         </p:spPr>
         <p:txBody>
-          <a:bodyPr wrap="square">
+          <a:bodyPr wrap="square" lIns="45720" rIns="45720" tIns="27432" bIns="27432">
             <a:spAutoFit/>
           </a:bodyPr>
           <a:lstStyle/>
@@ -3383,8 +3424,7 @@
               </a:defRPr>
             </a:pPr>
             <a:r>
-              <a:rPr/>
-              <a:t>スライド1: 知っていますか？この数字（0-2分）</a:t>
+              <a:t>AIにできること・できないこと</a:t>
             </a:r>
           </a:p>
         </p:txBody>
@@ -3397,8 +3437,8 @@
         </p:nvSpPr>
         <p:spPr>
           <a:xfrm>
-            <a:off x="548640" y="822960"/>
-            <a:ext cx="54864" cy="457200"/>
+            <a:off x="457200" y="777240"/>
+            <a:ext cx="1828800" cy="54864"/>
           </a:xfrm>
           <a:prstGeom prst="rect">
             <a:avLst/>
@@ -3428,9 +3468,7 @@
           <a:bodyPr rtlCol="0" anchor="ctr"/>
           <a:lstStyle/>
           <a:p>
-            <a:pPr algn="ctr">
-              <a:defRPr/>
-            </a:pPr>
+            <a:pPr algn="ctr"/>
           </a:p>
         </p:txBody>
       </p:sp>
@@ -3442,8 +3480,369 @@
         </p:nvSpPr>
         <p:spPr>
           <a:xfrm>
-            <a:off x="658368" y="822960"/>
-            <a:ext cx="7662672" cy="457200"/>
+            <a:off x="457200" y="1097280"/>
+            <a:ext cx="3931920" cy="2743200"/>
+          </a:xfrm>
+          <a:prstGeom prst="rect">
+            <a:avLst/>
+          </a:prstGeom>
+          <a:solidFill>
+            <a:srgbClr val="D47B56"/>
+          </a:solidFill>
+          <a:ln>
+            <a:noFill/>
+          </a:ln>
+        </p:spPr>
+        <p:style>
+          <a:lnRef idx="1">
+            <a:schemeClr val="accent1"/>
+          </a:lnRef>
+          <a:fillRef idx="3">
+            <a:schemeClr val="accent1"/>
+          </a:fillRef>
+          <a:effectRef idx="2">
+            <a:schemeClr val="accent1"/>
+          </a:effectRef>
+          <a:fontRef idx="minor">
+            <a:schemeClr val="lt1"/>
+          </a:fontRef>
+        </p:style>
+        <p:txBody>
+          <a:bodyPr rtlCol="0" anchor="ctr"/>
+          <a:lstStyle/>
+          <a:p>
+            <a:pPr algn="ctr"/>
+          </a:p>
+        </p:txBody>
+      </p:sp>
+      <p:sp>
+        <p:nvSpPr>
+          <p:cNvPr id="5" name="TextBox 4"/>
+          <p:cNvSpPr txBox="1"/>
+          <p:nvPr/>
+        </p:nvSpPr>
+        <p:spPr>
+          <a:xfrm>
+            <a:off x="457200" y="1143000"/>
+            <a:ext cx="3931920" cy="365760"/>
+          </a:xfrm>
+          <a:prstGeom prst="rect">
+            <a:avLst/>
+          </a:prstGeom>
+          <a:noFill/>
+        </p:spPr>
+        <p:txBody>
+          <a:bodyPr wrap="square" lIns="45720" rIns="45720" tIns="27432" bIns="27432">
+            <a:spAutoFit/>
+          </a:bodyPr>
+          <a:lstStyle/>
+          <a:p>
+            <a:pPr algn="ctr">
+              <a:defRPr sz="1600" b="1">
+                <a:solidFill>
+                  <a:srgbClr val="7A5C4F"/>
+                </a:solidFill>
+                <a:latin typeface="Calibri"/>
+              </a:defRPr>
+            </a:pPr>
+            <a:r>
+              <a:t>得意なこと</a:t>
+            </a:r>
+          </a:p>
+        </p:txBody>
+      </p:sp>
+      <p:sp>
+        <p:nvSpPr>
+          <p:cNvPr id="6" name="TextBox 5"/>
+          <p:cNvSpPr txBox="1"/>
+          <p:nvPr/>
+        </p:nvSpPr>
+        <p:spPr>
+          <a:xfrm>
+            <a:off x="640080" y="1554480"/>
+            <a:ext cx="3474720" cy="1828800"/>
+          </a:xfrm>
+          <a:prstGeom prst="rect">
+            <a:avLst/>
+          </a:prstGeom>
+          <a:noFill/>
+        </p:spPr>
+        <p:txBody>
+          <a:bodyPr wrap="square" lIns="45720" rIns="45720" tIns="27432" bIns="27432">
+            <a:spAutoFit/>
+          </a:bodyPr>
+          <a:lstStyle/>
+          <a:p>
+            <a:pPr>
+              <a:defRPr sz="1300">
+                <a:solidFill>
+                  <a:srgbClr val="7A5C4F"/>
+                </a:solidFill>
+                <a:latin typeface="Calibri"/>
+              </a:defRPr>
+              <a:buChar char="●"/>
+            </a:pPr>
+            <a:r>
+              <a:t>大量の情報を素早く整理</a:t>
+            </a:r>
+          </a:p>
+          <a:p>
+            <a:pPr>
+              <a:defRPr sz="1300">
+                <a:solidFill>
+                  <a:srgbClr val="7A5C4F"/>
+                </a:solidFill>
+                <a:latin typeface="Calibri"/>
+              </a:defRPr>
+              <a:buChar char="●"/>
+            </a:pPr>
+            <a:r>
+              <a:t>文章の要約・翻訳</a:t>
+            </a:r>
+          </a:p>
+          <a:p>
+            <a:pPr>
+              <a:defRPr sz="1300">
+                <a:solidFill>
+                  <a:srgbClr val="7A5C4F"/>
+                </a:solidFill>
+                <a:latin typeface="Calibri"/>
+              </a:defRPr>
+              <a:buChar char="●"/>
+            </a:pPr>
+            <a:r>
+              <a:t>パターンの認識（画像・数値）</a:t>
+            </a:r>
+          </a:p>
+          <a:p>
+            <a:pPr>
+              <a:defRPr sz="1300">
+                <a:solidFill>
+                  <a:srgbClr val="7A5C4F"/>
+                </a:solidFill>
+                <a:latin typeface="Calibri"/>
+              </a:defRPr>
+              <a:buChar char="●"/>
+            </a:pPr>
+            <a:r>
+              <a:t>24時間365日、疲れない</a:t>
+            </a:r>
+          </a:p>
+        </p:txBody>
+      </p:sp>
+      <p:sp>
+        <p:nvSpPr>
+          <p:cNvPr id="7" name="Rectangle 6"/>
+          <p:cNvSpPr/>
+          <p:nvPr/>
+        </p:nvSpPr>
+        <p:spPr>
+          <a:xfrm>
+            <a:off x="4754880" y="1097280"/>
+            <a:ext cx="4114800" cy="2743200"/>
+          </a:xfrm>
+          <a:prstGeom prst="rect">
+            <a:avLst/>
+          </a:prstGeom>
+          <a:solidFill>
+            <a:srgbClr val="F5EEE5"/>
+          </a:solidFill>
+          <a:ln w="12700">
+            <a:solidFill>
+              <a:srgbClr val="9E8A7E"/>
+            </a:solidFill>
+          </a:ln>
+        </p:spPr>
+        <p:style>
+          <a:lnRef idx="1">
+            <a:schemeClr val="accent1"/>
+          </a:lnRef>
+          <a:fillRef idx="3">
+            <a:schemeClr val="accent1"/>
+          </a:fillRef>
+          <a:effectRef idx="2">
+            <a:schemeClr val="accent1"/>
+          </a:effectRef>
+          <a:fontRef idx="minor">
+            <a:schemeClr val="lt1"/>
+          </a:fontRef>
+        </p:style>
+        <p:txBody>
+          <a:bodyPr rtlCol="0" anchor="ctr"/>
+          <a:lstStyle/>
+          <a:p>
+            <a:pPr algn="ctr"/>
+          </a:p>
+        </p:txBody>
+      </p:sp>
+      <p:sp>
+        <p:nvSpPr>
+          <p:cNvPr id="8" name="TextBox 7"/>
+          <p:cNvSpPr txBox="1"/>
+          <p:nvPr/>
+        </p:nvSpPr>
+        <p:spPr>
+          <a:xfrm>
+            <a:off x="4754880" y="1143000"/>
+            <a:ext cx="4114800" cy="365760"/>
+          </a:xfrm>
+          <a:prstGeom prst="rect">
+            <a:avLst/>
+          </a:prstGeom>
+          <a:noFill/>
+        </p:spPr>
+        <p:txBody>
+          <a:bodyPr wrap="square" lIns="45720" rIns="45720" tIns="27432" bIns="27432">
+            <a:spAutoFit/>
+          </a:bodyPr>
+          <a:lstStyle/>
+          <a:p>
+            <a:pPr algn="ctr">
+              <a:defRPr sz="1600" b="1">
+                <a:solidFill>
+                  <a:srgbClr val="3A3A3A"/>
+                </a:solidFill>
+                <a:latin typeface="Calibri"/>
+              </a:defRPr>
+            </a:pPr>
+            <a:r>
+              <a:t>苦手なこと</a:t>
+            </a:r>
+          </a:p>
+        </p:txBody>
+      </p:sp>
+      <p:sp>
+        <p:nvSpPr>
+          <p:cNvPr id="9" name="TextBox 8"/>
+          <p:cNvSpPr txBox="1"/>
+          <p:nvPr/>
+        </p:nvSpPr>
+        <p:spPr>
+          <a:xfrm>
+            <a:off x="4937760" y="1554480"/>
+            <a:ext cx="3657600" cy="1828800"/>
+          </a:xfrm>
+          <a:prstGeom prst="rect">
+            <a:avLst/>
+          </a:prstGeom>
+          <a:noFill/>
+        </p:spPr>
+        <p:txBody>
+          <a:bodyPr wrap="square" lIns="45720" rIns="45720" tIns="27432" bIns="27432">
+            <a:spAutoFit/>
+          </a:bodyPr>
+          <a:lstStyle/>
+          <a:p>
+            <a:pPr>
+              <a:defRPr sz="1300">
+                <a:solidFill>
+                  <a:srgbClr val="3A3A3A"/>
+                </a:solidFill>
+                <a:latin typeface="Calibri"/>
+              </a:defRPr>
+              <a:buChar char="●"/>
+            </a:pPr>
+            <a:r>
+              <a:t>患者さんの気持ちを理解する</a:t>
+            </a:r>
+          </a:p>
+          <a:p>
+            <a:pPr>
+              <a:defRPr sz="1300">
+                <a:solidFill>
+                  <a:srgbClr val="3A3A3A"/>
+                </a:solidFill>
+                <a:latin typeface="Calibri"/>
+              </a:defRPr>
+              <a:buChar char="●"/>
+            </a:pPr>
+            <a:r>
+              <a:t>「いつもと違う」に気づく</a:t>
+            </a:r>
+          </a:p>
+          <a:p>
+            <a:pPr>
+              <a:defRPr sz="1300">
+                <a:solidFill>
+                  <a:srgbClr val="3A3A3A"/>
+                </a:solidFill>
+                <a:latin typeface="Calibri"/>
+              </a:defRPr>
+              <a:buChar char="●"/>
+            </a:pPr>
+            <a:r>
+              <a:t>責任を持って判断する</a:t>
+            </a:r>
+          </a:p>
+          <a:p>
+            <a:pPr>
+              <a:defRPr sz="1300">
+                <a:solidFill>
+                  <a:srgbClr val="3A3A3A"/>
+                </a:solidFill>
+                <a:latin typeface="Calibri"/>
+              </a:defRPr>
+              <a:buChar char="●"/>
+            </a:pPr>
+            <a:r>
+              <a:t>嘘をつくことがある（ハルシネーション）</a:t>
+            </a:r>
+          </a:p>
+        </p:txBody>
+      </p:sp>
+      <p:sp>
+        <p:nvSpPr>
+          <p:cNvPr id="10" name="Rectangle 9"/>
+          <p:cNvSpPr/>
+          <p:nvPr/>
+        </p:nvSpPr>
+        <p:spPr>
+          <a:xfrm>
+            <a:off x="457200" y="4206240"/>
+            <a:ext cx="54864" cy="548640"/>
+          </a:xfrm>
+          <a:prstGeom prst="rect">
+            <a:avLst/>
+          </a:prstGeom>
+          <a:solidFill>
+            <a:srgbClr val="D47B56"/>
+          </a:solidFill>
+          <a:ln>
+            <a:noFill/>
+          </a:ln>
+        </p:spPr>
+        <p:style>
+          <a:lnRef idx="1">
+            <a:schemeClr val="accent1"/>
+          </a:lnRef>
+          <a:fillRef idx="3">
+            <a:schemeClr val="accent1"/>
+          </a:fillRef>
+          <a:effectRef idx="2">
+            <a:schemeClr val="accent1"/>
+          </a:effectRef>
+          <a:fontRef idx="minor">
+            <a:schemeClr val="lt1"/>
+          </a:fontRef>
+        </p:style>
+        <p:txBody>
+          <a:bodyPr rtlCol="0" anchor="ctr"/>
+          <a:lstStyle/>
+          <a:p>
+            <a:pPr algn="ctr"/>
+          </a:p>
+        </p:txBody>
+      </p:sp>
+      <p:sp>
+        <p:nvSpPr>
+          <p:cNvPr id="11" name="Rectangle 10"/>
+          <p:cNvSpPr/>
+          <p:nvPr/>
+        </p:nvSpPr>
+        <p:spPr>
+          <a:xfrm>
+            <a:off x="566928" y="4206240"/>
+            <a:ext cx="8119872" cy="548640"/>
           </a:xfrm>
           <a:prstGeom prst="rect">
             <a:avLst/>
@@ -3475,22 +3874,20 @@
           <a:bodyPr rtlCol="0" anchor="ctr"/>
           <a:lstStyle/>
           <a:p>
-            <a:pPr algn="ctr">
-              <a:defRPr/>
-            </a:pPr>
-          </a:p>
-        </p:txBody>
-      </p:sp>
-      <p:sp>
-        <p:nvSpPr>
-          <p:cNvPr id="5" name="TextBox 4"/>
+            <a:pPr algn="ctr"/>
+          </a:p>
+        </p:txBody>
+      </p:sp>
+      <p:sp>
+        <p:nvSpPr>
+          <p:cNvPr id="12" name="TextBox 11"/>
           <p:cNvSpPr txBox="1"/>
           <p:nvPr/>
         </p:nvSpPr>
         <p:spPr>
           <a:xfrm>
-            <a:off x="777240" y="896112"/>
-            <a:ext cx="7406640" cy="310896"/>
+            <a:off x="685800" y="4279392"/>
+            <a:ext cx="7863840" cy="402335"/>
           </a:xfrm>
           <a:prstGeom prst="rect">
             <a:avLst/>
@@ -3498,13 +3895,13 @@
           <a:noFill/>
         </p:spPr>
         <p:txBody>
-          <a:bodyPr wrap="square">
+          <a:bodyPr wrap="square" lIns="45720" rIns="45720" tIns="27432" bIns="27432">
             <a:spAutoFit/>
           </a:bodyPr>
           <a:lstStyle/>
           <a:p>
             <a:pPr algn="l">
-              <a:defRPr sz="1100" b="0">
+              <a:defRPr sz="1200" b="0">
                 <a:solidFill>
                   <a:srgbClr val="3A3A3A"/>
                 </a:solidFill>
@@ -3512,310 +3909,11 @@
               </a:defRPr>
             </a:pPr>
             <a:r>
-              <a:rPr/>
-              <a:t>「病院でAIを使っている医師が、80%を超えました。」</a:t>
+              <a:t>AIは「道具」であって「判断者」ではない。</a:t>
             </a:r>
             <a:br/>
             <a:r>
-              <a:rPr/>
-              <a:t>— AMA（アメリカ医師会）2026年調査より</a:t>
-            </a:r>
-          </a:p>
-        </p:txBody>
-      </p:sp>
-      <p:sp>
-        <p:nvSpPr>
-          <p:cNvPr id="6" name="TextBox 5"/>
-          <p:cNvSpPr txBox="1"/>
-          <p:nvPr/>
-        </p:nvSpPr>
-        <p:spPr>
-          <a:xfrm>
-            <a:off x="548640" y="1417320"/>
-            <a:ext cx="7772400" cy="640080"/>
-          </a:xfrm>
-          <a:prstGeom prst="rect">
-            <a:avLst/>
-          </a:prstGeom>
-          <a:noFill/>
-        </p:spPr>
-        <p:txBody>
-          <a:bodyPr wrap="square">
-            <a:spAutoFit/>
-          </a:bodyPr>
-          <a:lstStyle/>
-          <a:p>
-            <a:pPr>
-              <a:defRPr sz="1200">
-                <a:solidFill>
-                  <a:srgbClr val="3A3A3A"/>
-                </a:solidFill>
-                <a:latin typeface="Calibri"/>
-              </a:defRPr>
-              <a:buChar char="●"/>
-            </a:pPr>
-            <a:r>
-              <a:rPr/>
-              <a:t>2023年には約40%だったのが、たった3年で2倍に</a:t>
-            </a:r>
-          </a:p>
-          <a:p>
-            <a:pPr>
-              <a:defRPr sz="1200">
-                <a:solidFill>
-                  <a:srgbClr val="3A3A3A"/>
-                </a:solidFill>
-                <a:latin typeface="Calibri"/>
-              </a:defRPr>
-              <a:buChar char="●"/>
-            </a:pPr>
-            <a:r>
-              <a:rPr/>
-              <a:t>そのうち76%以上が「AIのおかげで診療の質が上がった」と回答</a:t>
-            </a:r>
-          </a:p>
-        </p:txBody>
-      </p:sp>
-      <p:sp>
-        <p:nvSpPr>
-          <p:cNvPr id="7" name="Rectangle 6"/>
-          <p:cNvSpPr/>
-          <p:nvPr/>
-        </p:nvSpPr>
-        <p:spPr>
-          <a:xfrm>
-            <a:off x="548640" y="2148840"/>
-            <a:ext cx="54864" cy="630326"/>
-          </a:xfrm>
-          <a:prstGeom prst="rect">
-            <a:avLst/>
-          </a:prstGeom>
-          <a:solidFill>
-            <a:srgbClr val="D47B56"/>
-          </a:solidFill>
-          <a:ln>
-            <a:noFill/>
-          </a:ln>
-        </p:spPr>
-        <p:style>
-          <a:lnRef idx="1">
-            <a:schemeClr val="accent1"/>
-          </a:lnRef>
-          <a:fillRef idx="3">
-            <a:schemeClr val="accent1"/>
-          </a:fillRef>
-          <a:effectRef idx="2">
-            <a:schemeClr val="accent1"/>
-          </a:effectRef>
-          <a:fontRef idx="minor">
-            <a:schemeClr val="lt1"/>
-          </a:fontRef>
-        </p:style>
-        <p:txBody>
-          <a:bodyPr rtlCol="0" anchor="ctr"/>
-          <a:lstStyle/>
-          <a:p>
-            <a:pPr algn="ctr">
-              <a:defRPr/>
-            </a:pPr>
-          </a:p>
-        </p:txBody>
-      </p:sp>
-      <p:sp>
-        <p:nvSpPr>
-          <p:cNvPr id="8" name="Rectangle 7"/>
-          <p:cNvSpPr/>
-          <p:nvPr/>
-        </p:nvSpPr>
-        <p:spPr>
-          <a:xfrm>
-            <a:off x="658368" y="2148840"/>
-            <a:ext cx="7662672" cy="630326"/>
-          </a:xfrm>
-          <a:prstGeom prst="rect">
-            <a:avLst/>
-          </a:prstGeom>
-          <a:solidFill>
-            <a:srgbClr val="FFFFFF"/>
-          </a:solidFill>
-          <a:ln w="12700">
-            <a:solidFill>
-              <a:srgbClr val="A7BEAE"/>
-            </a:solidFill>
-          </a:ln>
-        </p:spPr>
-        <p:style>
-          <a:lnRef idx="1">
-            <a:schemeClr val="accent1"/>
-          </a:lnRef>
-          <a:fillRef idx="3">
-            <a:schemeClr val="accent1"/>
-          </a:fillRef>
-          <a:effectRef idx="2">
-            <a:schemeClr val="accent1"/>
-          </a:effectRef>
-          <a:fontRef idx="minor">
-            <a:schemeClr val="lt1"/>
-          </a:fontRef>
-        </p:style>
-        <p:txBody>
-          <a:bodyPr rtlCol="0" anchor="ctr"/>
-          <a:lstStyle/>
-          <a:p>
-            <a:pPr algn="ctr">
-              <a:defRPr/>
-            </a:pPr>
-          </a:p>
-        </p:txBody>
-      </p:sp>
-      <p:sp>
-        <p:nvSpPr>
-          <p:cNvPr id="9" name="TextBox 8"/>
-          <p:cNvSpPr txBox="1"/>
-          <p:nvPr/>
-        </p:nvSpPr>
-        <p:spPr>
-          <a:xfrm>
-            <a:off x="777240" y="2221992"/>
-            <a:ext cx="7406640" cy="484022"/>
-          </a:xfrm>
-          <a:prstGeom prst="rect">
-            <a:avLst/>
-          </a:prstGeom>
-          <a:noFill/>
-        </p:spPr>
-        <p:txBody>
-          <a:bodyPr wrap="square">
-            <a:spAutoFit/>
-          </a:bodyPr>
-          <a:lstStyle/>
-          <a:p>
-            <a:pPr algn="l">
-              <a:defRPr sz="1100" b="0">
-                <a:solidFill>
-                  <a:srgbClr val="3A3A3A"/>
-                </a:solidFill>
-                <a:latin typeface="Georgia"/>
-              </a:defRPr>
-            </a:pPr>
-            <a:r>
-              <a:rPr/>
-              <a:t>「AIはもう"未来の話"ではなく、"今の話"です。</a:t>
-            </a:r>
-            <a:br/>
-            <a:r>
-              <a:rPr/>
-              <a:t>でも、AIって本当にすごいの？ 怖くないの？</a:t>
-            </a:r>
-            <a:br/>
-            <a:r>
-              <a:rPr/>
-              <a:t>今日の15分で、一緒に考えましょう。」</a:t>
-            </a:r>
-          </a:p>
-        </p:txBody>
-      </p:sp>
-      <p:sp>
-        <p:nvSpPr>
-          <p:cNvPr id="10" name="TextBox 9"/>
-          <p:cNvSpPr txBox="1"/>
-          <p:nvPr/>
-        </p:nvSpPr>
-        <p:spPr>
-          <a:xfrm>
-            <a:off x="548640" y="2916326"/>
-            <a:ext cx="7772400" cy="320040"/>
-          </a:xfrm>
-          <a:prstGeom prst="rect">
-            <a:avLst/>
-          </a:prstGeom>
-          <a:noFill/>
-        </p:spPr>
-        <p:txBody>
-          <a:bodyPr wrap="square">
-            <a:spAutoFit/>
-          </a:bodyPr>
-          <a:lstStyle/>
-          <a:p>
-            <a:pPr algn="l">
-              <a:defRPr sz="1100" b="0">
-                <a:solidFill>
-                  <a:srgbClr val="3A3A3A"/>
-                </a:solidFill>
-                <a:latin typeface="Calibri"/>
-              </a:defRPr>
-            </a:pPr>
-            <a:r>
-              <a:rPr/>
-              <a:t>この15分の後、あなたは：</a:t>
-            </a:r>
-          </a:p>
-        </p:txBody>
-      </p:sp>
-      <p:sp>
-        <p:nvSpPr>
-          <p:cNvPr id="11" name="TextBox 10"/>
-          <p:cNvSpPr txBox="1"/>
-          <p:nvPr/>
-        </p:nvSpPr>
-        <p:spPr>
-          <a:xfrm>
-            <a:off x="548640" y="3236366"/>
-            <a:ext cx="7772400" cy="914399"/>
-          </a:xfrm>
-          <a:prstGeom prst="rect">
-            <a:avLst/>
-          </a:prstGeom>
-          <a:noFill/>
-        </p:spPr>
-        <p:txBody>
-          <a:bodyPr wrap="square">
-            <a:spAutoFit/>
-          </a:bodyPr>
-          <a:lstStyle/>
-          <a:p>
-            <a:pPr>
-              <a:defRPr sz="1200">
-                <a:solidFill>
-                  <a:srgbClr val="3A3A3A"/>
-                </a:solidFill>
-                <a:latin typeface="Calibri"/>
-              </a:defRPr>
-              <a:buChar char="●"/>
-            </a:pPr>
-            <a:r>
-              <a:rPr/>
-              <a:t>AIの得意なこと・苦手なことがわかる</a:t>
-            </a:r>
-          </a:p>
-          <a:p>
-            <a:pPr>
-              <a:defRPr sz="1200">
-                <a:solidFill>
-                  <a:srgbClr val="3A3A3A"/>
-                </a:solidFill>
-                <a:latin typeface="Calibri"/>
-              </a:defRPr>
-              <a:buChar char="●"/>
-            </a:pPr>
-            <a:r>
-              <a:rPr/>
-              <a:t>AIが間違える理由をイメージできる</a:t>
-            </a:r>
-          </a:p>
-          <a:p>
-            <a:pPr>
-              <a:defRPr sz="1200">
-                <a:solidFill>
-                  <a:srgbClr val="3A3A3A"/>
-                </a:solidFill>
-                <a:latin typeface="Calibri"/>
-              </a:defRPr>
-              <a:buChar char="●"/>
-            </a:pPr>
-            <a:r>
-              <a:rPr/>
-              <a:t>自分の仕事でAIとどう付き合うか考えられる</a:t>
+              <a:t>使う人の責任と判断が常に必要です。</a:t>
             </a:r>
           </a:p>
         </p:txBody>
@@ -3854,8 +3952,8 @@
         </p:nvSpPr>
         <p:spPr>
           <a:xfrm>
-            <a:off x="457200" y="182880"/>
-            <a:ext cx="8229600" cy="548640"/>
+            <a:off x="457200" y="274320"/>
+            <a:ext cx="8229600" cy="457200"/>
           </a:xfrm>
           <a:prstGeom prst="rect">
             <a:avLst/>
@@ -3863,7 +3961,7 @@
           <a:noFill/>
         </p:spPr>
         <p:txBody>
-          <a:bodyPr wrap="square">
+          <a:bodyPr wrap="square" lIns="45720" rIns="45720" tIns="27432" bIns="27432">
             <a:spAutoFit/>
           </a:bodyPr>
           <a:lstStyle/>
@@ -3877,674 +3975,21 @@
               </a:defRPr>
             </a:pPr>
             <a:r>
-              <a:rPr/>
-              <a:t>スライド2: AIの「得意」と「苦手」（2-5分）</a:t>
-            </a:r>
-          </a:p>
-        </p:txBody>
-      </p:sp>
-      <p:graphicFrame>
-        <p:nvGraphicFramePr>
-          <p:cNvPr id="3" name="Table 2"/>
-          <p:cNvGraphicFramePr>
-            <a:graphicFrameLocks noGrp="1"/>
-          </p:cNvGraphicFramePr>
-          <p:nvPr/>
-        </p:nvGraphicFramePr>
-        <p:xfrm>
-          <a:off x="548640" y="822960"/>
-          <a:ext cx="7772400" cy="1645919"/>
-        </p:xfrm>
-        <a:graphic>
-          <a:graphicData uri="http://schemas.openxmlformats.org/drawingml/2006/table">
-            <a:tbl>
-              <a:tblPr firstRow="1" bandRow="1">
-                <a:tableStyleId>{5C22544A-7EE6-4342-B048-85BDC9FD1C3A}</a:tableStyleId>
-              </a:tblPr>
-              <a:tblGrid>
-                <a:gridCol w="3886200"/>
-                <a:gridCol w="3886200"/>
-              </a:tblGrid>
-              <a:tr h="274319">
-                <a:tc>
-                  <a:txBody>
-                    <a:bodyPr/>
-                    <a:lstStyle/>
-                    <a:p>
-                      <a:pPr>
-                        <a:defRPr sz="900" b="1">
-                          <a:solidFill>
-                            <a:srgbClr val="FAF3E8"/>
-                          </a:solidFill>
-                          <a:latin typeface="Calibri"/>
-                        </a:defRPr>
-                      </a:pPr>
-                      <a:r>
-                        <a:t>AIの得意技</a:t>
-                      </a:r>
-                    </a:p>
-                  </a:txBody>
-                  <a:tcPr>
-                    <a:solidFill>
-                      <a:srgbClr val="7A5C4F"/>
-                    </a:solidFill>
-                  </a:tcPr>
-                </a:tc>
-                <a:tc>
-                  <a:txBody>
-                    <a:bodyPr/>
-                    <a:lstStyle/>
-                    <a:p>
-                      <a:pPr>
-                        <a:defRPr sz="900" b="1">
-                          <a:solidFill>
-                            <a:srgbClr val="FAF3E8"/>
-                          </a:solidFill>
-                          <a:latin typeface="Calibri"/>
-                        </a:defRPr>
-                      </a:pPr>
-                      <a:r>
-                        <a:t>身近な例え</a:t>
-                      </a:r>
-                    </a:p>
-                  </a:txBody>
-                  <a:tcPr>
-                    <a:solidFill>
-                      <a:srgbClr val="7A5C4F"/>
-                    </a:solidFill>
-                  </a:tcPr>
-                </a:tc>
-              </a:tr>
-              <a:tr h="274319">
-                <a:tc>
-                  <a:txBody>
-                    <a:bodyPr/>
-                    <a:lstStyle/>
-                    <a:p>
-                      <a:pPr>
-                        <a:defRPr sz="900">
-                          <a:solidFill>
-                            <a:srgbClr val="3A3A3A"/>
-                          </a:solidFill>
-                          <a:latin typeface="Calibri"/>
-                        </a:defRPr>
-                      </a:pPr>
-                      <a:r>
-                        <a:t>-----------</a:t>
-                      </a:r>
-                    </a:p>
-                  </a:txBody>
-                  <a:tcPr>
-                    <a:solidFill>
-                      <a:srgbClr val="F5EEE5"/>
-                    </a:solidFill>
-                  </a:tcPr>
-                </a:tc>
-                <a:tc>
-                  <a:txBody>
-                    <a:bodyPr/>
-                    <a:lstStyle/>
-                    <a:p>
-                      <a:pPr>
-                        <a:defRPr sz="900">
-                          <a:solidFill>
-                            <a:srgbClr val="3A3A3A"/>
-                          </a:solidFill>
-                          <a:latin typeface="Calibri"/>
-                        </a:defRPr>
-                      </a:pPr>
-                      <a:r>
-                        <a:t>-----------</a:t>
-                      </a:r>
-                    </a:p>
-                  </a:txBody>
-                  <a:tcPr>
-                    <a:solidFill>
-                      <a:srgbClr val="F5EEE5"/>
-                    </a:solidFill>
-                  </a:tcPr>
-                </a:tc>
-              </a:tr>
-              <a:tr h="274319">
-                <a:tc>
-                  <a:txBody>
-                    <a:bodyPr/>
-                    <a:lstStyle/>
-                    <a:p>
-                      <a:pPr>
-                        <a:defRPr sz="900">
-                          <a:solidFill>
-                            <a:srgbClr val="3A3A3A"/>
-                          </a:solidFill>
-                          <a:latin typeface="Calibri"/>
-                        </a:defRPr>
-                      </a:pPr>
-                      <a:r>
-                        <a:t>大量のデータを素早く処理</a:t>
-                      </a:r>
-                    </a:p>
-                  </a:txBody>
-                  <a:tcPr>
-                    <a:solidFill>
-                      <a:srgbClr val="FAF3E8"/>
-                    </a:solidFill>
-                  </a:tcPr>
-                </a:tc>
-                <a:tc>
-                  <a:txBody>
-                    <a:bodyPr/>
-                    <a:lstStyle/>
-                    <a:p>
-                      <a:pPr>
-                        <a:defRPr sz="900">
-                          <a:solidFill>
-                            <a:srgbClr val="3A3A3A"/>
-                          </a:solidFill>
-                          <a:latin typeface="Calibri"/>
-                        </a:defRPr>
-                      </a:pPr>
-                      <a:r>
-                        <a:t>何万冊の本を一瞬で検索できる図書館司書</a:t>
-                      </a:r>
-                    </a:p>
-                  </a:txBody>
-                  <a:tcPr>
-                    <a:solidFill>
-                      <a:srgbClr val="FAF3E8"/>
-                    </a:solidFill>
-                  </a:tcPr>
-                </a:tc>
-              </a:tr>
-              <a:tr h="274319">
-                <a:tc>
-                  <a:txBody>
-                    <a:bodyPr/>
-                    <a:lstStyle/>
-                    <a:p>
-                      <a:pPr>
-                        <a:defRPr sz="900">
-                          <a:solidFill>
-                            <a:srgbClr val="3A3A3A"/>
-                          </a:solidFill>
-                          <a:latin typeface="Calibri"/>
-                        </a:defRPr>
-                      </a:pPr>
-                      <a:r>
-                        <a:t>パターンを見つける</a:t>
-                      </a:r>
-                    </a:p>
-                  </a:txBody>
-                  <a:tcPr>
-                    <a:solidFill>
-                      <a:srgbClr val="F5EEE5"/>
-                    </a:solidFill>
-                  </a:tcPr>
-                </a:tc>
-                <a:tc>
-                  <a:txBody>
-                    <a:bodyPr/>
-                    <a:lstStyle/>
-                    <a:p>
-                      <a:pPr>
-                        <a:defRPr sz="900">
-                          <a:solidFill>
-                            <a:srgbClr val="3A3A3A"/>
-                          </a:solidFill>
-                          <a:latin typeface="Calibri"/>
-                        </a:defRPr>
-                      </a:pPr>
-                      <a:r>
-                        <a:t>「この検査値の組み合わせは要注意」と気づく</a:t>
-                      </a:r>
-                    </a:p>
-                  </a:txBody>
-                  <a:tcPr>
-                    <a:solidFill>
-                      <a:srgbClr val="F5EEE5"/>
-                    </a:solidFill>
-                  </a:tcPr>
-                </a:tc>
-              </a:tr>
-              <a:tr h="274319">
-                <a:tc>
-                  <a:txBody>
-                    <a:bodyPr/>
-                    <a:lstStyle/>
-                    <a:p>
-                      <a:pPr>
-                        <a:defRPr sz="900">
-                          <a:solidFill>
-                            <a:srgbClr val="3A3A3A"/>
-                          </a:solidFill>
-                          <a:latin typeface="Calibri"/>
-                        </a:defRPr>
-                      </a:pPr>
-                      <a:r>
-                        <a:t>24時間休まず働く</a:t>
-                      </a:r>
-                    </a:p>
-                  </a:txBody>
-                  <a:tcPr>
-                    <a:solidFill>
-                      <a:srgbClr val="FAF3E8"/>
-                    </a:solidFill>
-                  </a:tcPr>
-                </a:tc>
-                <a:tc>
-                  <a:txBody>
-                    <a:bodyPr/>
-                    <a:lstStyle/>
-                    <a:p>
-                      <a:pPr>
-                        <a:defRPr sz="900">
-                          <a:solidFill>
-                            <a:srgbClr val="3A3A3A"/>
-                          </a:solidFill>
-                          <a:latin typeface="Calibri"/>
-                        </a:defRPr>
-                      </a:pPr>
-                      <a:r>
-                        <a:t>夜勤も疲れも関係なし</a:t>
-                      </a:r>
-                    </a:p>
-                  </a:txBody>
-                  <a:tcPr>
-                    <a:solidFill>
-                      <a:srgbClr val="FAF3E8"/>
-                    </a:solidFill>
-                  </a:tcPr>
-                </a:tc>
-              </a:tr>
-              <a:tr h="274324">
-                <a:tc>
-                  <a:txBody>
-                    <a:bodyPr/>
-                    <a:lstStyle/>
-                    <a:p>
-                      <a:pPr>
-                        <a:defRPr sz="900">
-                          <a:solidFill>
-                            <a:srgbClr val="3A3A3A"/>
-                          </a:solidFill>
-                          <a:latin typeface="Calibri"/>
-                        </a:defRPr>
-                      </a:pPr>
-                      <a:r>
-                        <a:t>同じ作業を正確に繰り返す</a:t>
-                      </a:r>
-                    </a:p>
-                  </a:txBody>
-                  <a:tcPr>
-                    <a:solidFill>
-                      <a:srgbClr val="F5EEE5"/>
-                    </a:solidFill>
-                  </a:tcPr>
-                </a:tc>
-                <a:tc>
-                  <a:txBody>
-                    <a:bodyPr/>
-                    <a:lstStyle/>
-                    <a:p>
-                      <a:pPr>
-                        <a:defRPr sz="900">
-                          <a:solidFill>
-                            <a:srgbClr val="3A3A3A"/>
-                          </a:solidFill>
-                          <a:latin typeface="Calibri"/>
-                        </a:defRPr>
-                      </a:pPr>
-                      <a:r>
-                        <a:t>書類の転記やデータ入力のプロ</a:t>
-                      </a:r>
-                    </a:p>
-                  </a:txBody>
-                  <a:tcPr>
-                    <a:solidFill>
-                      <a:srgbClr val="F5EEE5"/>
-                    </a:solidFill>
-                  </a:tcPr>
-                </a:tc>
-              </a:tr>
-            </a:tbl>
-          </a:graphicData>
-        </a:graphic>
-      </p:graphicFrame>
-      <p:graphicFrame>
-        <p:nvGraphicFramePr>
-          <p:cNvPr id="4" name="Table 3"/>
-          <p:cNvGraphicFramePr>
-            <a:graphicFrameLocks noGrp="1"/>
-          </p:cNvGraphicFramePr>
-          <p:nvPr/>
-        </p:nvGraphicFramePr>
-        <p:xfrm>
-          <a:off x="548640" y="2606039"/>
-          <a:ext cx="7772400" cy="1645919"/>
-        </p:xfrm>
-        <a:graphic>
-          <a:graphicData uri="http://schemas.openxmlformats.org/drawingml/2006/table">
-            <a:tbl>
-              <a:tblPr firstRow="1" bandRow="1">
-                <a:tableStyleId>{5C22544A-7EE6-4342-B048-85BDC9FD1C3A}</a:tableStyleId>
-              </a:tblPr>
-              <a:tblGrid>
-                <a:gridCol w="3886200"/>
-                <a:gridCol w="3886200"/>
-              </a:tblGrid>
-              <a:tr h="274319">
-                <a:tc>
-                  <a:txBody>
-                    <a:bodyPr/>
-                    <a:lstStyle/>
-                    <a:p>
-                      <a:pPr>
-                        <a:defRPr sz="900" b="1">
-                          <a:solidFill>
-                            <a:srgbClr val="FAF3E8"/>
-                          </a:solidFill>
-                          <a:latin typeface="Calibri"/>
-                        </a:defRPr>
-                      </a:pPr>
-                      <a:r>
-                        <a:t>AIの苦手</a:t>
-                      </a:r>
-                    </a:p>
-                  </a:txBody>
-                  <a:tcPr>
-                    <a:solidFill>
-                      <a:srgbClr val="7A5C4F"/>
-                    </a:solidFill>
-                  </a:tcPr>
-                </a:tc>
-                <a:tc>
-                  <a:txBody>
-                    <a:bodyPr/>
-                    <a:lstStyle/>
-                    <a:p>
-                      <a:pPr>
-                        <a:defRPr sz="900" b="1">
-                          <a:solidFill>
-                            <a:srgbClr val="FAF3E8"/>
-                          </a:solidFill>
-                          <a:latin typeface="Calibri"/>
-                        </a:defRPr>
-                      </a:pPr>
-                      <a:r>
-                        <a:t>なぜ苦手？</a:t>
-                      </a:r>
-                    </a:p>
-                  </a:txBody>
-                  <a:tcPr>
-                    <a:solidFill>
-                      <a:srgbClr val="7A5C4F"/>
-                    </a:solidFill>
-                  </a:tcPr>
-                </a:tc>
-              </a:tr>
-              <a:tr h="274319">
-                <a:tc>
-                  <a:txBody>
-                    <a:bodyPr/>
-                    <a:lstStyle/>
-                    <a:p>
-                      <a:pPr>
-                        <a:defRPr sz="900">
-                          <a:solidFill>
-                            <a:srgbClr val="3A3A3A"/>
-                          </a:solidFill>
-                          <a:latin typeface="Calibri"/>
-                        </a:defRPr>
-                      </a:pPr>
-                      <a:r>
-                        <a:t>---------</a:t>
-                      </a:r>
-                    </a:p>
-                  </a:txBody>
-                  <a:tcPr>
-                    <a:solidFill>
-                      <a:srgbClr val="F5EEE5"/>
-                    </a:solidFill>
-                  </a:tcPr>
-                </a:tc>
-                <a:tc>
-                  <a:txBody>
-                    <a:bodyPr/>
-                    <a:lstStyle/>
-                    <a:p>
-                      <a:pPr>
-                        <a:defRPr sz="900">
-                          <a:solidFill>
-                            <a:srgbClr val="3A3A3A"/>
-                          </a:solidFill>
-                          <a:latin typeface="Calibri"/>
-                        </a:defRPr>
-                      </a:pPr>
-                      <a:r>
-                        <a:t>-----------</a:t>
-                      </a:r>
-                    </a:p>
-                  </a:txBody>
-                  <a:tcPr>
-                    <a:solidFill>
-                      <a:srgbClr val="F5EEE5"/>
-                    </a:solidFill>
-                  </a:tcPr>
-                </a:tc>
-              </a:tr>
-              <a:tr h="274319">
-                <a:tc>
-                  <a:txBody>
-                    <a:bodyPr/>
-                    <a:lstStyle/>
-                    <a:p>
-                      <a:pPr>
-                        <a:defRPr sz="900">
-                          <a:solidFill>
-                            <a:srgbClr val="3A3A3A"/>
-                          </a:solidFill>
-                          <a:latin typeface="Calibri"/>
-                        </a:defRPr>
-                      </a:pPr>
-                      <a:r>
-                        <a:t>人の気持ちを理解する</a:t>
-                      </a:r>
-                    </a:p>
-                  </a:txBody>
-                  <a:tcPr>
-                    <a:solidFill>
-                      <a:srgbClr val="FAF3E8"/>
-                    </a:solidFill>
-                  </a:tcPr>
-                </a:tc>
-                <a:tc>
-                  <a:txBody>
-                    <a:bodyPr/>
-                    <a:lstStyle/>
-                    <a:p>
-                      <a:pPr>
-                        <a:defRPr sz="900">
-                          <a:solidFill>
-                            <a:srgbClr val="3A3A3A"/>
-                          </a:solidFill>
-                          <a:latin typeface="Calibri"/>
-                        </a:defRPr>
-                      </a:pPr>
-                      <a:r>
-                        <a:t>「不安そうな表情」「声のトーン」は数字にできない</a:t>
-                      </a:r>
-                    </a:p>
-                  </a:txBody>
-                  <a:tcPr>
-                    <a:solidFill>
-                      <a:srgbClr val="FAF3E8"/>
-                    </a:solidFill>
-                  </a:tcPr>
-                </a:tc>
-              </a:tr>
-              <a:tr h="274319">
-                <a:tc>
-                  <a:txBody>
-                    <a:bodyPr/>
-                    <a:lstStyle/>
-                    <a:p>
-                      <a:pPr>
-                        <a:defRPr sz="900">
-                          <a:solidFill>
-                            <a:srgbClr val="3A3A3A"/>
-                          </a:solidFill>
-                          <a:latin typeface="Calibri"/>
-                        </a:defRPr>
-                      </a:pPr>
-                      <a:r>
-                        <a:t>文脈を読む</a:t>
-                      </a:r>
-                    </a:p>
-                  </a:txBody>
-                  <a:tcPr>
-                    <a:solidFill>
-                      <a:srgbClr val="F5EEE5"/>
-                    </a:solidFill>
-                  </a:tcPr>
-                </a:tc>
-                <a:tc>
-                  <a:txBody>
-                    <a:bodyPr/>
-                    <a:lstStyle/>
-                    <a:p>
-                      <a:pPr>
-                        <a:defRPr sz="900">
-                          <a:solidFill>
-                            <a:srgbClr val="3A3A3A"/>
-                          </a:solidFill>
-                          <a:latin typeface="Calibri"/>
-                        </a:defRPr>
-                      </a:pPr>
-                      <a:r>
-                        <a:t>「この患者さんは家族との関係が複雑で...」が伝わらない</a:t>
-                      </a:r>
-                    </a:p>
-                  </a:txBody>
-                  <a:tcPr>
-                    <a:solidFill>
-                      <a:srgbClr val="F5EEE5"/>
-                    </a:solidFill>
-                  </a:tcPr>
-                </a:tc>
-              </a:tr>
-              <a:tr h="274319">
-                <a:tc>
-                  <a:txBody>
-                    <a:bodyPr/>
-                    <a:lstStyle/>
-                    <a:p>
-                      <a:pPr>
-                        <a:defRPr sz="900">
-                          <a:solidFill>
-                            <a:srgbClr val="3A3A3A"/>
-                          </a:solidFill>
-                          <a:latin typeface="Calibri"/>
-                        </a:defRPr>
-                      </a:pPr>
-                      <a:r>
-                        <a:t>責任を取る</a:t>
-                      </a:r>
-                    </a:p>
-                  </a:txBody>
-                  <a:tcPr>
-                    <a:solidFill>
-                      <a:srgbClr val="FAF3E8"/>
-                    </a:solidFill>
-                  </a:tcPr>
-                </a:tc>
-                <a:tc>
-                  <a:txBody>
-                    <a:bodyPr/>
-                    <a:lstStyle/>
-                    <a:p>
-                      <a:pPr>
-                        <a:defRPr sz="900">
-                          <a:solidFill>
-                            <a:srgbClr val="3A3A3A"/>
-                          </a:solidFill>
-                          <a:latin typeface="Calibri"/>
-                        </a:defRPr>
-                      </a:pPr>
-                      <a:r>
-                        <a:t>判断の最終責任は必ず人間にある</a:t>
-                      </a:r>
-                    </a:p>
-                  </a:txBody>
-                  <a:tcPr>
-                    <a:solidFill>
-                      <a:srgbClr val="FAF3E8"/>
-                    </a:solidFill>
-                  </a:tcPr>
-                </a:tc>
-              </a:tr>
-              <a:tr h="274324">
-                <a:tc>
-                  <a:txBody>
-                    <a:bodyPr/>
-                    <a:lstStyle/>
-                    <a:p>
-                      <a:pPr>
-                        <a:defRPr sz="900">
-                          <a:solidFill>
-                            <a:srgbClr val="3A3A3A"/>
-                          </a:solidFill>
-                          <a:latin typeface="Calibri"/>
-                        </a:defRPr>
-                      </a:pPr>
-                      <a:r>
-                        <a:t>「なんとなくおかしい」に気づく</a:t>
-                      </a:r>
-                    </a:p>
-                  </a:txBody>
-                  <a:tcPr>
-                    <a:solidFill>
-                      <a:srgbClr val="F5EEE5"/>
-                    </a:solidFill>
-                  </a:tcPr>
-                </a:tc>
-                <a:tc>
-                  <a:txBody>
-                    <a:bodyPr/>
-                    <a:lstStyle/>
-                    <a:p>
-                      <a:pPr>
-                        <a:defRPr sz="900">
-                          <a:solidFill>
-                            <a:srgbClr val="3A3A3A"/>
-                          </a:solidFill>
-                          <a:latin typeface="Calibri"/>
-                        </a:defRPr>
-                      </a:pPr>
-                      <a:r>
-                        <a:t>ベテランの直感や経験は数値化できない</a:t>
-                      </a:r>
-                    </a:p>
-                  </a:txBody>
-                  <a:tcPr>
-                    <a:solidFill>
-                      <a:srgbClr val="F5EEE5"/>
-                    </a:solidFill>
-                  </a:tcPr>
-                </a:tc>
-              </a:tr>
-            </a:tbl>
-          </a:graphicData>
-        </a:graphic>
-      </p:graphicFrame>
-      <p:sp>
-        <p:nvSpPr>
-          <p:cNvPr id="5" name="Rectangle 4"/>
+              <a:t>AI同士が協力する時代</a:t>
+            </a:r>
+          </a:p>
+        </p:txBody>
+      </p:sp>
+      <p:sp>
+        <p:nvSpPr>
+          <p:cNvPr id="3" name="Rectangle 2"/>
           <p:cNvSpPr/>
           <p:nvPr/>
         </p:nvSpPr>
         <p:spPr>
           <a:xfrm>
-            <a:off x="548640" y="4389119"/>
-            <a:ext cx="54864" cy="182880"/>
+            <a:off x="457200" y="777240"/>
+            <a:ext cx="1828800" cy="54864"/>
           </a:xfrm>
           <a:prstGeom prst="rect">
             <a:avLst/>
@@ -4574,33 +4019,65 @@
           <a:bodyPr rtlCol="0" anchor="ctr"/>
           <a:lstStyle/>
           <a:p>
-            <a:pPr algn="ctr">
-              <a:defRPr/>
+            <a:pPr algn="ctr"/>
+          </a:p>
+        </p:txBody>
+      </p:sp>
+      <p:sp>
+        <p:nvSpPr>
+          <p:cNvPr id="4" name="TextBox 3"/>
+          <p:cNvSpPr txBox="1"/>
+          <p:nvPr/>
+        </p:nvSpPr>
+        <p:spPr>
+          <a:xfrm>
+            <a:off x="457200" y="1097280"/>
+            <a:ext cx="8229600" cy="365760"/>
+          </a:xfrm>
+          <a:prstGeom prst="rect">
+            <a:avLst/>
+          </a:prstGeom>
+          <a:noFill/>
+        </p:spPr>
+        <p:txBody>
+          <a:bodyPr wrap="square" lIns="45720" rIns="45720" tIns="27432" bIns="27432">
+            <a:spAutoFit/>
+          </a:bodyPr>
+          <a:lstStyle/>
+          <a:p>
+            <a:pPr algn="l">
+              <a:defRPr sz="1400" b="0">
+                <a:solidFill>
+                  <a:srgbClr val="9E8A7E"/>
+                </a:solidFill>
+                <a:latin typeface="Calibri"/>
+              </a:defRPr>
             </a:pPr>
-          </a:p>
-        </p:txBody>
-      </p:sp>
-      <p:sp>
-        <p:nvSpPr>
-          <p:cNvPr id="6" name="Rectangle 5"/>
+            <a:r>
+              <a:t>チーム医療と同じ。1人の天才より、専門家チームが強い。</a:t>
+            </a:r>
+          </a:p>
+        </p:txBody>
+      </p:sp>
+      <p:sp>
+        <p:nvSpPr>
+          <p:cNvPr id="5" name="Rectangle 4"/>
           <p:cNvSpPr/>
           <p:nvPr/>
         </p:nvSpPr>
         <p:spPr>
           <a:xfrm>
-            <a:off x="658368" y="4389119"/>
-            <a:ext cx="7662672" cy="182880"/>
+            <a:off x="2286000" y="1645920"/>
+            <a:ext cx="4572000" cy="548640"/>
           </a:xfrm>
           <a:prstGeom prst="rect">
             <a:avLst/>
           </a:prstGeom>
           <a:solidFill>
-            <a:srgbClr val="FFFFFF"/>
+            <a:srgbClr val="D47B56"/>
           </a:solidFill>
-          <a:ln w="12700">
-            <a:solidFill>
-              <a:srgbClr val="A7BEAE"/>
-            </a:solidFill>
+          <a:ln>
+            <a:noFill/>
           </a:ln>
         </p:spPr>
         <p:style>
@@ -4621,22 +4098,20 @@
           <a:bodyPr rtlCol="0" anchor="ctr"/>
           <a:lstStyle/>
           <a:p>
-            <a:pPr algn="ctr">
-              <a:defRPr/>
-            </a:pPr>
-          </a:p>
-        </p:txBody>
-      </p:sp>
-      <p:sp>
-        <p:nvSpPr>
-          <p:cNvPr id="7" name="TextBox 6"/>
+            <a:pPr algn="ctr"/>
+          </a:p>
+        </p:txBody>
+      </p:sp>
+      <p:sp>
+        <p:nvSpPr>
+          <p:cNvPr id="6" name="TextBox 5"/>
           <p:cNvSpPr txBox="1"/>
           <p:nvPr/>
         </p:nvSpPr>
         <p:spPr>
           <a:xfrm>
-            <a:off x="777240" y="4462271"/>
-            <a:ext cx="7406640" cy="287020"/>
+            <a:off x="2286000" y="1691640"/>
+            <a:ext cx="4572000" cy="457200"/>
           </a:xfrm>
           <a:prstGeom prst="rect">
             <a:avLst/>
@@ -4644,32 +4119,446 @@
           <a:noFill/>
         </p:spPr>
         <p:txBody>
-          <a:bodyPr wrap="square">
+          <a:bodyPr wrap="square" lIns="45720" rIns="45720" tIns="27432" bIns="27432">
             <a:spAutoFit/>
           </a:bodyPr>
           <a:lstStyle/>
           <a:p>
+            <a:pPr algn="ctr">
+              <a:defRPr sz="1400" b="1">
+                <a:solidFill>
+                  <a:srgbClr val="7A5C4F"/>
+                </a:solidFill>
+                <a:latin typeface="Calibri"/>
+              </a:defRPr>
+            </a:pPr>
+            <a:r>
+              <a:t>リーダーAI（総合調整）</a:t>
+            </a:r>
+          </a:p>
+        </p:txBody>
+      </p:sp>
+      <p:sp>
+        <p:nvSpPr>
+          <p:cNvPr id="7" name="Rectangle 6"/>
+          <p:cNvSpPr/>
+          <p:nvPr/>
+        </p:nvSpPr>
+        <p:spPr>
+          <a:xfrm>
+            <a:off x="731520" y="2468880"/>
+            <a:ext cx="1828800" cy="548640"/>
+          </a:xfrm>
+          <a:prstGeom prst="rect">
+            <a:avLst/>
+          </a:prstGeom>
+          <a:solidFill>
+            <a:srgbClr val="7A5C4F"/>
+          </a:solidFill>
+          <a:ln w="12700">
+            <a:solidFill>
+              <a:srgbClr val="D47B56"/>
+            </a:solidFill>
+          </a:ln>
+        </p:spPr>
+        <p:style>
+          <a:lnRef idx="1">
+            <a:schemeClr val="accent1"/>
+          </a:lnRef>
+          <a:fillRef idx="3">
+            <a:schemeClr val="accent1"/>
+          </a:fillRef>
+          <a:effectRef idx="2">
+            <a:schemeClr val="accent1"/>
+          </a:effectRef>
+          <a:fontRef idx="minor">
+            <a:schemeClr val="lt1"/>
+          </a:fontRef>
+        </p:style>
+        <p:txBody>
+          <a:bodyPr rtlCol="0" anchor="ctr"/>
+          <a:lstStyle/>
+          <a:p>
+            <a:pPr algn="ctr"/>
+          </a:p>
+        </p:txBody>
+      </p:sp>
+      <p:sp>
+        <p:nvSpPr>
+          <p:cNvPr id="8" name="TextBox 7"/>
+          <p:cNvSpPr txBox="1"/>
+          <p:nvPr/>
+        </p:nvSpPr>
+        <p:spPr>
+          <a:xfrm>
+            <a:off x="731520" y="2496312"/>
+            <a:ext cx="1828800" cy="457200"/>
+          </a:xfrm>
+          <a:prstGeom prst="rect">
+            <a:avLst/>
+          </a:prstGeom>
+          <a:noFill/>
+        </p:spPr>
+        <p:txBody>
+          <a:bodyPr wrap="square" lIns="45720" rIns="45720" tIns="27432" bIns="27432">
+            <a:spAutoFit/>
+          </a:bodyPr>
+          <a:lstStyle/>
+          <a:p>
+            <a:pPr algn="ctr">
+              <a:defRPr sz="1200" b="0">
+                <a:solidFill>
+                  <a:srgbClr val="FAF3E8"/>
+                </a:solidFill>
+                <a:latin typeface="Calibri"/>
+              </a:defRPr>
+            </a:pPr>
+            <a:r>
+              <a:t>検査AI</a:t>
+            </a:r>
+          </a:p>
+        </p:txBody>
+      </p:sp>
+      <p:sp>
+        <p:nvSpPr>
+          <p:cNvPr id="9" name="Rectangle 8"/>
+          <p:cNvSpPr/>
+          <p:nvPr/>
+        </p:nvSpPr>
+        <p:spPr>
+          <a:xfrm>
+            <a:off x="2834639" y="2468880"/>
+            <a:ext cx="1828800" cy="548640"/>
+          </a:xfrm>
+          <a:prstGeom prst="rect">
+            <a:avLst/>
+          </a:prstGeom>
+          <a:solidFill>
+            <a:srgbClr val="7A5C4F"/>
+          </a:solidFill>
+          <a:ln w="12700">
+            <a:solidFill>
+              <a:srgbClr val="D47B56"/>
+            </a:solidFill>
+          </a:ln>
+        </p:spPr>
+        <p:style>
+          <a:lnRef idx="1">
+            <a:schemeClr val="accent1"/>
+          </a:lnRef>
+          <a:fillRef idx="3">
+            <a:schemeClr val="accent1"/>
+          </a:fillRef>
+          <a:effectRef idx="2">
+            <a:schemeClr val="accent1"/>
+          </a:effectRef>
+          <a:fontRef idx="minor">
+            <a:schemeClr val="lt1"/>
+          </a:fontRef>
+        </p:style>
+        <p:txBody>
+          <a:bodyPr rtlCol="0" anchor="ctr"/>
+          <a:lstStyle/>
+          <a:p>
+            <a:pPr algn="ctr"/>
+          </a:p>
+        </p:txBody>
+      </p:sp>
+      <p:sp>
+        <p:nvSpPr>
+          <p:cNvPr id="10" name="TextBox 9"/>
+          <p:cNvSpPr txBox="1"/>
+          <p:nvPr/>
+        </p:nvSpPr>
+        <p:spPr>
+          <a:xfrm>
+            <a:off x="2834639" y="2496312"/>
+            <a:ext cx="1828800" cy="457200"/>
+          </a:xfrm>
+          <a:prstGeom prst="rect">
+            <a:avLst/>
+          </a:prstGeom>
+          <a:noFill/>
+        </p:spPr>
+        <p:txBody>
+          <a:bodyPr wrap="square" lIns="45720" rIns="45720" tIns="27432" bIns="27432">
+            <a:spAutoFit/>
+          </a:bodyPr>
+          <a:lstStyle/>
+          <a:p>
+            <a:pPr algn="ctr">
+              <a:defRPr sz="1200" b="0">
+                <a:solidFill>
+                  <a:srgbClr val="FAF3E8"/>
+                </a:solidFill>
+                <a:latin typeface="Calibri"/>
+              </a:defRPr>
+            </a:pPr>
+            <a:r>
+              <a:t>画像AI</a:t>
+            </a:r>
+          </a:p>
+        </p:txBody>
+      </p:sp>
+      <p:sp>
+        <p:nvSpPr>
+          <p:cNvPr id="11" name="Rectangle 10"/>
+          <p:cNvSpPr/>
+          <p:nvPr/>
+        </p:nvSpPr>
+        <p:spPr>
+          <a:xfrm>
+            <a:off x="4937759" y="2468880"/>
+            <a:ext cx="1828800" cy="548640"/>
+          </a:xfrm>
+          <a:prstGeom prst="rect">
+            <a:avLst/>
+          </a:prstGeom>
+          <a:solidFill>
+            <a:srgbClr val="7A5C4F"/>
+          </a:solidFill>
+          <a:ln w="12700">
+            <a:solidFill>
+              <a:srgbClr val="D47B56"/>
+            </a:solidFill>
+          </a:ln>
+        </p:spPr>
+        <p:style>
+          <a:lnRef idx="1">
+            <a:schemeClr val="accent1"/>
+          </a:lnRef>
+          <a:fillRef idx="3">
+            <a:schemeClr val="accent1"/>
+          </a:fillRef>
+          <a:effectRef idx="2">
+            <a:schemeClr val="accent1"/>
+          </a:effectRef>
+          <a:fontRef idx="minor">
+            <a:schemeClr val="lt1"/>
+          </a:fontRef>
+        </p:style>
+        <p:txBody>
+          <a:bodyPr rtlCol="0" anchor="ctr"/>
+          <a:lstStyle/>
+          <a:p>
+            <a:pPr algn="ctr"/>
+          </a:p>
+        </p:txBody>
+      </p:sp>
+      <p:sp>
+        <p:nvSpPr>
+          <p:cNvPr id="12" name="TextBox 11"/>
+          <p:cNvSpPr txBox="1"/>
+          <p:nvPr/>
+        </p:nvSpPr>
+        <p:spPr>
+          <a:xfrm>
+            <a:off x="4937759" y="2496312"/>
+            <a:ext cx="1828800" cy="457200"/>
+          </a:xfrm>
+          <a:prstGeom prst="rect">
+            <a:avLst/>
+          </a:prstGeom>
+          <a:noFill/>
+        </p:spPr>
+        <p:txBody>
+          <a:bodyPr wrap="square" lIns="45720" rIns="45720" tIns="27432" bIns="27432">
+            <a:spAutoFit/>
+          </a:bodyPr>
+          <a:lstStyle/>
+          <a:p>
+            <a:pPr algn="ctr">
+              <a:defRPr sz="1200" b="0">
+                <a:solidFill>
+                  <a:srgbClr val="FAF3E8"/>
+                </a:solidFill>
+                <a:latin typeface="Calibri"/>
+              </a:defRPr>
+            </a:pPr>
+            <a:r>
+              <a:t>薬剤AI</a:t>
+            </a:r>
+          </a:p>
+        </p:txBody>
+      </p:sp>
+      <p:sp>
+        <p:nvSpPr>
+          <p:cNvPr id="13" name="Rectangle 12"/>
+          <p:cNvSpPr/>
+          <p:nvPr/>
+        </p:nvSpPr>
+        <p:spPr>
+          <a:xfrm>
+            <a:off x="7040879" y="2468880"/>
+            <a:ext cx="1828800" cy="548640"/>
+          </a:xfrm>
+          <a:prstGeom prst="rect">
+            <a:avLst/>
+          </a:prstGeom>
+          <a:solidFill>
+            <a:srgbClr val="7A5C4F"/>
+          </a:solidFill>
+          <a:ln w="12700">
+            <a:solidFill>
+              <a:srgbClr val="D47B56"/>
+            </a:solidFill>
+          </a:ln>
+        </p:spPr>
+        <p:style>
+          <a:lnRef idx="1">
+            <a:schemeClr val="accent1"/>
+          </a:lnRef>
+          <a:fillRef idx="3">
+            <a:schemeClr val="accent1"/>
+          </a:fillRef>
+          <a:effectRef idx="2">
+            <a:schemeClr val="accent1"/>
+          </a:effectRef>
+          <a:fontRef idx="minor">
+            <a:schemeClr val="lt1"/>
+          </a:fontRef>
+        </p:style>
+        <p:txBody>
+          <a:bodyPr rtlCol="0" anchor="ctr"/>
+          <a:lstStyle/>
+          <a:p>
+            <a:pPr algn="ctr"/>
+          </a:p>
+        </p:txBody>
+      </p:sp>
+      <p:sp>
+        <p:nvSpPr>
+          <p:cNvPr id="14" name="TextBox 13"/>
+          <p:cNvSpPr txBox="1"/>
+          <p:nvPr/>
+        </p:nvSpPr>
+        <p:spPr>
+          <a:xfrm>
+            <a:off x="7040879" y="2496312"/>
+            <a:ext cx="1828800" cy="457200"/>
+          </a:xfrm>
+          <a:prstGeom prst="rect">
+            <a:avLst/>
+          </a:prstGeom>
+          <a:noFill/>
+        </p:spPr>
+        <p:txBody>
+          <a:bodyPr wrap="square" lIns="45720" rIns="45720" tIns="27432" bIns="27432">
+            <a:spAutoFit/>
+          </a:bodyPr>
+          <a:lstStyle/>
+          <a:p>
+            <a:pPr algn="ctr">
+              <a:defRPr sz="1200" b="0">
+                <a:solidFill>
+                  <a:srgbClr val="FAF3E8"/>
+                </a:solidFill>
+                <a:latin typeface="Calibri"/>
+              </a:defRPr>
+            </a:pPr>
+            <a:r>
+              <a:t>文献AI</a:t>
+            </a:r>
+          </a:p>
+        </p:txBody>
+      </p:sp>
+      <p:sp>
+        <p:nvSpPr>
+          <p:cNvPr id="15" name="TextBox 14"/>
+          <p:cNvSpPr txBox="1"/>
+          <p:nvPr/>
+        </p:nvSpPr>
+        <p:spPr>
+          <a:xfrm>
+            <a:off x="457200" y="3291840"/>
+            <a:ext cx="8229600" cy="274320"/>
+          </a:xfrm>
+          <a:prstGeom prst="rect">
+            <a:avLst/>
+          </a:prstGeom>
+          <a:noFill/>
+        </p:spPr>
+        <p:txBody>
+          <a:bodyPr wrap="square" lIns="45720" rIns="45720" tIns="27432" bIns="27432">
+            <a:spAutoFit/>
+          </a:bodyPr>
+          <a:lstStyle/>
+          <a:p>
             <a:pPr algn="l">
-              <a:defRPr sz="1100" b="0">
-                <a:solidFill>
-                  <a:srgbClr val="3A3A3A"/>
-                </a:solidFill>
-                <a:latin typeface="Georgia"/>
+              <a:defRPr sz="1300" b="1">
+                <a:solidFill>
+                  <a:srgbClr val="D47B56"/>
+                </a:solidFill>
+                <a:latin typeface="Calibri"/>
               </a:defRPr>
             </a:pPr>
             <a:r>
-              <a:rPr/>
-              <a:t>たとえるなら：</a:t>
-            </a:r>
-            <a:br/>
-            <a:r>
-              <a:rPr/>
-              <a:t>AIは「ものすごく優秀だけど、空気が読めない新人スタッフ」。</a:t>
-            </a:r>
-            <a:br/>
-            <a:r>
-              <a:rPr/>
-              <a:t>データの処理は速いけど、患者さんの涙の意味はわからない。</a:t>
+              <a:t>実際の成果（Mount Sinai研究）:</a:t>
+            </a:r>
+          </a:p>
+        </p:txBody>
+      </p:sp>
+      <p:sp>
+        <p:nvSpPr>
+          <p:cNvPr id="16" name="TextBox 15"/>
+          <p:cNvSpPr txBox="1"/>
+          <p:nvPr/>
+        </p:nvSpPr>
+        <p:spPr>
+          <a:xfrm>
+            <a:off x="640080" y="3657600"/>
+            <a:ext cx="7772400" cy="914400"/>
+          </a:xfrm>
+          <a:prstGeom prst="rect">
+            <a:avLst/>
+          </a:prstGeom>
+          <a:noFill/>
+        </p:spPr>
+        <p:txBody>
+          <a:bodyPr wrap="square" lIns="45720" rIns="45720" tIns="27432" bIns="27432">
+            <a:spAutoFit/>
+          </a:bodyPr>
+          <a:lstStyle/>
+          <a:p>
+            <a:pPr>
+              <a:defRPr sz="1300">
+                <a:solidFill>
+                  <a:srgbClr val="FAF3E8"/>
+                </a:solidFill>
+                <a:latin typeface="Calibri"/>
+              </a:defRPr>
+              <a:buChar char="●"/>
+            </a:pPr>
+            <a:r>
+              <a:t>チームAIが単独AIより正確</a:t>
+            </a:r>
+          </a:p>
+          <a:p>
+            <a:pPr>
+              <a:defRPr sz="1300">
+                <a:solidFill>
+                  <a:srgbClr val="FAF3E8"/>
+                </a:solidFill>
+                <a:latin typeface="Calibri"/>
+              </a:defRPr>
+              <a:buChar char="●"/>
+            </a:pPr>
+            <a:r>
+              <a:t>コストは最大65分の1に削減</a:t>
+            </a:r>
+          </a:p>
+          <a:p>
+            <a:pPr>
+              <a:defRPr sz="1300">
+                <a:solidFill>
+                  <a:srgbClr val="FAF3E8"/>
+                </a:solidFill>
+                <a:latin typeface="Calibri"/>
+              </a:defRPr>
+              <a:buChar char="●"/>
+            </a:pPr>
+            <a:r>
+              <a:t>患者が増えても質が落ちない</a:t>
             </a:r>
           </a:p>
         </p:txBody>
@@ -4708,8 +4597,8 @@
         </p:nvSpPr>
         <p:spPr>
           <a:xfrm>
-            <a:off x="457200" y="182880"/>
-            <a:ext cx="8229600" cy="548640"/>
+            <a:off x="457200" y="274320"/>
+            <a:ext cx="8229600" cy="457200"/>
           </a:xfrm>
           <a:prstGeom prst="rect">
             <a:avLst/>
@@ -4717,7 +4606,7 @@
           <a:noFill/>
         </p:spPr>
         <p:txBody>
-          <a:bodyPr wrap="square">
+          <a:bodyPr wrap="square" lIns="45720" rIns="45720" tIns="27432" bIns="27432">
             <a:spAutoFit/>
           </a:bodyPr>
           <a:lstStyle/>
@@ -4731,59 +4620,21 @@
               </a:defRPr>
             </a:pPr>
             <a:r>
-              <a:rPr/>
-              <a:t>スライド3: AIも「間違える」— 知っておいてほしい話（5-8分）</a:t>
-            </a:r>
-          </a:p>
-        </p:txBody>
-      </p:sp>
-      <p:sp>
-        <p:nvSpPr>
-          <p:cNvPr id="3" name="TextBox 2"/>
-          <p:cNvSpPr txBox="1"/>
-          <p:nvPr/>
-        </p:nvSpPr>
-        <p:spPr>
-          <a:xfrm>
-            <a:off x="548640" y="822960"/>
-            <a:ext cx="7772400" cy="320040"/>
-          </a:xfrm>
-          <a:prstGeom prst="rect">
-            <a:avLst/>
-          </a:prstGeom>
-          <a:noFill/>
-        </p:spPr>
-        <p:txBody>
-          <a:bodyPr wrap="square">
-            <a:spAutoFit/>
-          </a:bodyPr>
-          <a:lstStyle/>
-          <a:p>
-            <a:pPr algn="l">
-              <a:defRPr sz="1100" b="0">
-                <a:solidFill>
-                  <a:srgbClr val="3A3A3A"/>
-                </a:solidFill>
-                <a:latin typeface="Calibri"/>
-              </a:defRPr>
-            </a:pPr>
-            <a:r>
-              <a:rPr/>
-              <a:t>最新の研究（PNAS 2026年発表）で、AIの「くせ」がわかってきました：</a:t>
-            </a:r>
-          </a:p>
-        </p:txBody>
-      </p:sp>
-      <p:sp>
-        <p:nvSpPr>
-          <p:cNvPr id="4" name="Rectangle 3"/>
+              <a:t>AIを使うときに気をつけること</a:t>
+            </a:r>
+          </a:p>
+        </p:txBody>
+      </p:sp>
+      <p:sp>
+        <p:nvSpPr>
+          <p:cNvPr id="3" name="Rectangle 2"/>
           <p:cNvSpPr/>
           <p:nvPr/>
         </p:nvSpPr>
         <p:spPr>
           <a:xfrm>
-            <a:off x="548640" y="1143000"/>
-            <a:ext cx="54864" cy="1438351"/>
+            <a:off x="457200" y="777240"/>
+            <a:ext cx="1828800" cy="54864"/>
           </a:xfrm>
           <a:prstGeom prst="rect">
             <a:avLst/>
@@ -4813,32 +4664,30 @@
           <a:bodyPr rtlCol="0" anchor="ctr"/>
           <a:lstStyle/>
           <a:p>
-            <a:pPr algn="ctr">
-              <a:defRPr/>
-            </a:pPr>
-          </a:p>
-        </p:txBody>
-      </p:sp>
-      <p:sp>
-        <p:nvSpPr>
-          <p:cNvPr id="5" name="Rectangle 4"/>
+            <a:pPr algn="ctr"/>
+          </a:p>
+        </p:txBody>
+      </p:sp>
+      <p:sp>
+        <p:nvSpPr>
+          <p:cNvPr id="4" name="Rectangle 3"/>
           <p:cNvSpPr/>
           <p:nvPr/>
         </p:nvSpPr>
         <p:spPr>
           <a:xfrm>
-            <a:off x="658368" y="1143000"/>
-            <a:ext cx="7662672" cy="1438351"/>
+            <a:off x="731520" y="1097280"/>
+            <a:ext cx="7680960" cy="1005840"/>
           </a:xfrm>
           <a:prstGeom prst="rect">
             <a:avLst/>
           </a:prstGeom>
           <a:solidFill>
-            <a:srgbClr val="FFFFFF"/>
+            <a:srgbClr val="F5EEE5"/>
           </a:solidFill>
           <a:ln w="12700">
             <a:solidFill>
-              <a:srgbClr val="A7BEAE"/>
+              <a:srgbClr val="D47B56"/>
             </a:solidFill>
           </a:ln>
         </p:spPr>
@@ -4860,9 +4709,43 @@
           <a:bodyPr rtlCol="0" anchor="ctr"/>
           <a:lstStyle/>
           <a:p>
-            <a:pPr algn="ctr">
-              <a:defRPr/>
+            <a:pPr algn="ctr"/>
+          </a:p>
+        </p:txBody>
+      </p:sp>
+      <p:sp>
+        <p:nvSpPr>
+          <p:cNvPr id="5" name="TextBox 4"/>
+          <p:cNvSpPr txBox="1"/>
+          <p:nvPr/>
+        </p:nvSpPr>
+        <p:spPr>
+          <a:xfrm>
+            <a:off x="914400" y="1143000"/>
+            <a:ext cx="3200400" cy="365760"/>
+          </a:xfrm>
+          <a:prstGeom prst="rect">
+            <a:avLst/>
+          </a:prstGeom>
+          <a:noFill/>
+        </p:spPr>
+        <p:txBody>
+          <a:bodyPr wrap="square" lIns="45720" rIns="45720" tIns="27432" bIns="27432">
+            <a:spAutoFit/>
+          </a:bodyPr>
+          <a:lstStyle/>
+          <a:p>
+            <a:pPr algn="l">
+              <a:defRPr sz="1500" b="1">
+                <a:solidFill>
+                  <a:srgbClr val="D47B56"/>
+                </a:solidFill>
+                <a:latin typeface="Calibri"/>
+              </a:defRPr>
             </a:pPr>
+            <a:r>
+              <a:t>⚠ もっともらしい嘘</a:t>
+            </a:r>
           </a:p>
         </p:txBody>
       </p:sp>
@@ -4874,8 +4757,8 @@
         </p:nvSpPr>
         <p:spPr>
           <a:xfrm>
-            <a:off x="777240" y="1216152"/>
-            <a:ext cx="7406640" cy="1292047"/>
+            <a:off x="4114800" y="1188720"/>
+            <a:ext cx="4114800" cy="731520"/>
           </a:xfrm>
           <a:prstGeom prst="rect">
             <a:avLst/>
@@ -4883,47 +4766,25 @@
           <a:noFill/>
         </p:spPr>
         <p:txBody>
-          <a:bodyPr wrap="square">
+          <a:bodyPr wrap="square" lIns="45720" rIns="45720" tIns="27432" bIns="27432">
             <a:spAutoFit/>
           </a:bodyPr>
           <a:lstStyle/>
           <a:p>
             <a:pPr algn="l">
-              <a:defRPr sz="1100" b="0">
+              <a:defRPr sz="1300" b="0">
                 <a:solidFill>
                   <a:srgbClr val="3A3A3A"/>
                 </a:solidFill>
-                <a:latin typeface="Georgia"/>
+                <a:latin typeface="Calibri"/>
               </a:defRPr>
             </a:pPr>
             <a:r>
-              <a:rPr/>
-              <a:t>例え話:</a:t>
+              <a:t>AIは自信満々に間違えます。</a:t>
             </a:r>
             <a:br/>
             <a:r>
-              <a:rPr/>
-              <a:t>「廊下で患者さんが転びそうになっている。</a:t>
-            </a:r>
-            <a:br/>
-            <a:r>
-              <a:rPr/>
-              <a:t>手を出して支えたら → もしケガさせたら自分のせい？</a:t>
-            </a:r>
-            <a:br/>
-            <a:r>
-              <a:rPr/>
-              <a:t>何もしなかったら → たまたま転んだだけ？」</a:t>
-            </a:r>
-            <a:br/>
-            <a:r>
-              <a:rPr/>
-              <a:t>AIは「何もしない方が安全」と判断しがちです。</a:t>
-            </a:r>
-            <a:br/>
-            <a:r>
-              <a:rPr/>
-              <a:t>でも医療では、「何もしないこと」も判断であり、責任がある。</a:t>
+              <a:t>必ず確認を。</a:t>
             </a:r>
           </a:p>
         </p:txBody>
@@ -4936,17 +4797,19 @@
         </p:nvSpPr>
         <p:spPr>
           <a:xfrm>
-            <a:off x="548640" y="2718511"/>
-            <a:ext cx="54864" cy="457200"/>
+            <a:off x="731520" y="2286000"/>
+            <a:ext cx="7680960" cy="1005840"/>
           </a:xfrm>
           <a:prstGeom prst="rect">
             <a:avLst/>
           </a:prstGeom>
           <a:solidFill>
-            <a:srgbClr val="D47B56"/>
+            <a:srgbClr val="F5EEE5"/>
           </a:solidFill>
-          <a:ln>
-            <a:noFill/>
+          <a:ln w="12700">
+            <a:solidFill>
+              <a:srgbClr val="D47B56"/>
+            </a:solidFill>
           </a:ln>
         </p:spPr>
         <p:style>
@@ -4967,32 +4830,106 @@
           <a:bodyPr rtlCol="0" anchor="ctr"/>
           <a:lstStyle/>
           <a:p>
-            <a:pPr algn="ctr">
-              <a:defRPr/>
+            <a:pPr algn="ctr"/>
+          </a:p>
+        </p:txBody>
+      </p:sp>
+      <p:sp>
+        <p:nvSpPr>
+          <p:cNvPr id="8" name="TextBox 7"/>
+          <p:cNvSpPr txBox="1"/>
+          <p:nvPr/>
+        </p:nvSpPr>
+        <p:spPr>
+          <a:xfrm>
+            <a:off x="914400" y="2331720"/>
+            <a:ext cx="3200400" cy="365760"/>
+          </a:xfrm>
+          <a:prstGeom prst="rect">
+            <a:avLst/>
+          </a:prstGeom>
+          <a:noFill/>
+        </p:spPr>
+        <p:txBody>
+          <a:bodyPr wrap="square" lIns="45720" rIns="45720" tIns="27432" bIns="27432">
+            <a:spAutoFit/>
+          </a:bodyPr>
+          <a:lstStyle/>
+          <a:p>
+            <a:pPr algn="l">
+              <a:defRPr sz="1500" b="1">
+                <a:solidFill>
+                  <a:srgbClr val="D47B56"/>
+                </a:solidFill>
+                <a:latin typeface="Calibri"/>
+              </a:defRPr>
             </a:pPr>
-          </a:p>
-        </p:txBody>
-      </p:sp>
-      <p:sp>
-        <p:nvSpPr>
-          <p:cNvPr id="8" name="Rectangle 7"/>
+            <a:r>
+              <a:t>⚠ 引きずられる危険</a:t>
+            </a:r>
+          </a:p>
+        </p:txBody>
+      </p:sp>
+      <p:sp>
+        <p:nvSpPr>
+          <p:cNvPr id="9" name="TextBox 8"/>
+          <p:cNvSpPr txBox="1"/>
+          <p:nvPr/>
+        </p:nvSpPr>
+        <p:spPr>
+          <a:xfrm>
+            <a:off x="4114800" y="2377440"/>
+            <a:ext cx="4114800" cy="731520"/>
+          </a:xfrm>
+          <a:prstGeom prst="rect">
+            <a:avLst/>
+          </a:prstGeom>
+          <a:noFill/>
+        </p:spPr>
+        <p:txBody>
+          <a:bodyPr wrap="square" lIns="45720" rIns="45720" tIns="27432" bIns="27432">
+            <a:spAutoFit/>
+          </a:bodyPr>
+          <a:lstStyle/>
+          <a:p>
+            <a:pPr algn="l">
+              <a:defRPr sz="1300" b="0">
+                <a:solidFill>
+                  <a:srgbClr val="3A3A3A"/>
+                </a:solidFill>
+                <a:latin typeface="Calibri"/>
+              </a:defRPr>
+            </a:pPr>
+            <a:r>
+              <a:t>AIの最初の答えに引きずられがち。</a:t>
+            </a:r>
+            <a:br/>
+            <a:r>
+              <a:t>自分の判断を先に持つ。</a:t>
+            </a:r>
+          </a:p>
+        </p:txBody>
+      </p:sp>
+      <p:sp>
+        <p:nvSpPr>
+          <p:cNvPr id="10" name="Rectangle 9"/>
           <p:cNvSpPr/>
           <p:nvPr/>
         </p:nvSpPr>
         <p:spPr>
           <a:xfrm>
-            <a:off x="658368" y="2718511"/>
-            <a:ext cx="7662672" cy="457200"/>
+            <a:off x="731520" y="3474720"/>
+            <a:ext cx="7680960" cy="1005840"/>
           </a:xfrm>
           <a:prstGeom prst="rect">
             <a:avLst/>
           </a:prstGeom>
           <a:solidFill>
-            <a:srgbClr val="FFFFFF"/>
+            <a:srgbClr val="F5EEE5"/>
           </a:solidFill>
           <a:ln w="12700">
             <a:solidFill>
-              <a:srgbClr val="A7BEAE"/>
+              <a:srgbClr val="D47B56"/>
             </a:solidFill>
           </a:ln>
         </p:spPr>
@@ -5014,22 +4951,20 @@
           <a:bodyPr rtlCol="0" anchor="ctr"/>
           <a:lstStyle/>
           <a:p>
-            <a:pPr algn="ctr">
-              <a:defRPr/>
-            </a:pPr>
-          </a:p>
-        </p:txBody>
-      </p:sp>
-      <p:sp>
-        <p:nvSpPr>
-          <p:cNvPr id="9" name="TextBox 8"/>
+            <a:pPr algn="ctr"/>
+          </a:p>
+        </p:txBody>
+      </p:sp>
+      <p:sp>
+        <p:nvSpPr>
+          <p:cNvPr id="11" name="TextBox 10"/>
           <p:cNvSpPr txBox="1"/>
           <p:nvPr/>
         </p:nvSpPr>
         <p:spPr>
           <a:xfrm>
-            <a:off x="777240" y="2791663"/>
-            <a:ext cx="7406640" cy="310896"/>
+            <a:off x="914400" y="3520439"/>
+            <a:ext cx="3200400" cy="365760"/>
           </a:xfrm>
           <a:prstGeom prst="rect">
             <a:avLst/>
@@ -5037,120 +4972,22 @@
           <a:noFill/>
         </p:spPr>
         <p:txBody>
-          <a:bodyPr wrap="square">
+          <a:bodyPr wrap="square" lIns="45720" rIns="45720" tIns="27432" bIns="27432">
             <a:spAutoFit/>
           </a:bodyPr>
           <a:lstStyle/>
           <a:p>
             <a:pPr algn="l">
-              <a:defRPr sz="1100" b="0">
-                <a:solidFill>
-                  <a:srgbClr val="3A3A3A"/>
-                </a:solidFill>
-                <a:latin typeface="Georgia"/>
+              <a:defRPr sz="1500" b="1">
+                <a:solidFill>
+                  <a:srgbClr val="D47B56"/>
+                </a:solidFill>
+                <a:latin typeface="Calibri"/>
               </a:defRPr>
             </a:pPr>
             <a:r>
-              <a:rPr/>
-              <a:t>最初に見た数字に影響されて、後から入った情報を軽視してしまう。</a:t>
-            </a:r>
-            <a:br/>
-            <a:r>
-              <a:rPr/>
-              <a:t>人間にもある「くせ」ですが、AIはこれをさらに強めてしまうことがある。</a:t>
-            </a:r>
-          </a:p>
-        </p:txBody>
-      </p:sp>
-      <p:sp>
-        <p:nvSpPr>
-          <p:cNvPr id="10" name="Rectangle 9"/>
-          <p:cNvSpPr/>
-          <p:nvPr/>
-        </p:nvSpPr>
-        <p:spPr>
-          <a:xfrm>
-            <a:off x="548640" y="3312871"/>
-            <a:ext cx="54864" cy="680618"/>
-          </a:xfrm>
-          <a:prstGeom prst="rect">
-            <a:avLst/>
-          </a:prstGeom>
-          <a:solidFill>
-            <a:srgbClr val="D47B56"/>
-          </a:solidFill>
-          <a:ln>
-            <a:noFill/>
-          </a:ln>
-        </p:spPr>
-        <p:style>
-          <a:lnRef idx="1">
-            <a:schemeClr val="accent1"/>
-          </a:lnRef>
-          <a:fillRef idx="3">
-            <a:schemeClr val="accent1"/>
-          </a:fillRef>
-          <a:effectRef idx="2">
-            <a:schemeClr val="accent1"/>
-          </a:effectRef>
-          <a:fontRef idx="minor">
-            <a:schemeClr val="lt1"/>
-          </a:fontRef>
-        </p:style>
-        <p:txBody>
-          <a:bodyPr rtlCol="0" anchor="ctr"/>
-          <a:lstStyle/>
-          <a:p>
-            <a:pPr algn="ctr">
-              <a:defRPr/>
-            </a:pPr>
-          </a:p>
-        </p:txBody>
-      </p:sp>
-      <p:sp>
-        <p:nvSpPr>
-          <p:cNvPr id="11" name="Rectangle 10"/>
-          <p:cNvSpPr/>
-          <p:nvPr/>
-        </p:nvSpPr>
-        <p:spPr>
-          <a:xfrm>
-            <a:off x="658368" y="3312871"/>
-            <a:ext cx="7662672" cy="680618"/>
-          </a:xfrm>
-          <a:prstGeom prst="rect">
-            <a:avLst/>
-          </a:prstGeom>
-          <a:solidFill>
-            <a:srgbClr val="FFFFFF"/>
-          </a:solidFill>
-          <a:ln w="12700">
-            <a:solidFill>
-              <a:srgbClr val="A7BEAE"/>
-            </a:solidFill>
-          </a:ln>
-        </p:spPr>
-        <p:style>
-          <a:lnRef idx="1">
-            <a:schemeClr val="accent1"/>
-          </a:lnRef>
-          <a:fillRef idx="3">
-            <a:schemeClr val="accent1"/>
-          </a:fillRef>
-          <a:effectRef idx="2">
-            <a:schemeClr val="accent1"/>
-          </a:effectRef>
-          <a:fontRef idx="minor">
-            <a:schemeClr val="lt1"/>
-          </a:fontRef>
-        </p:style>
-        <p:txBody>
-          <a:bodyPr rtlCol="0" anchor="ctr"/>
-          <a:lstStyle/>
-          <a:p>
-            <a:pPr algn="ctr">
-              <a:defRPr/>
-            </a:pPr>
+              <a:t>⚠ 個人情報の取り扱い</a:t>
+            </a:r>
           </a:p>
         </p:txBody>
       </p:sp>
@@ -5162,8 +4999,8 @@
         </p:nvSpPr>
         <p:spPr>
           <a:xfrm>
-            <a:off x="777240" y="3386023"/>
-            <a:ext cx="7406640" cy="534314"/>
+            <a:off x="4114800" y="3566160"/>
+            <a:ext cx="4114800" cy="731520"/>
           </a:xfrm>
           <a:prstGeom prst="rect">
             <a:avLst/>
@@ -5171,166 +5008,25 @@
           <a:noFill/>
         </p:spPr>
         <p:txBody>
-          <a:bodyPr wrap="square">
+          <a:bodyPr wrap="square" lIns="45720" rIns="45720" tIns="27432" bIns="27432">
             <a:spAutoFit/>
           </a:bodyPr>
           <a:lstStyle/>
           <a:p>
             <a:pPr algn="l">
-              <a:defRPr sz="1100" b="0">
+              <a:defRPr sz="1300" b="0">
                 <a:solidFill>
                   <a:srgbClr val="3A3A3A"/>
                 </a:solidFill>
-                <a:latin typeface="Georgia"/>
+                <a:latin typeface="Calibri"/>
               </a:defRPr>
             </a:pPr>
             <a:r>
-              <a:rPr/>
-              <a:t>「成功率90%の手術です」と聞くと安心するけど、</a:t>
+              <a:t>患者情報をAIに入力する際は</a:t>
             </a:r>
             <a:br/>
             <a:r>
-              <a:rPr/>
-              <a:t>「10人に1人は失敗します」と聞くと不安になる。</a:t>
-            </a:r>
-            <a:br/>
-            <a:r>
-              <a:rPr/>
-              <a:t>同じことなのに、伝え方で印象が変わる — AIにもこの傾向がある。</a:t>
-            </a:r>
-          </a:p>
-        </p:txBody>
-      </p:sp>
-      <p:sp>
-        <p:nvSpPr>
-          <p:cNvPr id="13" name="Rectangle 12"/>
-          <p:cNvSpPr/>
-          <p:nvPr/>
-        </p:nvSpPr>
-        <p:spPr>
-          <a:xfrm>
-            <a:off x="548640" y="4130649"/>
-            <a:ext cx="54864" cy="441350"/>
-          </a:xfrm>
-          <a:prstGeom prst="rect">
-            <a:avLst/>
-          </a:prstGeom>
-          <a:solidFill>
-            <a:srgbClr val="D47B56"/>
-          </a:solidFill>
-          <a:ln>
-            <a:noFill/>
-          </a:ln>
-        </p:spPr>
-        <p:style>
-          <a:lnRef idx="1">
-            <a:schemeClr val="accent1"/>
-          </a:lnRef>
-          <a:fillRef idx="3">
-            <a:schemeClr val="accent1"/>
-          </a:fillRef>
-          <a:effectRef idx="2">
-            <a:schemeClr val="accent1"/>
-          </a:effectRef>
-          <a:fontRef idx="minor">
-            <a:schemeClr val="lt1"/>
-          </a:fontRef>
-        </p:style>
-        <p:txBody>
-          <a:bodyPr rtlCol="0" anchor="ctr"/>
-          <a:lstStyle/>
-          <a:p>
-            <a:pPr algn="ctr">
-              <a:defRPr/>
-            </a:pPr>
-          </a:p>
-        </p:txBody>
-      </p:sp>
-      <p:sp>
-        <p:nvSpPr>
-          <p:cNvPr id="14" name="Rectangle 13"/>
-          <p:cNvSpPr/>
-          <p:nvPr/>
-        </p:nvSpPr>
-        <p:spPr>
-          <a:xfrm>
-            <a:off x="658368" y="4130649"/>
-            <a:ext cx="7662672" cy="441350"/>
-          </a:xfrm>
-          <a:prstGeom prst="rect">
-            <a:avLst/>
-          </a:prstGeom>
-          <a:solidFill>
-            <a:srgbClr val="FFFFFF"/>
-          </a:solidFill>
-          <a:ln w="12700">
-            <a:solidFill>
-              <a:srgbClr val="A7BEAE"/>
-            </a:solidFill>
-          </a:ln>
-        </p:spPr>
-        <p:style>
-          <a:lnRef idx="1">
-            <a:schemeClr val="accent1"/>
-          </a:lnRef>
-          <a:fillRef idx="3">
-            <a:schemeClr val="accent1"/>
-          </a:fillRef>
-          <a:effectRef idx="2">
-            <a:schemeClr val="accent1"/>
-          </a:effectRef>
-          <a:fontRef idx="minor">
-            <a:schemeClr val="lt1"/>
-          </a:fontRef>
-        </p:style>
-        <p:txBody>
-          <a:bodyPr rtlCol="0" anchor="ctr"/>
-          <a:lstStyle/>
-          <a:p>
-            <a:pPr algn="ctr">
-              <a:defRPr/>
-            </a:pPr>
-          </a:p>
-        </p:txBody>
-      </p:sp>
-      <p:sp>
-        <p:nvSpPr>
-          <p:cNvPr id="15" name="TextBox 14"/>
-          <p:cNvSpPr txBox="1"/>
-          <p:nvPr/>
-        </p:nvSpPr>
-        <p:spPr>
-          <a:xfrm>
-            <a:off x="777240" y="4203801"/>
-            <a:ext cx="7406640" cy="295046"/>
-          </a:xfrm>
-          <a:prstGeom prst="rect">
-            <a:avLst/>
-          </a:prstGeom>
-          <a:noFill/>
-        </p:spPr>
-        <p:txBody>
-          <a:bodyPr wrap="square">
-            <a:spAutoFit/>
-          </a:bodyPr>
-          <a:lstStyle/>
-          <a:p>
-            <a:pPr algn="l">
-              <a:defRPr sz="1100" b="0">
-                <a:solidFill>
-                  <a:srgbClr val="3A3A3A"/>
-                </a:solidFill>
-                <a:latin typeface="Georgia"/>
-              </a:defRPr>
-            </a:pPr>
-            <a:r>
-              <a:rPr/>
-              <a:t>AIの答えを「そのまま信じる」のではなく、「本当かな？」と立ち止まる。</a:t>
-            </a:r>
-            <a:br/>
-            <a:r>
-              <a:rPr/>
-              <a:t>これが、AI時代に一番大切なスキルです。</a:t>
+              <a:t>施設のルールを確認。</a:t>
             </a:r>
           </a:p>
         </p:txBody>
@@ -5369,8 +5065,8 @@
         </p:nvSpPr>
         <p:spPr>
           <a:xfrm>
-            <a:off x="457200" y="182880"/>
-            <a:ext cx="8229600" cy="548640"/>
+            <a:off x="457200" y="274320"/>
+            <a:ext cx="8229600" cy="457200"/>
           </a:xfrm>
           <a:prstGeom prst="rect">
             <a:avLst/>
@@ -5378,13 +5074,13 @@
           <a:noFill/>
         </p:spPr>
         <p:txBody>
-          <a:bodyPr wrap="square">
+          <a:bodyPr wrap="square" lIns="45720" rIns="45720" tIns="27432" bIns="27432">
             <a:spAutoFit/>
           </a:bodyPr>
           <a:lstStyle/>
           <a:p>
             <a:pPr algn="l">
-              <a:defRPr sz="2200" b="1">
+              <a:defRPr sz="2400" b="1">
                 <a:solidFill>
                   <a:srgbClr val="FAF3E8"/>
                 </a:solidFill>
@@ -5392,127 +5088,21 @@
               </a:defRPr>
             </a:pPr>
             <a:r>
-              <a:rPr/>
-              <a:t>スライド4: 実際の医療現場ではどう使われている？（8-9分）</a:t>
-            </a:r>
-          </a:p>
-        </p:txBody>
-      </p:sp>
-      <p:sp>
-        <p:nvSpPr>
-          <p:cNvPr id="3" name="TextBox 2"/>
-          <p:cNvSpPr txBox="1"/>
-          <p:nvPr/>
-        </p:nvSpPr>
-        <p:spPr>
-          <a:xfrm>
-            <a:off x="548640" y="822960"/>
-            <a:ext cx="7772400" cy="320040"/>
-          </a:xfrm>
-          <a:prstGeom prst="rect">
-            <a:avLst/>
-          </a:prstGeom>
-          <a:noFill/>
-        </p:spPr>
-        <p:txBody>
-          <a:bodyPr wrap="square">
-            <a:spAutoFit/>
-          </a:bodyPr>
-          <a:lstStyle/>
-          <a:p>
-            <a:pPr algn="l">
-              <a:defRPr sz="1100" b="0">
-                <a:solidFill>
-                  <a:srgbClr val="FAF3E8"/>
-                </a:solidFill>
-                <a:latin typeface="Calibri"/>
-              </a:defRPr>
-            </a:pPr>
-            <a:r>
-              <a:rPr/>
-              <a:t>BJC Healthcareという病院グループでは：</a:t>
-            </a:r>
-          </a:p>
-        </p:txBody>
-      </p:sp>
-      <p:sp>
-        <p:nvSpPr>
-          <p:cNvPr id="4" name="TextBox 3"/>
-          <p:cNvSpPr txBox="1"/>
-          <p:nvPr/>
-        </p:nvSpPr>
-        <p:spPr>
-          <a:xfrm>
-            <a:off x="548640" y="1143000"/>
-            <a:ext cx="7772400" cy="914399"/>
-          </a:xfrm>
-          <a:prstGeom prst="rect">
-            <a:avLst/>
-          </a:prstGeom>
-          <a:noFill/>
-        </p:spPr>
-        <p:txBody>
-          <a:bodyPr wrap="square">
-            <a:spAutoFit/>
-          </a:bodyPr>
-          <a:lstStyle/>
-          <a:p>
-            <a:pPr>
-              <a:defRPr sz="1200">
-                <a:solidFill>
-                  <a:srgbClr val="FAF3E8"/>
-                </a:solidFill>
-                <a:latin typeface="Calibri"/>
-              </a:defRPr>
-              <a:buChar char="●"/>
-            </a:pPr>
-            <a:r>
-              <a:rPr/>
-              <a:t>35,000人以上の患者データをもとに</a:t>
-            </a:r>
-          </a:p>
-          <a:p>
-            <a:pPr>
-              <a:defRPr sz="1200">
-                <a:solidFill>
-                  <a:srgbClr val="FAF3E8"/>
-                </a:solidFill>
-                <a:latin typeface="Calibri"/>
-              </a:defRPr>
-              <a:buChar char="●"/>
-            </a:pPr>
-            <a:r>
-              <a:rPr/>
-              <a:t>AIが「この患者さんは今後のケア計画について話し合うタイミングかもしれません」と提案</a:t>
-            </a:r>
-          </a:p>
-          <a:p>
-            <a:pPr>
-              <a:defRPr sz="1200">
-                <a:solidFill>
-                  <a:srgbClr val="FAF3E8"/>
-                </a:solidFill>
-                <a:latin typeface="Calibri"/>
-              </a:defRPr>
-              <a:buChar char="●"/>
-            </a:pPr>
-            <a:r>
-              <a:rPr/>
-              <a:t>最終判断は必ず医師やケアチームが行う</a:t>
-            </a:r>
-          </a:p>
-        </p:txBody>
-      </p:sp>
-      <p:sp>
-        <p:nvSpPr>
-          <p:cNvPr id="5" name="Rectangle 4"/>
+              <a:t>隣の人と話してみましょう</a:t>
+            </a:r>
+          </a:p>
+        </p:txBody>
+      </p:sp>
+      <p:sp>
+        <p:nvSpPr>
+          <p:cNvPr id="3" name="Rectangle 2"/>
           <p:cNvSpPr/>
           <p:nvPr/>
         </p:nvSpPr>
         <p:spPr>
           <a:xfrm>
-            <a:off x="548640" y="2148839"/>
-            <a:ext cx="54864" cy="457200"/>
+            <a:off x="457200" y="777240"/>
+            <a:ext cx="1828800" cy="54864"/>
           </a:xfrm>
           <a:prstGeom prst="rect">
             <a:avLst/>
@@ -5542,9 +5132,86 @@
           <a:bodyPr rtlCol="0" anchor="ctr"/>
           <a:lstStyle/>
           <a:p>
+            <a:pPr algn="ctr"/>
+          </a:p>
+        </p:txBody>
+      </p:sp>
+      <p:sp>
+        <p:nvSpPr>
+          <p:cNvPr id="4" name="TextBox 3"/>
+          <p:cNvSpPr txBox="1"/>
+          <p:nvPr/>
+        </p:nvSpPr>
+        <p:spPr>
+          <a:xfrm>
+            <a:off x="3200400" y="1097280"/>
+            <a:ext cx="2743200" cy="457200"/>
+          </a:xfrm>
+          <a:prstGeom prst="rect">
+            <a:avLst/>
+          </a:prstGeom>
+          <a:noFill/>
+        </p:spPr>
+        <p:txBody>
+          <a:bodyPr wrap="square" lIns="45720" rIns="45720" tIns="27432" bIns="27432">
+            <a:spAutoFit/>
+          </a:bodyPr>
+          <a:lstStyle/>
+          <a:p>
             <a:pPr algn="ctr">
-              <a:defRPr/>
+              <a:defRPr sz="2800" b="1">
+                <a:solidFill>
+                  <a:srgbClr val="D47B56"/>
+                </a:solidFill>
+                <a:latin typeface="Calibri"/>
+              </a:defRPr>
             </a:pPr>
+            <a:r>
+              <a:t>3分間</a:t>
+            </a:r>
+          </a:p>
+        </p:txBody>
+      </p:sp>
+      <p:sp>
+        <p:nvSpPr>
+          <p:cNvPr id="5" name="Rectangle 4"/>
+          <p:cNvSpPr/>
+          <p:nvPr/>
+        </p:nvSpPr>
+        <p:spPr>
+          <a:xfrm>
+            <a:off x="914400" y="1828800"/>
+            <a:ext cx="54864" cy="1645920"/>
+          </a:xfrm>
+          <a:prstGeom prst="rect">
+            <a:avLst/>
+          </a:prstGeom>
+          <a:solidFill>
+            <a:srgbClr val="D47B56"/>
+          </a:solidFill>
+          <a:ln>
+            <a:noFill/>
+          </a:ln>
+        </p:spPr>
+        <p:style>
+          <a:lnRef idx="1">
+            <a:schemeClr val="accent1"/>
+          </a:lnRef>
+          <a:fillRef idx="3">
+            <a:schemeClr val="accent1"/>
+          </a:fillRef>
+          <a:effectRef idx="2">
+            <a:schemeClr val="accent1"/>
+          </a:effectRef>
+          <a:fontRef idx="minor">
+            <a:schemeClr val="lt1"/>
+          </a:fontRef>
+        </p:style>
+        <p:txBody>
+          <a:bodyPr rtlCol="0" anchor="ctr"/>
+          <a:lstStyle/>
+          <a:p>
+            <a:pPr algn="ctr"/>
           </a:p>
         </p:txBody>
       </p:sp>
@@ -5556,8 +5223,8 @@
         </p:nvSpPr>
         <p:spPr>
           <a:xfrm>
-            <a:off x="658368" y="2148839"/>
-            <a:ext cx="7662672" cy="457200"/>
+            <a:off x="1024128" y="1828800"/>
+            <a:ext cx="7205472" cy="1645920"/>
           </a:xfrm>
           <a:prstGeom prst="rect">
             <a:avLst/>
@@ -5589,9 +5256,7 @@
           <a:bodyPr rtlCol="0" anchor="ctr"/>
           <a:lstStyle/>
           <a:p>
-            <a:pPr algn="ctr">
-              <a:defRPr/>
-            </a:pPr>
+            <a:pPr algn="ctr"/>
           </a:p>
         </p:txBody>
       </p:sp>
@@ -5603,8 +5268,8 @@
         </p:nvSpPr>
         <p:spPr>
           <a:xfrm>
-            <a:off x="777240" y="2221991"/>
-            <a:ext cx="7406640" cy="310896"/>
+            <a:off x="1143000" y="1901952"/>
+            <a:ext cx="6949440" cy="1499616"/>
           </a:xfrm>
           <a:prstGeom prst="rect">
             <a:avLst/>
@@ -5612,13 +5277,13 @@
           <a:noFill/>
         </p:spPr>
         <p:txBody>
-          <a:bodyPr wrap="square">
+          <a:bodyPr wrap="square" lIns="45720" rIns="45720" tIns="27432" bIns="27432">
             <a:spAutoFit/>
           </a:bodyPr>
           <a:lstStyle/>
           <a:p>
             <a:pPr algn="l">
-              <a:defRPr sz="1100" b="0">
+              <a:defRPr sz="1600" b="0">
                 <a:solidFill>
                   <a:srgbClr val="3A3A3A"/>
                 </a:solidFill>
@@ -5626,390 +5291,30 @@
               </a:defRPr>
             </a:pPr>
             <a:r>
-              <a:rPr/>
-              <a:t>ポイント: AIは「提案する」だけ。「決める」のは人間。</a:t>
-            </a:r>
-          </a:p>
-        </p:txBody>
-      </p:sp>
-      <p:graphicFrame>
-        <p:nvGraphicFramePr>
-          <p:cNvPr id="8" name="Table 7"/>
-          <p:cNvGraphicFramePr>
-            <a:graphicFrameLocks noGrp="1"/>
-          </p:cNvGraphicFramePr>
-          <p:nvPr/>
-        </p:nvGraphicFramePr>
-        <p:xfrm>
-          <a:off x="548640" y="2743199"/>
-          <a:ext cx="7772400" cy="1371600"/>
-        </p:xfrm>
-        <a:graphic>
-          <a:graphicData uri="http://schemas.openxmlformats.org/drawingml/2006/table">
-            <a:tbl>
-              <a:tblPr firstRow="1" bandRow="1">
-                <a:tableStyleId>{5C22544A-7EE6-4342-B048-85BDC9FD1C3A}</a:tableStyleId>
-              </a:tblPr>
-              <a:tblGrid>
-                <a:gridCol w="3886200"/>
-                <a:gridCol w="3886200"/>
-              </a:tblGrid>
-              <a:tr h="274320">
-                <a:tc>
-                  <a:txBody>
-                    <a:bodyPr/>
-                    <a:lstStyle/>
-                    <a:p>
-                      <a:pPr>
-                        <a:defRPr sz="900" b="1">
-                          <a:solidFill>
-                            <a:srgbClr val="FAF3E8"/>
-                          </a:solidFill>
-                          <a:latin typeface="Calibri"/>
-                        </a:defRPr>
-                      </a:pPr>
-                      <a:r>
-                        <a:t>これまで</a:t>
-                      </a:r>
-                    </a:p>
-                  </a:txBody>
-                  <a:tcPr>
-                    <a:solidFill>
-                      <a:srgbClr val="7A5C4F"/>
-                    </a:solidFill>
-                  </a:tcPr>
-                </a:tc>
-                <a:tc>
-                  <a:txBody>
-                    <a:bodyPr/>
-                    <a:lstStyle/>
-                    <a:p>
-                      <a:pPr>
-                        <a:defRPr sz="900" b="1">
-                          <a:solidFill>
-                            <a:srgbClr val="FAF3E8"/>
-                          </a:solidFill>
-                          <a:latin typeface="Calibri"/>
-                        </a:defRPr>
-                      </a:pPr>
-                      <a:r>
-                        <a:t>これから</a:t>
-                      </a:r>
-                    </a:p>
-                  </a:txBody>
-                  <a:tcPr>
-                    <a:solidFill>
-                      <a:srgbClr val="7A5C4F"/>
-                    </a:solidFill>
-                  </a:tcPr>
-                </a:tc>
-              </a:tr>
-              <a:tr h="274320">
-                <a:tc>
-                  <a:txBody>
-                    <a:bodyPr/>
-                    <a:lstStyle/>
-                    <a:p>
-                      <a:pPr>
-                        <a:defRPr sz="900">
-                          <a:solidFill>
-                            <a:srgbClr val="3A3A3A"/>
-                          </a:solidFill>
-                          <a:latin typeface="Calibri"/>
-                        </a:defRPr>
-                      </a:pPr>
-                      <a:r>
-                        <a:t>---------</a:t>
-                      </a:r>
-                    </a:p>
-                  </a:txBody>
-                  <a:tcPr>
-                    <a:solidFill>
-                      <a:srgbClr val="F5EEE5"/>
-                    </a:solidFill>
-                  </a:tcPr>
-                </a:tc>
-                <a:tc>
-                  <a:txBody>
-                    <a:bodyPr/>
-                    <a:lstStyle/>
-                    <a:p>
-                      <a:pPr>
-                        <a:defRPr sz="900">
-                          <a:solidFill>
-                            <a:srgbClr val="3A3A3A"/>
-                          </a:solidFill>
-                          <a:latin typeface="Calibri"/>
-                        </a:defRPr>
-                      </a:pPr>
-                      <a:r>
-                        <a:t>---------</a:t>
-                      </a:r>
-                    </a:p>
-                  </a:txBody>
-                  <a:tcPr>
-                    <a:solidFill>
-                      <a:srgbClr val="F5EEE5"/>
-                    </a:solidFill>
-                  </a:tcPr>
-                </a:tc>
-              </a:tr>
-              <a:tr h="274320">
-                <a:tc>
-                  <a:txBody>
-                    <a:bodyPr/>
-                    <a:lstStyle/>
-                    <a:p>
-                      <a:pPr>
-                        <a:defRPr sz="900">
-                          <a:solidFill>
-                            <a:srgbClr val="3A3A3A"/>
-                          </a:solidFill>
-                          <a:latin typeface="Calibri"/>
-                        </a:defRPr>
-                      </a:pPr>
-                      <a:r>
-                        <a:t>スタッフだけでカンファレンス</a:t>
-                      </a:r>
-                    </a:p>
-                  </a:txBody>
-                  <a:tcPr>
-                    <a:solidFill>
-                      <a:srgbClr val="FAF3E8"/>
-                    </a:solidFill>
-                  </a:tcPr>
-                </a:tc>
-                <a:tc>
-                  <a:txBody>
-                    <a:bodyPr/>
-                    <a:lstStyle/>
-                    <a:p>
-                      <a:pPr>
-                        <a:defRPr sz="900">
-                          <a:solidFill>
-                            <a:srgbClr val="3A3A3A"/>
-                          </a:solidFill>
-                          <a:latin typeface="Calibri"/>
-                        </a:defRPr>
-                      </a:pPr>
-                      <a:r>
-                        <a:t>AIが事前に情報を整理してくれる</a:t>
-                      </a:r>
-                    </a:p>
-                  </a:txBody>
-                  <a:tcPr>
-                    <a:solidFill>
-                      <a:srgbClr val="FAF3E8"/>
-                    </a:solidFill>
-                  </a:tcPr>
-                </a:tc>
-              </a:tr>
-              <a:tr h="274320">
-                <a:tc>
-                  <a:txBody>
-                    <a:bodyPr/>
-                    <a:lstStyle/>
-                    <a:p>
-                      <a:pPr>
-                        <a:defRPr sz="900">
-                          <a:solidFill>
-                            <a:srgbClr val="3A3A3A"/>
-                          </a:solidFill>
-                          <a:latin typeface="Calibri"/>
-                        </a:defRPr>
-                      </a:pPr>
-                      <a:r>
-                        <a:t>手作業でデータを集計</a:t>
-                      </a:r>
-                    </a:p>
-                  </a:txBody>
-                  <a:tcPr>
-                    <a:solidFill>
-                      <a:srgbClr val="F5EEE5"/>
-                    </a:solidFill>
-                  </a:tcPr>
-                </a:tc>
-                <a:tc>
-                  <a:txBody>
-                    <a:bodyPr/>
-                    <a:lstStyle/>
-                    <a:p>
-                      <a:pPr>
-                        <a:defRPr sz="900">
-                          <a:solidFill>
-                            <a:srgbClr val="3A3A3A"/>
-                          </a:solidFill>
-                          <a:latin typeface="Calibri"/>
-                        </a:defRPr>
-                      </a:pPr>
-                      <a:r>
-                        <a:t>AIが自動で傾向をまとめてくれる</a:t>
-                      </a:r>
-                    </a:p>
-                  </a:txBody>
-                  <a:tcPr>
-                    <a:solidFill>
-                      <a:srgbClr val="F5EEE5"/>
-                    </a:solidFill>
-                  </a:tcPr>
-                </a:tc>
-              </a:tr>
-              <a:tr h="274320">
-                <a:tc>
-                  <a:txBody>
-                    <a:bodyPr/>
-                    <a:lstStyle/>
-                    <a:p>
-                      <a:pPr>
-                        <a:defRPr sz="900">
-                          <a:solidFill>
-                            <a:srgbClr val="3A3A3A"/>
-                          </a:solidFill>
-                          <a:latin typeface="Calibri"/>
-                        </a:defRPr>
-                      </a:pPr>
-                      <a:r>
-                        <a:t>経験と勘で優先度を判断</a:t>
-                      </a:r>
-                    </a:p>
-                  </a:txBody>
-                  <a:tcPr>
-                    <a:solidFill>
-                      <a:srgbClr val="FAF3E8"/>
-                    </a:solidFill>
-                  </a:tcPr>
-                </a:tc>
-                <a:tc>
-                  <a:txBody>
-                    <a:bodyPr/>
-                    <a:lstStyle/>
-                    <a:p>
-                      <a:pPr>
-                        <a:defRPr sz="900">
-                          <a:solidFill>
-                            <a:srgbClr val="3A3A3A"/>
-                          </a:solidFill>
-                          <a:latin typeface="Calibri"/>
-                        </a:defRPr>
-                      </a:pPr>
-                      <a:r>
-                        <a:t>AIが「見落とし」を減らす手伝い</a:t>
-                      </a:r>
-                    </a:p>
-                  </a:txBody>
-                  <a:tcPr>
-                    <a:solidFill>
-                      <a:srgbClr val="FAF3E8"/>
-                    </a:solidFill>
-                  </a:tcPr>
-                </a:tc>
-              </a:tr>
-            </a:tbl>
-          </a:graphicData>
-        </a:graphic>
-      </p:graphicFrame>
-      <p:sp>
-        <p:nvSpPr>
-          <p:cNvPr id="9" name="Rectangle 8"/>
-          <p:cNvSpPr/>
-          <p:nvPr/>
-        </p:nvSpPr>
-        <p:spPr>
-          <a:xfrm>
-            <a:off x="548640" y="4251959"/>
-            <a:ext cx="54864" cy="320040"/>
-          </a:xfrm>
-          <a:prstGeom prst="rect">
-            <a:avLst/>
-          </a:prstGeom>
-          <a:solidFill>
-            <a:srgbClr val="D47B56"/>
-          </a:solidFill>
-          <a:ln>
-            <a:noFill/>
-          </a:ln>
-        </p:spPr>
-        <p:style>
-          <a:lnRef idx="1">
-            <a:schemeClr val="accent1"/>
-          </a:lnRef>
-          <a:fillRef idx="3">
-            <a:schemeClr val="accent1"/>
-          </a:fillRef>
-          <a:effectRef idx="2">
-            <a:schemeClr val="accent1"/>
-          </a:effectRef>
-          <a:fontRef idx="minor">
-            <a:schemeClr val="lt1"/>
-          </a:fontRef>
-        </p:style>
-        <p:txBody>
-          <a:bodyPr rtlCol="0" anchor="ctr"/>
-          <a:lstStyle/>
-          <a:p>
-            <a:pPr algn="ctr">
-              <a:defRPr/>
-            </a:pPr>
-          </a:p>
-        </p:txBody>
-      </p:sp>
-      <p:sp>
-        <p:nvSpPr>
-          <p:cNvPr id="10" name="Rectangle 9"/>
-          <p:cNvSpPr/>
-          <p:nvPr/>
-        </p:nvSpPr>
-        <p:spPr>
-          <a:xfrm>
-            <a:off x="658368" y="4251959"/>
-            <a:ext cx="7662672" cy="320040"/>
-          </a:xfrm>
-          <a:prstGeom prst="rect">
-            <a:avLst/>
-          </a:prstGeom>
-          <a:solidFill>
-            <a:srgbClr val="FFFFFF"/>
-          </a:solidFill>
-          <a:ln w="12700">
-            <a:solidFill>
-              <a:srgbClr val="A7BEAE"/>
-            </a:solidFill>
-          </a:ln>
-        </p:spPr>
-        <p:style>
-          <a:lnRef idx="1">
-            <a:schemeClr val="accent1"/>
-          </a:lnRef>
-          <a:fillRef idx="3">
-            <a:schemeClr val="accent1"/>
-          </a:fillRef>
-          <a:effectRef idx="2">
-            <a:schemeClr val="accent1"/>
-          </a:effectRef>
-          <a:fontRef idx="minor">
-            <a:schemeClr val="lt1"/>
-          </a:fontRef>
-        </p:style>
-        <p:txBody>
-          <a:bodyPr rtlCol="0" anchor="ctr"/>
-          <a:lstStyle/>
-          <a:p>
-            <a:pPr algn="ctr">
-              <a:defRPr/>
-            </a:pPr>
-          </a:p>
-        </p:txBody>
-      </p:sp>
-      <p:sp>
-        <p:nvSpPr>
-          <p:cNvPr id="11" name="TextBox 10"/>
+              <a:t>あなたの業務で、AIが役立ちそうな場面は</a:t>
+            </a:r>
+            <a:br/>
+            <a:r>
+              <a:t>どんなところですか？</a:t>
+            </a:r>
+            <a:br/>
+            <a:br/>
+            <a:r>
+              <a:t>逆に、「ここはAIに任せたくない」と思う場面は？</a:t>
+            </a:r>
+          </a:p>
+        </p:txBody>
+      </p:sp>
+      <p:sp>
+        <p:nvSpPr>
+          <p:cNvPr id="8" name="TextBox 7"/>
           <p:cNvSpPr txBox="1"/>
           <p:nvPr/>
         </p:nvSpPr>
         <p:spPr>
           <a:xfrm>
-            <a:off x="777240" y="4325112"/>
-            <a:ext cx="7406640" cy="287020"/>
+            <a:off x="1371600" y="3931920"/>
+            <a:ext cx="6400800" cy="274320"/>
           </a:xfrm>
           <a:prstGeom prst="rect">
             <a:avLst/>
@@ -6017,22 +5322,21 @@
           <a:noFill/>
         </p:spPr>
         <p:txBody>
-          <a:bodyPr wrap="square">
+          <a:bodyPr wrap="square" lIns="45720" rIns="45720" tIns="27432" bIns="27432">
             <a:spAutoFit/>
           </a:bodyPr>
           <a:lstStyle/>
           <a:p>
             <a:pPr algn="l">
-              <a:defRPr sz="1100" b="0">
-                <a:solidFill>
-                  <a:srgbClr val="3A3A3A"/>
-                </a:solidFill>
-                <a:latin typeface="Georgia"/>
+              <a:defRPr sz="1200" b="0">
+                <a:solidFill>
+                  <a:srgbClr val="9E8A7E"/>
+                </a:solidFill>
+                <a:latin typeface="Calibri"/>
               </a:defRPr>
             </a:pPr>
             <a:r>
-              <a:rPr/>
-              <a:t>AIはチームの一員。でも、リーダーは常に人間です。</a:t>
+              <a:t>正解はありません。感じたことを共有してください。</a:t>
             </a:r>
           </a:p>
         </p:txBody>
@@ -6072,7 +5376,7 @@
         <p:spPr>
           <a:xfrm>
             <a:off x="457200" y="182880"/>
-            <a:ext cx="8229600" cy="548640"/>
+            <a:ext cx="8229600" cy="457200"/>
           </a:xfrm>
           <a:prstGeom prst="rect">
             <a:avLst/>
@@ -6080,13 +5384,13 @@
           <a:noFill/>
         </p:spPr>
         <p:txBody>
-          <a:bodyPr wrap="square">
+          <a:bodyPr wrap="square" lIns="45720" rIns="45720" tIns="27432" bIns="27432">
             <a:spAutoFit/>
           </a:bodyPr>
           <a:lstStyle/>
           <a:p>
             <a:pPr algn="l">
-              <a:defRPr sz="2200" b="1">
+              <a:defRPr sz="2400" b="1">
                 <a:solidFill>
                   <a:srgbClr val="3A3A3A"/>
                 </a:solidFill>
@@ -6094,59 +5398,21 @@
               </a:defRPr>
             </a:pPr>
             <a:r>
-              <a:rPr/>
-              <a:t>スライド5: みんなで考えよう（9-13分）</a:t>
-            </a:r>
-          </a:p>
-        </p:txBody>
-      </p:sp>
-      <p:sp>
-        <p:nvSpPr>
-          <p:cNvPr id="3" name="TextBox 2"/>
-          <p:cNvSpPr txBox="1"/>
-          <p:nvPr/>
-        </p:nvSpPr>
-        <p:spPr>
-          <a:xfrm>
-            <a:off x="548640" y="822960"/>
-            <a:ext cx="7772400" cy="320040"/>
-          </a:xfrm>
-          <a:prstGeom prst="rect">
-            <a:avLst/>
-          </a:prstGeom>
-          <a:noFill/>
-        </p:spPr>
-        <p:txBody>
-          <a:bodyPr wrap="square">
-            <a:spAutoFit/>
-          </a:bodyPr>
-          <a:lstStyle/>
-          <a:p>
-            <a:pPr algn="l">
-              <a:defRPr sz="1100" b="0">
-                <a:solidFill>
-                  <a:srgbClr val="3A3A3A"/>
-                </a:solidFill>
-                <a:latin typeface="Calibri"/>
-              </a:defRPr>
-            </a:pPr>
-            <a:r>
-              <a:rPr/>
-              <a:t>3-4人のグループで話し合ってみましょう：</a:t>
-            </a:r>
-          </a:p>
-        </p:txBody>
-      </p:sp>
-      <p:sp>
-        <p:nvSpPr>
-          <p:cNvPr id="4" name="Rectangle 3"/>
+              <a:t>3つだけ覚えてください</a:t>
+            </a:r>
+          </a:p>
+        </p:txBody>
+      </p:sp>
+      <p:sp>
+        <p:nvSpPr>
+          <p:cNvPr id="3" name="Rectangle 2"/>
           <p:cNvSpPr/>
           <p:nvPr/>
         </p:nvSpPr>
         <p:spPr>
           <a:xfrm>
-            <a:off x="548640" y="1143000"/>
-            <a:ext cx="54864" cy="791260"/>
+            <a:off x="457200" y="658368"/>
+            <a:ext cx="1828800" cy="54864"/>
           </a:xfrm>
           <a:prstGeom prst="rect">
             <a:avLst/>
@@ -6176,241 +5442,20 @@
           <a:bodyPr rtlCol="0" anchor="ctr"/>
           <a:lstStyle/>
           <a:p>
-            <a:pPr algn="ctr">
-              <a:defRPr/>
-            </a:pPr>
-          </a:p>
-        </p:txBody>
-      </p:sp>
-      <p:sp>
-        <p:nvSpPr>
-          <p:cNvPr id="5" name="Rectangle 4"/>
+            <a:pPr algn="ctr"/>
+          </a:p>
+        </p:txBody>
+      </p:sp>
+      <p:sp>
+        <p:nvSpPr>
+          <p:cNvPr id="4" name="Rectangle 3"/>
           <p:cNvSpPr/>
           <p:nvPr/>
         </p:nvSpPr>
         <p:spPr>
           <a:xfrm>
-            <a:off x="658368" y="1143000"/>
-            <a:ext cx="7662672" cy="791260"/>
-          </a:xfrm>
-          <a:prstGeom prst="rect">
-            <a:avLst/>
-          </a:prstGeom>
-          <a:solidFill>
-            <a:srgbClr val="FFFFFF"/>
-          </a:solidFill>
-          <a:ln w="12700">
-            <a:solidFill>
-              <a:srgbClr val="A7BEAE"/>
-            </a:solidFill>
-          </a:ln>
-        </p:spPr>
-        <p:style>
-          <a:lnRef idx="1">
-            <a:schemeClr val="accent1"/>
-          </a:lnRef>
-          <a:fillRef idx="3">
-            <a:schemeClr val="accent1"/>
-          </a:fillRef>
-          <a:effectRef idx="2">
-            <a:schemeClr val="accent1"/>
-          </a:effectRef>
-          <a:fontRef idx="minor">
-            <a:schemeClr val="lt1"/>
-          </a:fontRef>
-        </p:style>
-        <p:txBody>
-          <a:bodyPr rtlCol="0" anchor="ctr"/>
-          <a:lstStyle/>
-          <a:p>
-            <a:pPr algn="ctr">
-              <a:defRPr/>
-            </a:pPr>
-          </a:p>
-        </p:txBody>
-      </p:sp>
-      <p:sp>
-        <p:nvSpPr>
-          <p:cNvPr id="6" name="TextBox 5"/>
-          <p:cNvSpPr txBox="1"/>
-          <p:nvPr/>
-        </p:nvSpPr>
-        <p:spPr>
-          <a:xfrm>
-            <a:off x="777240" y="1216152"/>
-            <a:ext cx="7406640" cy="644956"/>
-          </a:xfrm>
-          <a:prstGeom prst="rect">
-            <a:avLst/>
-          </a:prstGeom>
-          <a:noFill/>
-        </p:spPr>
-        <p:txBody>
-          <a:bodyPr wrap="square">
-            <a:spAutoFit/>
-          </a:bodyPr>
-          <a:lstStyle/>
-          <a:p>
-            <a:pPr algn="l">
-              <a:defRPr sz="1100" b="0">
-                <a:solidFill>
-                  <a:srgbClr val="3A3A3A"/>
-                </a:solidFill>
-                <a:latin typeface="Georgia"/>
-              </a:defRPr>
-            </a:pPr>
-            <a:r>
-              <a:rPr/>
-              <a:t>テーマ:</a:t>
-            </a:r>
-            <a:br/>
-            <a:r>
-              <a:rPr/>
-              <a:t>「あなたの業務の中で...」</a:t>
-            </a:r>
-            <a:br/>
-            <a:r>
-              <a:rPr/>
-              <a:t>1. AIに手伝ってもらいたいことは？</a:t>
-            </a:r>
-            <a:br/>
-            <a:r>
-              <a:rPr/>
-              <a:t>2. 絶対に人がやるべきことは？</a:t>
-            </a:r>
-          </a:p>
-        </p:txBody>
-      </p:sp>
-      <p:sp>
-        <p:nvSpPr>
-          <p:cNvPr id="7" name="TextBox 6"/>
-          <p:cNvSpPr txBox="1"/>
-          <p:nvPr/>
-        </p:nvSpPr>
-        <p:spPr>
-          <a:xfrm>
-            <a:off x="548640" y="2071420"/>
-            <a:ext cx="7772400" cy="322579"/>
-          </a:xfrm>
-          <a:prstGeom prst="rect">
-            <a:avLst/>
-          </a:prstGeom>
-          <a:noFill/>
-        </p:spPr>
-        <p:txBody>
-          <a:bodyPr wrap="square">
-            <a:spAutoFit/>
-          </a:bodyPr>
-          <a:lstStyle/>
-          <a:p>
-            <a:pPr algn="l">
-              <a:defRPr sz="1300" b="1">
-                <a:solidFill>
-                  <a:srgbClr val="3A3A3A"/>
-                </a:solidFill>
-                <a:latin typeface="Calibri"/>
-              </a:defRPr>
-            </a:pPr>
-            <a:r>
-              <a:rPr/>
-              <a:t>考えるヒント:</a:t>
-            </a:r>
-          </a:p>
-        </p:txBody>
-      </p:sp>
-      <p:sp>
-        <p:nvSpPr>
-          <p:cNvPr id="8" name="TextBox 7"/>
-          <p:cNvSpPr txBox="1"/>
-          <p:nvPr/>
-        </p:nvSpPr>
-        <p:spPr>
-          <a:xfrm>
-            <a:off x="548640" y="2437180"/>
-            <a:ext cx="7772400" cy="1188720"/>
-          </a:xfrm>
-          <a:prstGeom prst="rect">
-            <a:avLst/>
-          </a:prstGeom>
-          <a:noFill/>
-        </p:spPr>
-        <p:txBody>
-          <a:bodyPr wrap="square">
-            <a:spAutoFit/>
-          </a:bodyPr>
-          <a:lstStyle/>
-          <a:p>
-            <a:pPr>
-              <a:defRPr sz="1200">
-                <a:solidFill>
-                  <a:srgbClr val="3A3A3A"/>
-                </a:solidFill>
-                <a:latin typeface="Calibri"/>
-              </a:defRPr>
-              <a:buChar char="●"/>
-            </a:pPr>
-            <a:r>
-              <a:rPr/>
-              <a:t>毎日繰り返しているデータ入力や記録作業は？</a:t>
-            </a:r>
-          </a:p>
-          <a:p>
-            <a:pPr>
-              <a:defRPr sz="1200">
-                <a:solidFill>
-                  <a:srgbClr val="3A3A3A"/>
-                </a:solidFill>
-                <a:latin typeface="Calibri"/>
-              </a:defRPr>
-              <a:buChar char="●"/>
-            </a:pPr>
-            <a:r>
-              <a:rPr/>
-              <a:t>「ダブルチェック」で時間がかかっている業務は？</a:t>
-            </a:r>
-          </a:p>
-          <a:p>
-            <a:pPr>
-              <a:defRPr sz="1200">
-                <a:solidFill>
-                  <a:srgbClr val="3A3A3A"/>
-                </a:solidFill>
-                <a:latin typeface="Calibri"/>
-              </a:defRPr>
-              <a:buChar char="●"/>
-            </a:pPr>
-            <a:r>
-              <a:rPr/>
-              <a:t>患者さんやご家族と直接向き合う場面は？</a:t>
-            </a:r>
-          </a:p>
-          <a:p>
-            <a:pPr>
-              <a:defRPr sz="1200">
-                <a:solidFill>
-                  <a:srgbClr val="3A3A3A"/>
-                </a:solidFill>
-                <a:latin typeface="Calibri"/>
-              </a:defRPr>
-              <a:buChar char="●"/>
-            </a:pPr>
-            <a:r>
-              <a:rPr/>
-              <a:t>「この仕事、間違えたら大変」という判断業務は？</a:t>
-            </a:r>
-          </a:p>
-        </p:txBody>
-      </p:sp>
-      <p:sp>
-        <p:nvSpPr>
-          <p:cNvPr id="9" name="Rectangle 8"/>
-          <p:cNvSpPr/>
-          <p:nvPr/>
-        </p:nvSpPr>
-        <p:spPr>
-          <a:xfrm>
-            <a:off x="548640" y="3717340"/>
-            <a:ext cx="54864" cy="457200"/>
+            <a:off x="731520" y="914400"/>
+            <a:ext cx="914400" cy="1005840"/>
           </a:xfrm>
           <a:prstGeom prst="rect">
             <a:avLst/>
@@ -6440,69 +5485,20 @@
           <a:bodyPr rtlCol="0" anchor="ctr"/>
           <a:lstStyle/>
           <a:p>
-            <a:pPr algn="ctr">
-              <a:defRPr/>
-            </a:pPr>
-          </a:p>
-        </p:txBody>
-      </p:sp>
-      <p:sp>
-        <p:nvSpPr>
-          <p:cNvPr id="10" name="Rectangle 9"/>
-          <p:cNvSpPr/>
-          <p:nvPr/>
-        </p:nvSpPr>
-        <p:spPr>
-          <a:xfrm>
-            <a:off x="658368" y="3717340"/>
-            <a:ext cx="7662672" cy="457200"/>
-          </a:xfrm>
-          <a:prstGeom prst="rect">
-            <a:avLst/>
-          </a:prstGeom>
-          <a:solidFill>
-            <a:srgbClr val="FFFFFF"/>
-          </a:solidFill>
-          <a:ln w="12700">
-            <a:solidFill>
-              <a:srgbClr val="A7BEAE"/>
-            </a:solidFill>
-          </a:ln>
-        </p:spPr>
-        <p:style>
-          <a:lnRef idx="1">
-            <a:schemeClr val="accent1"/>
-          </a:lnRef>
-          <a:fillRef idx="3">
-            <a:schemeClr val="accent1"/>
-          </a:fillRef>
-          <a:effectRef idx="2">
-            <a:schemeClr val="accent1"/>
-          </a:effectRef>
-          <a:fontRef idx="minor">
-            <a:schemeClr val="lt1"/>
-          </a:fontRef>
-        </p:style>
-        <p:txBody>
-          <a:bodyPr rtlCol="0" anchor="ctr"/>
-          <a:lstStyle/>
-          <a:p>
-            <a:pPr algn="ctr">
-              <a:defRPr/>
-            </a:pPr>
-          </a:p>
-        </p:txBody>
-      </p:sp>
-      <p:sp>
-        <p:nvSpPr>
-          <p:cNvPr id="11" name="TextBox 10"/>
+            <a:pPr algn="ctr"/>
+          </a:p>
+        </p:txBody>
+      </p:sp>
+      <p:sp>
+        <p:nvSpPr>
+          <p:cNvPr id="5" name="TextBox 4"/>
           <p:cNvSpPr txBox="1"/>
           <p:nvPr/>
         </p:nvSpPr>
         <p:spPr>
           <a:xfrm>
-            <a:off x="777240" y="3790492"/>
-            <a:ext cx="7406640" cy="310896"/>
+            <a:off x="731520" y="1005840"/>
+            <a:ext cx="914400" cy="822960"/>
           </a:xfrm>
           <a:prstGeom prst="rect">
             <a:avLst/>
@@ -6510,41 +5506,35 @@
           <a:noFill/>
         </p:spPr>
         <p:txBody>
-          <a:bodyPr wrap="square">
+          <a:bodyPr wrap="square" lIns="45720" rIns="45720" tIns="27432" bIns="27432">
             <a:spAutoFit/>
           </a:bodyPr>
           <a:lstStyle/>
           <a:p>
-            <a:pPr algn="l">
-              <a:defRPr sz="1100" b="0">
-                <a:solidFill>
-                  <a:srgbClr val="3A3A3A"/>
-                </a:solidFill>
-                <a:latin typeface="Georgia"/>
+            <a:pPr algn="ctr">
+              <a:defRPr sz="2800" b="1">
+                <a:solidFill>
+                  <a:srgbClr val="7A5C4F"/>
+                </a:solidFill>
+                <a:latin typeface="Calibri"/>
               </a:defRPr>
             </a:pPr>
             <a:r>
-              <a:rPr/>
-              <a:t>考え方のコツ:</a:t>
-            </a:r>
-            <a:br/>
-            <a:r>
-              <a:rPr/>
-              <a:t>「AIに任せて楽になること」と「人間だからこそ意味があること」を分けてみよう。</a:t>
-            </a:r>
-          </a:p>
-        </p:txBody>
-      </p:sp>
-      <p:sp>
-        <p:nvSpPr>
-          <p:cNvPr id="12" name="TextBox 11"/>
+              <a:t>1</a:t>
+            </a:r>
+          </a:p>
+        </p:txBody>
+      </p:sp>
+      <p:sp>
+        <p:nvSpPr>
+          <p:cNvPr id="6" name="TextBox 5"/>
           <p:cNvSpPr txBox="1"/>
           <p:nvPr/>
         </p:nvSpPr>
         <p:spPr>
           <a:xfrm>
-            <a:off x="548640" y="4311700"/>
-            <a:ext cx="7772400" cy="304799"/>
+            <a:off x="1828800" y="960120"/>
+            <a:ext cx="3657600" cy="365760"/>
           </a:xfrm>
           <a:prstGeom prst="rect">
             <a:avLst/>
@@ -6552,63 +5542,35 @@
           <a:noFill/>
         </p:spPr>
         <p:txBody>
-          <a:bodyPr wrap="square">
+          <a:bodyPr wrap="square" lIns="45720" rIns="45720" tIns="27432" bIns="27432">
             <a:spAutoFit/>
           </a:bodyPr>
           <a:lstStyle/>
           <a:p>
-            <a:pPr>
-              <a:defRPr sz="1200">
+            <a:pPr algn="l">
+              <a:defRPr sz="1600" b="1">
                 <a:solidFill>
                   <a:srgbClr val="3A3A3A"/>
                 </a:solidFill>
                 <a:latin typeface="Calibri"/>
               </a:defRPr>
-              <a:buChar char="●"/>
             </a:pPr>
             <a:r>
-              <a:rPr/>
-              <a:t>各グループから1つずつ共有</a:t>
-            </a:r>
-          </a:p>
-        </p:txBody>
-      </p:sp>
-    </p:spTree>
-  </p:cSld>
-  <p:clrMapOvr>
-    <a:masterClrMapping/>
-  </p:clrMapOvr>
-</p:sld>
-</file>
-
-<file path=ppt/slides/slide7.xml><?xml version="1.0" encoding="utf-8"?>
-<p:sld xmlns:a="http://schemas.openxmlformats.org/drawingml/2006/main" xmlns:p="http://schemas.openxmlformats.org/presentationml/2006/main" xmlns:r="http://schemas.openxmlformats.org/officeDocument/2006/relationships">
-  <p:cSld>
-    <p:bg>
-      <p:bgPr>
-        <a:solidFill>
-          <a:srgbClr val="7A5C4F"/>
-        </a:solidFill>
-        <a:effectLst/>
-      </p:bgPr>
-    </p:bg>
-    <p:spTree>
-      <p:nvGrpSpPr>
-        <p:cNvPr id="1" name=""/>
-        <p:cNvGrpSpPr/>
-        <p:nvPr/>
-      </p:nvGrpSpPr>
-      <p:grpSpPr/>
-      <p:sp>
-        <p:nvSpPr>
-          <p:cNvPr id="2" name="TextBox 1"/>
+              <a:t>AIは道具</a:t>
+            </a:r>
+          </a:p>
+        </p:txBody>
+      </p:sp>
+      <p:sp>
+        <p:nvSpPr>
+          <p:cNvPr id="7" name="TextBox 6"/>
           <p:cNvSpPr txBox="1"/>
           <p:nvPr/>
         </p:nvSpPr>
         <p:spPr>
           <a:xfrm>
-            <a:off x="457200" y="182880"/>
-            <a:ext cx="8229600" cy="548640"/>
+            <a:off x="1828800" y="1371600"/>
+            <a:ext cx="6858000" cy="457200"/>
           </a:xfrm>
           <a:prstGeom prst="rect">
             <a:avLst/>
@@ -6616,430 +5578,39 @@
           <a:noFill/>
         </p:spPr>
         <p:txBody>
-          <a:bodyPr wrap="square">
+          <a:bodyPr wrap="square" lIns="45720" rIns="45720" tIns="27432" bIns="27432">
             <a:spAutoFit/>
           </a:bodyPr>
           <a:lstStyle/>
           <a:p>
             <a:pPr algn="l">
-              <a:defRPr sz="2200" b="1">
-                <a:solidFill>
-                  <a:srgbClr val="FAF3E8"/>
+              <a:defRPr sz="1200" b="0">
+                <a:solidFill>
+                  <a:srgbClr val="3A3A3A"/>
                 </a:solidFill>
                 <a:latin typeface="Calibri"/>
               </a:defRPr>
             </a:pPr>
             <a:r>
-              <a:rPr/>
-              <a:t>スライド6: まとめ — だから、あなたが大切（13-15分）</a:t>
-            </a:r>
-          </a:p>
-        </p:txBody>
-      </p:sp>
-      <p:graphicFrame>
-        <p:nvGraphicFramePr>
-          <p:cNvPr id="3" name="Table 2"/>
-          <p:cNvGraphicFramePr>
-            <a:graphicFrameLocks noGrp="1"/>
-          </p:cNvGraphicFramePr>
-          <p:nvPr/>
-        </p:nvGraphicFramePr>
-        <p:xfrm>
-          <a:off x="548640" y="822960"/>
-          <a:ext cx="7772400" cy="1371600"/>
-        </p:xfrm>
-        <a:graphic>
-          <a:graphicData uri="http://schemas.openxmlformats.org/drawingml/2006/table">
-            <a:tbl>
-              <a:tblPr firstRow="1" bandRow="1">
-                <a:tableStyleId>{5C22544A-7EE6-4342-B048-85BDC9FD1C3A}</a:tableStyleId>
-              </a:tblPr>
-              <a:tblGrid>
-                <a:gridCol w="2590800"/>
-                <a:gridCol w="2590800"/>
-                <a:gridCol w="2590800"/>
-              </a:tblGrid>
-              <a:tr h="274320">
-                <a:tc>
-                  <a:txBody>
-                    <a:bodyPr/>
-                    <a:lstStyle/>
-                    <a:p>
-                      <a:pPr>
-                        <a:defRPr sz="900" b="1">
-                          <a:solidFill>
-                            <a:srgbClr val="FAF3E8"/>
-                          </a:solidFill>
-                          <a:latin typeface="Calibri"/>
-                        </a:defRPr>
-                      </a:pPr>
-                    </a:p>
-                  </a:txBody>
-                  <a:tcPr>
-                    <a:solidFill>
-                      <a:srgbClr val="7A5C4F"/>
-                    </a:solidFill>
-                  </a:tcPr>
-                </a:tc>
-                <a:tc>
-                  <a:txBody>
-                    <a:bodyPr/>
-                    <a:lstStyle/>
-                    <a:p>
-                      <a:pPr>
-                        <a:defRPr sz="900" b="1">
-                          <a:solidFill>
-                            <a:srgbClr val="FAF3E8"/>
-                          </a:solidFill>
-                          <a:latin typeface="Calibri"/>
-                        </a:defRPr>
-                      </a:pPr>
-                      <a:r>
-                        <a:t>ポイント</a:t>
-                      </a:r>
-                    </a:p>
-                  </a:txBody>
-                  <a:tcPr>
-                    <a:solidFill>
-                      <a:srgbClr val="7A5C4F"/>
-                    </a:solidFill>
-                  </a:tcPr>
-                </a:tc>
-                <a:tc>
-                  <a:txBody>
-                    <a:bodyPr/>
-                    <a:lstStyle/>
-                    <a:p>
-                      <a:pPr>
-                        <a:defRPr sz="900" b="1">
-                          <a:solidFill>
-                            <a:srgbClr val="FAF3E8"/>
-                          </a:solidFill>
-                          <a:latin typeface="Calibri"/>
-                        </a:defRPr>
-                      </a:pPr>
-                      <a:r>
-                        <a:t>ひとことで</a:t>
-                      </a:r>
-                    </a:p>
-                  </a:txBody>
-                  <a:tcPr>
-                    <a:solidFill>
-                      <a:srgbClr val="7A5C4F"/>
-                    </a:solidFill>
-                  </a:tcPr>
-                </a:tc>
-              </a:tr>
-              <a:tr h="274320">
-                <a:tc>
-                  <a:txBody>
-                    <a:bodyPr/>
-                    <a:lstStyle/>
-                    <a:p>
-                      <a:pPr>
-                        <a:defRPr sz="900">
-                          <a:solidFill>
-                            <a:srgbClr val="3A3A3A"/>
-                          </a:solidFill>
-                          <a:latin typeface="Calibri"/>
-                        </a:defRPr>
-                      </a:pPr>
-                      <a:r>
-                        <a:t>---</a:t>
-                      </a:r>
-                    </a:p>
-                  </a:txBody>
-                  <a:tcPr>
-                    <a:solidFill>
-                      <a:srgbClr val="F5EEE5"/>
-                    </a:solidFill>
-                  </a:tcPr>
-                </a:tc>
-                <a:tc>
-                  <a:txBody>
-                    <a:bodyPr/>
-                    <a:lstStyle/>
-                    <a:p>
-                      <a:pPr>
-                        <a:defRPr sz="900">
-                          <a:solidFill>
-                            <a:srgbClr val="3A3A3A"/>
-                          </a:solidFill>
-                          <a:latin typeface="Calibri"/>
-                        </a:defRPr>
-                      </a:pPr>
-                      <a:r>
-                        <a:t>---------</a:t>
-                      </a:r>
-                    </a:p>
-                  </a:txBody>
-                  <a:tcPr>
-                    <a:solidFill>
-                      <a:srgbClr val="F5EEE5"/>
-                    </a:solidFill>
-                  </a:tcPr>
-                </a:tc>
-                <a:tc>
-                  <a:txBody>
-                    <a:bodyPr/>
-                    <a:lstStyle/>
-                    <a:p>
-                      <a:pPr>
-                        <a:defRPr sz="900">
-                          <a:solidFill>
-                            <a:srgbClr val="3A3A3A"/>
-                          </a:solidFill>
-                          <a:latin typeface="Calibri"/>
-                        </a:defRPr>
-                      </a:pPr>
-                      <a:r>
-                        <a:t>-----------</a:t>
-                      </a:r>
-                    </a:p>
-                  </a:txBody>
-                  <a:tcPr>
-                    <a:solidFill>
-                      <a:srgbClr val="F5EEE5"/>
-                    </a:solidFill>
-                  </a:tcPr>
-                </a:tc>
-              </a:tr>
-              <a:tr h="274320">
-                <a:tc>
-                  <a:txBody>
-                    <a:bodyPr/>
-                    <a:lstStyle/>
-                    <a:p>
-                      <a:pPr>
-                        <a:defRPr sz="900">
-                          <a:solidFill>
-                            <a:srgbClr val="3A3A3A"/>
-                          </a:solidFill>
-                          <a:latin typeface="Calibri"/>
-                        </a:defRPr>
-                      </a:pPr>
-                      <a:r>
-                        <a:t>1</a:t>
-                      </a:r>
-                    </a:p>
-                  </a:txBody>
-                  <a:tcPr>
-                    <a:solidFill>
-                      <a:srgbClr val="FAF3E8"/>
-                    </a:solidFill>
-                  </a:tcPr>
-                </a:tc>
-                <a:tc>
-                  <a:txBody>
-                    <a:bodyPr/>
-                    <a:lstStyle/>
-                    <a:p>
-                      <a:pPr>
-                        <a:defRPr sz="900">
-                          <a:solidFill>
-                            <a:srgbClr val="3A3A3A"/>
-                          </a:solidFill>
-                          <a:latin typeface="Calibri"/>
-                        </a:defRPr>
-                      </a:pPr>
-                      <a:r>
-                        <a:t>AIは便利だけど万能じゃない</a:t>
-                      </a:r>
-                    </a:p>
-                  </a:txBody>
-                  <a:tcPr>
-                    <a:solidFill>
-                      <a:srgbClr val="FAF3E8"/>
-                    </a:solidFill>
-                  </a:tcPr>
-                </a:tc>
-                <a:tc>
-                  <a:txBody>
-                    <a:bodyPr/>
-                    <a:lstStyle/>
-                    <a:p>
-                      <a:pPr>
-                        <a:defRPr sz="900">
-                          <a:solidFill>
-                            <a:srgbClr val="3A3A3A"/>
-                          </a:solidFill>
-                          <a:latin typeface="Calibri"/>
-                        </a:defRPr>
-                      </a:pPr>
-                      <a:r>
-                        <a:t>得意なことと苦手なことがある</a:t>
-                      </a:r>
-                    </a:p>
-                  </a:txBody>
-                  <a:tcPr>
-                    <a:solidFill>
-                      <a:srgbClr val="FAF3E8"/>
-                    </a:solidFill>
-                  </a:tcPr>
-                </a:tc>
-              </a:tr>
-              <a:tr h="274320">
-                <a:tc>
-                  <a:txBody>
-                    <a:bodyPr/>
-                    <a:lstStyle/>
-                    <a:p>
-                      <a:pPr>
-                        <a:defRPr sz="900">
-                          <a:solidFill>
-                            <a:srgbClr val="3A3A3A"/>
-                          </a:solidFill>
-                          <a:latin typeface="Calibri"/>
-                        </a:defRPr>
-                      </a:pPr>
-                      <a:r>
-                        <a:t>2</a:t>
-                      </a:r>
-                    </a:p>
-                  </a:txBody>
-                  <a:tcPr>
-                    <a:solidFill>
-                      <a:srgbClr val="F5EEE5"/>
-                    </a:solidFill>
-                  </a:tcPr>
-                </a:tc>
-                <a:tc>
-                  <a:txBody>
-                    <a:bodyPr/>
-                    <a:lstStyle/>
-                    <a:p>
-                      <a:pPr>
-                        <a:defRPr sz="900">
-                          <a:solidFill>
-                            <a:srgbClr val="3A3A3A"/>
-                          </a:solidFill>
-                          <a:latin typeface="Calibri"/>
-                        </a:defRPr>
-                      </a:pPr>
-                      <a:r>
-                        <a:t>AIも間違える・偏る</a:t>
-                      </a:r>
-                    </a:p>
-                  </a:txBody>
-                  <a:tcPr>
-                    <a:solidFill>
-                      <a:srgbClr val="F5EEE5"/>
-                    </a:solidFill>
-                  </a:tcPr>
-                </a:tc>
-                <a:tc>
-                  <a:txBody>
-                    <a:bodyPr/>
-                    <a:lstStyle/>
-                    <a:p>
-                      <a:pPr>
-                        <a:defRPr sz="900">
-                          <a:solidFill>
-                            <a:srgbClr val="3A3A3A"/>
-                          </a:solidFill>
-                          <a:latin typeface="Calibri"/>
-                        </a:defRPr>
-                      </a:pPr>
-                      <a:r>
-                        <a:t>「本当かな？」と立ち止まる習慣が大切</a:t>
-                      </a:r>
-                    </a:p>
-                  </a:txBody>
-                  <a:tcPr>
-                    <a:solidFill>
-                      <a:srgbClr val="F5EEE5"/>
-                    </a:solidFill>
-                  </a:tcPr>
-                </a:tc>
-              </a:tr>
-              <a:tr h="274320">
-                <a:tc>
-                  <a:txBody>
-                    <a:bodyPr/>
-                    <a:lstStyle/>
-                    <a:p>
-                      <a:pPr>
-                        <a:defRPr sz="900">
-                          <a:solidFill>
-                            <a:srgbClr val="3A3A3A"/>
-                          </a:solidFill>
-                          <a:latin typeface="Calibri"/>
-                        </a:defRPr>
-                      </a:pPr>
-                      <a:r>
-                        <a:t>3</a:t>
-                      </a:r>
-                    </a:p>
-                  </a:txBody>
-                  <a:tcPr>
-                    <a:solidFill>
-                      <a:srgbClr val="FAF3E8"/>
-                    </a:solidFill>
-                  </a:tcPr>
-                </a:tc>
-                <a:tc>
-                  <a:txBody>
-                    <a:bodyPr/>
-                    <a:lstStyle/>
-                    <a:p>
-                      <a:pPr>
-                        <a:defRPr sz="900">
-                          <a:solidFill>
-                            <a:srgbClr val="3A3A3A"/>
-                          </a:solidFill>
-                          <a:latin typeface="Calibri"/>
-                        </a:defRPr>
-                      </a:pPr>
-                      <a:r>
-                        <a:t>人間にしかできないことがある</a:t>
-                      </a:r>
-                    </a:p>
-                  </a:txBody>
-                  <a:tcPr>
-                    <a:solidFill>
-                      <a:srgbClr val="FAF3E8"/>
-                    </a:solidFill>
-                  </a:tcPr>
-                </a:tc>
-                <a:tc>
-                  <a:txBody>
-                    <a:bodyPr/>
-                    <a:lstStyle/>
-                    <a:p>
-                      <a:pPr>
-                        <a:defRPr sz="900">
-                          <a:solidFill>
-                            <a:srgbClr val="3A3A3A"/>
-                          </a:solidFill>
-                          <a:latin typeface="Calibri"/>
-                        </a:defRPr>
-                      </a:pPr>
-                      <a:r>
-                        <a:t>患者さんに寄り添えるのはあなただけ</a:t>
-                      </a:r>
-                    </a:p>
-                  </a:txBody>
-                  <a:tcPr>
-                    <a:solidFill>
-                      <a:srgbClr val="FAF3E8"/>
-                    </a:solidFill>
-                  </a:tcPr>
-                </a:tc>
-              </a:tr>
-            </a:tbl>
-          </a:graphicData>
-        </a:graphic>
-      </p:graphicFrame>
-      <p:sp>
-        <p:nvSpPr>
-          <p:cNvPr id="4" name="Rectangle 3"/>
+              <a:t>便利だけど「判断」はしない。</a:t>
+            </a:r>
+            <a:br/>
+            <a:r>
+              <a:t>責任は常に人間にある。</a:t>
+            </a:r>
+          </a:p>
+        </p:txBody>
+      </p:sp>
+      <p:sp>
+        <p:nvSpPr>
+          <p:cNvPr id="8" name="Rectangle 7"/>
           <p:cNvSpPr/>
           <p:nvPr/>
         </p:nvSpPr>
         <p:spPr>
           <a:xfrm>
-            <a:off x="548640" y="2331720"/>
-            <a:ext cx="54864" cy="1424940"/>
+            <a:off x="731520" y="2194560"/>
+            <a:ext cx="914400" cy="1005840"/>
           </a:xfrm>
           <a:prstGeom prst="rect">
             <a:avLst/>
@@ -7069,69 +5640,20 @@
           <a:bodyPr rtlCol="0" anchor="ctr"/>
           <a:lstStyle/>
           <a:p>
-            <a:pPr algn="ctr">
-              <a:defRPr/>
-            </a:pPr>
-          </a:p>
-        </p:txBody>
-      </p:sp>
-      <p:sp>
-        <p:nvSpPr>
-          <p:cNvPr id="5" name="Rectangle 4"/>
-          <p:cNvSpPr/>
-          <p:nvPr/>
-        </p:nvSpPr>
-        <p:spPr>
-          <a:xfrm>
-            <a:off x="658368" y="2331720"/>
-            <a:ext cx="7662672" cy="1424940"/>
-          </a:xfrm>
-          <a:prstGeom prst="rect">
-            <a:avLst/>
-          </a:prstGeom>
-          <a:solidFill>
-            <a:srgbClr val="FFFFFF"/>
-          </a:solidFill>
-          <a:ln w="12700">
-            <a:solidFill>
-              <a:srgbClr val="A7BEAE"/>
-            </a:solidFill>
-          </a:ln>
-        </p:spPr>
-        <p:style>
-          <a:lnRef idx="1">
-            <a:schemeClr val="accent1"/>
-          </a:lnRef>
-          <a:fillRef idx="3">
-            <a:schemeClr val="accent1"/>
-          </a:fillRef>
-          <a:effectRef idx="2">
-            <a:schemeClr val="accent1"/>
-          </a:effectRef>
-          <a:fontRef idx="minor">
-            <a:schemeClr val="lt1"/>
-          </a:fontRef>
-        </p:style>
-        <p:txBody>
-          <a:bodyPr rtlCol="0" anchor="ctr"/>
-          <a:lstStyle/>
-          <a:p>
-            <a:pPr algn="ctr">
-              <a:defRPr/>
-            </a:pPr>
-          </a:p>
-        </p:txBody>
-      </p:sp>
-      <p:sp>
-        <p:nvSpPr>
-          <p:cNvPr id="6" name="TextBox 5"/>
+            <a:pPr algn="ctr"/>
+          </a:p>
+        </p:txBody>
+      </p:sp>
+      <p:sp>
+        <p:nvSpPr>
+          <p:cNvPr id="9" name="TextBox 8"/>
           <p:cNvSpPr txBox="1"/>
           <p:nvPr/>
         </p:nvSpPr>
         <p:spPr>
           <a:xfrm>
-            <a:off x="777240" y="2404872"/>
-            <a:ext cx="7406640" cy="1278636"/>
+            <a:off x="731520" y="2286000"/>
+            <a:ext cx="914400" cy="822960"/>
           </a:xfrm>
           <a:prstGeom prst="rect">
             <a:avLst/>
@@ -7139,61 +5661,111 @@
           <a:noFill/>
         </p:spPr>
         <p:txBody>
-          <a:bodyPr wrap="square">
+          <a:bodyPr wrap="square" lIns="45720" rIns="45720" tIns="27432" bIns="27432">
             <a:spAutoFit/>
           </a:bodyPr>
           <a:lstStyle/>
           <a:p>
+            <a:pPr algn="ctr">
+              <a:defRPr sz="2800" b="1">
+                <a:solidFill>
+                  <a:srgbClr val="7A5C4F"/>
+                </a:solidFill>
+                <a:latin typeface="Calibri"/>
+              </a:defRPr>
+            </a:pPr>
+            <a:r>
+              <a:t>2</a:t>
+            </a:r>
+          </a:p>
+        </p:txBody>
+      </p:sp>
+      <p:sp>
+        <p:nvSpPr>
+          <p:cNvPr id="10" name="TextBox 9"/>
+          <p:cNvSpPr txBox="1"/>
+          <p:nvPr/>
+        </p:nvSpPr>
+        <p:spPr>
+          <a:xfrm>
+            <a:off x="1828800" y="2240279"/>
+            <a:ext cx="3657600" cy="365760"/>
+          </a:xfrm>
+          <a:prstGeom prst="rect">
+            <a:avLst/>
+          </a:prstGeom>
+          <a:noFill/>
+        </p:spPr>
+        <p:txBody>
+          <a:bodyPr wrap="square" lIns="45720" rIns="45720" tIns="27432" bIns="27432">
+            <a:spAutoFit/>
+          </a:bodyPr>
+          <a:lstStyle/>
+          <a:p>
             <a:pPr algn="l">
-              <a:defRPr sz="1100" b="0">
+              <a:defRPr sz="1600" b="1">
                 <a:solidFill>
                   <a:srgbClr val="3A3A3A"/>
                 </a:solidFill>
-                <a:latin typeface="Georgia"/>
+                <a:latin typeface="Calibri"/>
               </a:defRPr>
             </a:pPr>
             <a:r>
-              <a:rPr/>
-              <a:t>テクノロジーは変わります。</a:t>
+              <a:t>AI同士が協力する時代</a:t>
+            </a:r>
+          </a:p>
+        </p:txBody>
+      </p:sp>
+      <p:sp>
+        <p:nvSpPr>
+          <p:cNvPr id="11" name="TextBox 10"/>
+          <p:cNvSpPr txBox="1"/>
+          <p:nvPr/>
+        </p:nvSpPr>
+        <p:spPr>
+          <a:xfrm>
+            <a:off x="1828800" y="2651760"/>
+            <a:ext cx="6858000" cy="457200"/>
+          </a:xfrm>
+          <a:prstGeom prst="rect">
+            <a:avLst/>
+          </a:prstGeom>
+          <a:noFill/>
+        </p:spPr>
+        <p:txBody>
+          <a:bodyPr wrap="square" lIns="45720" rIns="45720" tIns="27432" bIns="27432">
+            <a:spAutoFit/>
+          </a:bodyPr>
+          <a:lstStyle/>
+          <a:p>
+            <a:pPr algn="l">
+              <a:defRPr sz="1200" b="0">
+                <a:solidFill>
+                  <a:srgbClr val="3A3A3A"/>
+                </a:solidFill>
+                <a:latin typeface="Calibri"/>
+              </a:defRPr>
+            </a:pPr>
+            <a:r>
+              <a:t>チーム医療のAI版。</a:t>
             </a:r>
             <a:br/>
             <a:r>
-              <a:rPr/>
-              <a:t>でも、患者さんの手を握れるのは、あなただけです。</a:t>
-            </a:r>
-            <a:br/>
-            <a:r>
-              <a:rPr/>
-              <a:t>AIが得意なことはAIに任せて、</a:t>
-            </a:r>
-            <a:br/>
-            <a:r>
-              <a:rPr/>
-              <a:t>あなたにしかできないこと — 笑顔、声かけ、気づき、寄り添い —</a:t>
-            </a:r>
-            <a:br/>
-            <a:r>
-              <a:rPr/>
-              <a:t>に、もっと時間を使えるようになる。</a:t>
-            </a:r>
-            <a:br/>
-            <a:r>
-              <a:rPr/>
-              <a:t>それが「AIと一緒に働く未来」です。</a:t>
-            </a:r>
-          </a:p>
-        </p:txBody>
-      </p:sp>
-      <p:sp>
-        <p:nvSpPr>
-          <p:cNvPr id="7" name="Rectangle 6"/>
+              <a:t>1つのAIより正確で安い。</a:t>
+            </a:r>
+          </a:p>
+        </p:txBody>
+      </p:sp>
+      <p:sp>
+        <p:nvSpPr>
+          <p:cNvPr id="12" name="Rectangle 11"/>
           <p:cNvSpPr/>
           <p:nvPr/>
         </p:nvSpPr>
         <p:spPr>
           <a:xfrm>
-            <a:off x="548640" y="3893819"/>
-            <a:ext cx="54864" cy="457200"/>
+            <a:off x="731520" y="3474720"/>
+            <a:ext cx="914400" cy="1005840"/>
           </a:xfrm>
           <a:prstGeom prst="rect">
             <a:avLst/>
@@ -7223,69 +5795,20 @@
           <a:bodyPr rtlCol="0" anchor="ctr"/>
           <a:lstStyle/>
           <a:p>
-            <a:pPr algn="ctr">
-              <a:defRPr/>
-            </a:pPr>
-          </a:p>
-        </p:txBody>
-      </p:sp>
-      <p:sp>
-        <p:nvSpPr>
-          <p:cNvPr id="8" name="Rectangle 7"/>
-          <p:cNvSpPr/>
-          <p:nvPr/>
-        </p:nvSpPr>
-        <p:spPr>
-          <a:xfrm>
-            <a:off x="658368" y="3893819"/>
-            <a:ext cx="7662672" cy="457200"/>
-          </a:xfrm>
-          <a:prstGeom prst="rect">
-            <a:avLst/>
-          </a:prstGeom>
-          <a:solidFill>
-            <a:srgbClr val="FFFFFF"/>
-          </a:solidFill>
-          <a:ln w="12700">
-            <a:solidFill>
-              <a:srgbClr val="A7BEAE"/>
-            </a:solidFill>
-          </a:ln>
-        </p:spPr>
-        <p:style>
-          <a:lnRef idx="1">
-            <a:schemeClr val="accent1"/>
-          </a:lnRef>
-          <a:fillRef idx="3">
-            <a:schemeClr val="accent1"/>
-          </a:fillRef>
-          <a:effectRef idx="2">
-            <a:schemeClr val="accent1"/>
-          </a:effectRef>
-          <a:fontRef idx="minor">
-            <a:schemeClr val="lt1"/>
-          </a:fontRef>
-        </p:style>
-        <p:txBody>
-          <a:bodyPr rtlCol="0" anchor="ctr"/>
-          <a:lstStyle/>
-          <a:p>
-            <a:pPr algn="ctr">
-              <a:defRPr/>
-            </a:pPr>
-          </a:p>
-        </p:txBody>
-      </p:sp>
-      <p:sp>
-        <p:nvSpPr>
-          <p:cNvPr id="9" name="TextBox 8"/>
+            <a:pPr algn="ctr"/>
+          </a:p>
+        </p:txBody>
+      </p:sp>
+      <p:sp>
+        <p:nvSpPr>
+          <p:cNvPr id="13" name="TextBox 12"/>
           <p:cNvSpPr txBox="1"/>
           <p:nvPr/>
         </p:nvSpPr>
         <p:spPr>
           <a:xfrm>
-            <a:off x="777240" y="3966971"/>
-            <a:ext cx="7406640" cy="310896"/>
+            <a:off x="731520" y="3566160"/>
+            <a:ext cx="914400" cy="822960"/>
           </a:xfrm>
           <a:prstGeom prst="rect">
             <a:avLst/>
@@ -7293,36 +5816,35 @@
           <a:noFill/>
         </p:spPr>
         <p:txBody>
-          <a:bodyPr wrap="square">
+          <a:bodyPr wrap="square" lIns="45720" rIns="45720" tIns="27432" bIns="27432">
             <a:spAutoFit/>
           </a:bodyPr>
           <a:lstStyle/>
           <a:p>
-            <a:pPr algn="l">
-              <a:defRPr sz="1100" b="0">
-                <a:solidFill>
-                  <a:srgbClr val="3A3A3A"/>
-                </a:solidFill>
-                <a:latin typeface="Georgia"/>
+            <a:pPr algn="ctr">
+              <a:defRPr sz="2800" b="1">
+                <a:solidFill>
+                  <a:srgbClr val="7A5C4F"/>
+                </a:solidFill>
+                <a:latin typeface="Calibri"/>
               </a:defRPr>
             </a:pPr>
             <a:r>
-              <a:rPr/>
-              <a:t>「今日聞いた話の中で、1つだけ誰かに伝えるとしたら、何を選びますか？」</a:t>
-            </a:r>
-          </a:p>
-        </p:txBody>
-      </p:sp>
-      <p:sp>
-        <p:nvSpPr>
-          <p:cNvPr id="10" name="TextBox 9"/>
+              <a:t>3</a:t>
+            </a:r>
+          </a:p>
+        </p:txBody>
+      </p:sp>
+      <p:sp>
+        <p:nvSpPr>
+          <p:cNvPr id="14" name="TextBox 13"/>
           <p:cNvSpPr txBox="1"/>
           <p:nvPr/>
         </p:nvSpPr>
         <p:spPr>
           <a:xfrm>
-            <a:off x="548640" y="4488180"/>
-            <a:ext cx="7772400" cy="304799"/>
+            <a:off x="1828800" y="3520439"/>
+            <a:ext cx="3657600" cy="365760"/>
           </a:xfrm>
           <a:prstGeom prst="rect">
             <a:avLst/>
@@ -7330,93 +5852,35 @@
           <a:noFill/>
         </p:spPr>
         <p:txBody>
-          <a:bodyPr wrap="square">
+          <a:bodyPr wrap="square" lIns="45720" rIns="45720" tIns="27432" bIns="27432">
             <a:spAutoFit/>
           </a:bodyPr>
           <a:lstStyle/>
           <a:p>
-            <a:pPr>
-              <a:defRPr sz="1200">
-                <a:solidFill>
-                  <a:srgbClr val="FAF3E8"/>
+            <a:pPr algn="l">
+              <a:defRPr sz="1600" b="1">
+                <a:solidFill>
+                  <a:srgbClr val="3A3A3A"/>
                 </a:solidFill>
                 <a:latin typeface="Calibri"/>
               </a:defRPr>
-              <a:buChar char="●"/>
             </a:pPr>
             <a:r>
-              <a:rPr/>
-              <a:t>日常業務の中で「これ、AIに手伝ってもらえないかな？」とアンテナを立ててみる</a:t>
-            </a:r>
-          </a:p>
-          <a:p>
-            <a:pPr>
-              <a:defRPr sz="1200">
-                <a:solidFill>
-                  <a:srgbClr val="FAF3E8"/>
-                </a:solidFill>
-                <a:latin typeface="Calibri"/>
-              </a:defRPr>
-              <a:buChar char="●"/>
-            </a:pPr>
-            <a:r>
-              <a:rPr/>
-              <a:t>AIの答えに接したとき「本当かな？」と一度立ち止まってみる</a:t>
-            </a:r>
-          </a:p>
-          <a:p>
-            <a:pPr>
-              <a:defRPr sz="1200">
-                <a:solidFill>
-                  <a:srgbClr val="FAF3E8"/>
-                </a:solidFill>
-                <a:latin typeface="Calibri"/>
-              </a:defRPr>
-              <a:buChar char="●"/>
-            </a:pPr>
-            <a:r>
-              <a:rPr/>
-              <a:t>わからないことがあれば、いつでも相談してください</a:t>
-            </a:r>
-          </a:p>
-        </p:txBody>
-      </p:sp>
-    </p:spTree>
-  </p:cSld>
-  <p:clrMapOvr>
-    <a:masterClrMapping/>
-  </p:clrMapOvr>
-</p:sld>
-</file>
-
-<file path=ppt/slides/slide8.xml><?xml version="1.0" encoding="utf-8"?>
-<p:sld xmlns:a="http://schemas.openxmlformats.org/drawingml/2006/main" xmlns:p="http://schemas.openxmlformats.org/presentationml/2006/main" xmlns:r="http://schemas.openxmlformats.org/officeDocument/2006/relationships">
-  <p:cSld>
-    <p:bg>
-      <p:bgPr>
-        <a:solidFill>
-          <a:srgbClr val="FAF3E8"/>
-        </a:solidFill>
-        <a:effectLst/>
-      </p:bgPr>
-    </p:bg>
-    <p:spTree>
-      <p:nvGrpSpPr>
-        <p:cNvPr id="1" name=""/>
-        <p:cNvGrpSpPr/>
-        <p:nvPr/>
-      </p:nvGrpSpPr>
-      <p:grpSpPr/>
-      <p:sp>
-        <p:nvSpPr>
-          <p:cNvPr id="2" name="TextBox 1"/>
+              <a:t>使い方を学ぶのは今</a:t>
+            </a:r>
+          </a:p>
+        </p:txBody>
+      </p:sp>
+      <p:sp>
+        <p:nvSpPr>
+          <p:cNvPr id="15" name="TextBox 14"/>
           <p:cNvSpPr txBox="1"/>
           <p:nvPr/>
         </p:nvSpPr>
         <p:spPr>
           <a:xfrm>
-            <a:off x="457200" y="182880"/>
-            <a:ext cx="8229600" cy="548640"/>
+            <a:off x="1828800" y="3931920"/>
+            <a:ext cx="6858000" cy="457200"/>
           </a:xfrm>
           <a:prstGeom prst="rect">
             <a:avLst/>
@@ -7424,13 +5888,13 @@
           <a:noFill/>
         </p:spPr>
         <p:txBody>
-          <a:bodyPr wrap="square">
+          <a:bodyPr wrap="square" lIns="45720" rIns="45720" tIns="27432" bIns="27432">
             <a:spAutoFit/>
           </a:bodyPr>
           <a:lstStyle/>
           <a:p>
             <a:pPr algn="l">
-              <a:defRPr sz="2200" b="1">
+              <a:defRPr sz="1200" b="0">
                 <a:solidFill>
                   <a:srgbClr val="3A3A3A"/>
                 </a:solidFill>
@@ -7438,403 +5902,11 @@
               </a:defRPr>
             </a:pPr>
             <a:r>
-              <a:rPr/>
-              <a:t>参考文献</a:t>
-            </a:r>
-          </a:p>
-        </p:txBody>
-      </p:sp>
-      <p:sp>
-        <p:nvSpPr>
-          <p:cNvPr id="3" name="TextBox 2"/>
-          <p:cNvSpPr txBox="1"/>
-          <p:nvPr/>
-        </p:nvSpPr>
-        <p:spPr>
-          <a:xfrm>
-            <a:off x="548640" y="822960"/>
-            <a:ext cx="7772400" cy="1188720"/>
-          </a:xfrm>
-          <a:prstGeom prst="rect">
-            <a:avLst/>
-          </a:prstGeom>
-          <a:noFill/>
-        </p:spPr>
-        <p:txBody>
-          <a:bodyPr wrap="square">
-            <a:spAutoFit/>
-          </a:bodyPr>
-          <a:lstStyle/>
-          <a:p>
-            <a:pPr>
-              <a:defRPr sz="1200">
-                <a:solidFill>
-                  <a:srgbClr val="3A3A3A"/>
-                </a:solidFill>
-                <a:latin typeface="Calibri"/>
-              </a:defRPr>
-              <a:buChar char="●"/>
-            </a:pPr>
-            <a:r>
-              <a:rPr/>
-              <a:t>AMA (2026) — 医師のAI活用調査（80%超が臨床でAI活用）。IME 2026 Conference, University of Miami Miller School of Medicine. https://news.med.miami.edu/innovations-in-medical-education-2026-explores-the-power-of-ai/</a:t>
-            </a:r>
-          </a:p>
-          <a:p>
-            <a:pPr>
-              <a:defRPr sz="1200">
-                <a:solidFill>
-                  <a:srgbClr val="3A3A3A"/>
-                </a:solidFill>
-                <a:latin typeface="Calibri"/>
-              </a:defRPr>
-              <a:buChar char="●"/>
-            </a:pPr>
-            <a:r>
-              <a:rPr/>
-              <a:t>AMA (2026) — Boost health AI training across medical education continuum. https://www.ama-assn.org/practice-management/digital-health/boost-health-ai-training-across-medical-education-continuum</a:t>
-            </a:r>
-          </a:p>
-          <a:p>
-            <a:pPr>
-              <a:defRPr sz="1200">
-                <a:solidFill>
-                  <a:srgbClr val="3A3A3A"/>
-                </a:solidFill>
-                <a:latin typeface="Calibri"/>
-              </a:defRPr>
-              <a:buChar char="●"/>
-            </a:pPr>
-            <a:r>
-              <a:rPr/>
-              <a:t>Healthcare IT News (2026) — BJC Healthcare ACO, マルチAIエージェントによる臨床意思決定支援（HIMSS26発表）。https://www.healthcareitnews.com/news/how-multi-ai-agents-can-improve-clinical-decision-support</a:t>
-            </a:r>
-          </a:p>
-          <a:p>
-            <a:pPr>
-              <a:defRPr sz="1200">
-                <a:solidFill>
-                  <a:srgbClr val="3A3A3A"/>
-                </a:solidFill>
-                <a:latin typeface="Calibri"/>
-              </a:defRPr>
-              <a:buChar char="●"/>
-            </a:pPr>
-            <a:r>
-              <a:rPr/>
-              <a:t>PNAS (2026) — LLMの認知バイアス増幅に関する研究（不作為バイアス・フレーミング効果）。https://www.pnas.org/doi/10.1073/pnas.2412015122</a:t>
-            </a:r>
-          </a:p>
-        </p:txBody>
-      </p:sp>
-    </p:spTree>
-  </p:cSld>
-  <p:clrMapOvr>
-    <a:masterClrMapping/>
-  </p:clrMapOvr>
-</p:sld>
-</file>
-
-<file path=ppt/slides/slide9.xml><?xml version="1.0" encoding="utf-8"?>
-<p:sld xmlns:a="http://schemas.openxmlformats.org/drawingml/2006/main" xmlns:p="http://schemas.openxmlformats.org/presentationml/2006/main" xmlns:r="http://schemas.openxmlformats.org/officeDocument/2006/relationships">
-  <p:cSld>
-    <p:bg>
-      <p:bgPr>
-        <a:solidFill>
-          <a:srgbClr val="7A5C4F"/>
-        </a:solidFill>
-        <a:effectLst/>
-      </p:bgPr>
-    </p:bg>
-    <p:spTree>
-      <p:nvGrpSpPr>
-        <p:cNvPr id="1" name=""/>
-        <p:cNvGrpSpPr/>
-        <p:nvPr/>
-      </p:nvGrpSpPr>
-      <p:grpSpPr/>
-      <p:sp>
-        <p:nvSpPr>
-          <p:cNvPr id="2" name="TextBox 1"/>
-          <p:cNvSpPr txBox="1"/>
-          <p:nvPr/>
-        </p:nvSpPr>
-        <p:spPr>
-          <a:xfrm>
-            <a:off x="457200" y="182880"/>
-            <a:ext cx="8229600" cy="548640"/>
-          </a:xfrm>
-          <a:prstGeom prst="rect">
-            <a:avLst/>
-          </a:prstGeom>
-          <a:noFill/>
-        </p:spPr>
-        <p:txBody>
-          <a:bodyPr wrap="square">
-            <a:spAutoFit/>
-          </a:bodyPr>
-          <a:lstStyle/>
-          <a:p>
-            <a:pPr algn="l">
-              <a:defRPr sz="2200" b="1">
-                <a:solidFill>
-                  <a:srgbClr val="FAF3E8"/>
-                </a:solidFill>
-                <a:latin typeface="Calibri"/>
-              </a:defRPr>
-            </a:pPr>
-            <a:r>
-              <a:rPr/>
-              <a:t>ファシリテーター向けメモ</a:t>
-            </a:r>
-          </a:p>
-        </p:txBody>
-      </p:sp>
-      <p:sp>
-        <p:nvSpPr>
-          <p:cNvPr id="3" name="TextBox 2"/>
-          <p:cNvSpPr txBox="1"/>
-          <p:nvPr/>
-        </p:nvSpPr>
-        <p:spPr>
-          <a:xfrm>
-            <a:off x="548640" y="822960"/>
-            <a:ext cx="7772400" cy="914399"/>
-          </a:xfrm>
-          <a:prstGeom prst="rect">
-            <a:avLst/>
-          </a:prstGeom>
-          <a:noFill/>
-        </p:spPr>
-        <p:txBody>
-          <a:bodyPr wrap="square">
-            <a:spAutoFit/>
-          </a:bodyPr>
-          <a:lstStyle/>
-          <a:p>
-            <a:pPr>
-              <a:defRPr sz="1200">
-                <a:solidFill>
-                  <a:srgbClr val="FAF3E8"/>
-                </a:solidFill>
-                <a:latin typeface="Calibri"/>
-              </a:defRPr>
-              <a:buChar char="●"/>
-            </a:pPr>
-            <a:r>
-              <a:rPr/>
-              <a:t>[ ] プロジェクター or モニター</a:t>
-            </a:r>
-          </a:p>
-          <a:p>
-            <a:pPr>
-              <a:defRPr sz="1200">
-                <a:solidFill>
-                  <a:srgbClr val="FAF3E8"/>
-                </a:solidFill>
-                <a:latin typeface="Calibri"/>
-              </a:defRPr>
-              <a:buChar char="●"/>
-            </a:pPr>
-            <a:r>
-              <a:rPr/>
-              <a:t>[ ] タイマー（グループワーク3分計測用）</a:t>
-            </a:r>
-          </a:p>
-          <a:p>
-            <a:pPr>
-              <a:defRPr sz="1200">
-                <a:solidFill>
-                  <a:srgbClr val="FAF3E8"/>
-                </a:solidFill>
-                <a:latin typeface="Calibri"/>
-              </a:defRPr>
-              <a:buChar char="●"/>
-            </a:pPr>
-            <a:r>
-              <a:rPr/>
-              <a:t>[ ] 付箋（グループワーク用、任意）</a:t>
-            </a:r>
-          </a:p>
-        </p:txBody>
-      </p:sp>
-      <p:sp>
-        <p:nvSpPr>
-          <p:cNvPr id="4" name="TextBox 3"/>
-          <p:cNvSpPr txBox="1"/>
-          <p:nvPr/>
-        </p:nvSpPr>
-        <p:spPr>
-          <a:xfrm>
-            <a:off x="548640" y="1828800"/>
-            <a:ext cx="7772400" cy="1737360"/>
-          </a:xfrm>
-          <a:prstGeom prst="rect">
-            <a:avLst/>
-          </a:prstGeom>
-          <a:noFill/>
-        </p:spPr>
-        <p:txBody>
-          <a:bodyPr wrap="square">
-            <a:spAutoFit/>
-          </a:bodyPr>
-          <a:lstStyle/>
-          <a:p>
-            <a:pPr>
-              <a:defRPr sz="1200">
-                <a:solidFill>
-                  <a:srgbClr val="FAF3E8"/>
-                </a:solidFill>
-                <a:latin typeface="Calibri"/>
-              </a:defRPr>
-              <a:buChar char="●"/>
-            </a:pPr>
-            <a:r>
-              <a:rPr/>
-              <a:t>スライド1: 「80%」の数字を最初に見せてインパクトを与える。「自分もAI使ったことある？」と問いかけて参加感を出す</a:t>
-            </a:r>
-          </a:p>
-          <a:p>
-            <a:pPr>
-              <a:defRPr sz="1200">
-                <a:solidFill>
-                  <a:srgbClr val="FAF3E8"/>
-                </a:solidFill>
-                <a:latin typeface="Calibri"/>
-              </a:defRPr>
-              <a:buChar char="●"/>
-            </a:pPr>
-            <a:r>
-              <a:rPr/>
-              <a:t>スライド2: 「空気が読めない新人スタッフ」の例えは笑いを誘いやすい。場が和んだところで「でも仕事は速い」と続ける</a:t>
-            </a:r>
-          </a:p>
-          <a:p>
-            <a:pPr>
-              <a:defRPr sz="1200">
-                <a:solidFill>
-                  <a:srgbClr val="FAF3E8"/>
-                </a:solidFill>
-                <a:latin typeface="Calibri"/>
-              </a:defRPr>
-              <a:buChar char="●"/>
-            </a:pPr>
-            <a:r>
-              <a:rPr/>
-              <a:t>スライド3: バイアスの話は難しくなりがちなので、必ず例え話で説明する。「転びそうな患者さん」の例は全職種がイメージしやすい</a:t>
-            </a:r>
-          </a:p>
-          <a:p>
-            <a:pPr>
-              <a:defRPr sz="1200">
-                <a:solidFill>
-                  <a:srgbClr val="FAF3E8"/>
-                </a:solidFill>
-                <a:latin typeface="Calibri"/>
-              </a:defRPr>
-              <a:buChar char="●"/>
-            </a:pPr>
-            <a:r>
-              <a:rPr/>
-              <a:t>スライド4: 「AIは提案、人間が決定」を繰り返し強調する</a:t>
-            </a:r>
-          </a:p>
-          <a:p>
-            <a:pPr>
-              <a:defRPr sz="1200">
-                <a:solidFill>
-                  <a:srgbClr val="FAF3E8"/>
-                </a:solidFill>
-                <a:latin typeface="Calibri"/>
-              </a:defRPr>
-              <a:buChar char="●"/>
-            </a:pPr>
-            <a:r>
-              <a:rPr/>
-              <a:t>スライド5: グループワークでは「正解はない」ことを最初に伝える。迷うこと自体が学び</a:t>
-            </a:r>
-          </a:p>
-          <a:p>
-            <a:pPr>
-              <a:defRPr sz="1200">
-                <a:solidFill>
-                  <a:srgbClr val="FAF3E8"/>
-                </a:solidFill>
-                <a:latin typeface="Calibri"/>
-              </a:defRPr>
-              <a:buChar char="●"/>
-            </a:pPr>
-            <a:r>
-              <a:rPr/>
-              <a:t>スライド6: 最後のメッセージは落ち着いたトーンで。「あなたが大切」を心を込めて</a:t>
-            </a:r>
-          </a:p>
-        </p:txBody>
-      </p:sp>
-      <p:sp>
-        <p:nvSpPr>
-          <p:cNvPr id="5" name="TextBox 4"/>
-          <p:cNvSpPr txBox="1"/>
-          <p:nvPr/>
-        </p:nvSpPr>
-        <p:spPr>
-          <a:xfrm>
-            <a:off x="548640" y="3657600"/>
-            <a:ext cx="7772400" cy="914399"/>
-          </a:xfrm>
-          <a:prstGeom prst="rect">
-            <a:avLst/>
-          </a:prstGeom>
-          <a:noFill/>
-        </p:spPr>
-        <p:txBody>
-          <a:bodyPr wrap="square">
-            <a:spAutoFit/>
-          </a:bodyPr>
-          <a:lstStyle/>
-          <a:p>
-            <a:pPr>
-              <a:defRPr sz="1200">
-                <a:solidFill>
-                  <a:srgbClr val="FAF3E8"/>
-                </a:solidFill>
-                <a:latin typeface="Calibri"/>
-              </a:defRPr>
-              <a:buChar char="●"/>
-            </a:pPr>
-            <a:r>
-              <a:rPr/>
-              <a:t>3/21版：「AIエージェント」の概念紹介が中心（AIチームの比喩）</a:t>
-            </a:r>
-          </a:p>
-          <a:p>
-            <a:pPr>
-              <a:defRPr sz="1200">
-                <a:solidFill>
-                  <a:srgbClr val="FAF3E8"/>
-                </a:solidFill>
-                <a:latin typeface="Calibri"/>
-              </a:defRPr>
-              <a:buChar char="●"/>
-            </a:pPr>
-            <a:r>
-              <a:rPr/>
-              <a:t>今回：「最新データで見るAIの光と影」がテーマ。AIの限界やバイアスにも踏み込んだ内容</a:t>
-            </a:r>
-          </a:p>
-          <a:p>
-            <a:pPr>
-              <a:defRPr sz="1200">
-                <a:solidFill>
-                  <a:srgbClr val="FAF3E8"/>
-                </a:solidFill>
-                <a:latin typeface="Calibri"/>
-              </a:defRPr>
-              <a:buChar char="●"/>
-            </a:pPr>
-            <a:r>
-              <a:rPr/>
-              <a:t>両方受けた方には：「前回は"AIって何ができるか"、今回は"AIとどう付き合うか"」と伝える</a:t>
+              <a:t>80%の医師が使い始めた。</a:t>
+            </a:r>
+            <a:br/>
+            <a:r>
+              <a:t>取り残されないために。</a:t>
             </a:r>
           </a:p>
         </p:txBody>

--- a/output/education/2026-03-26_ai-medical-education-integrated/ai-medical-education-integrated_slides_allstaff.pptx
+++ b/output/education/2026-03-26_ai-medical-education-integrated/ai-medical-education-integrated_slides_allstaff.pptx
@@ -3110,7 +3110,7 @@
         <p:spPr>
           <a:xfrm>
             <a:off x="457200" y="731520"/>
-            <a:ext cx="8229600" cy="640080"/>
+            <a:ext cx="8229600" cy="660400"/>
           </a:xfrm>
           <a:prstGeom prst="rect">
             <a:avLst/>
@@ -3132,6 +3132,7 @@
               </a:defRPr>
             </a:pPr>
             <a:r>
+              <a:rPr/>
               <a:t>AI × 医学教育</a:t>
             </a:r>
           </a:p>
@@ -3168,6 +3169,7 @@
               </a:defRPr>
             </a:pPr>
             <a:r>
+              <a:rPr/>
               <a:t>— 知っておきたい3つのこと</a:t>
             </a:r>
           </a:p>
@@ -3212,7 +3214,9 @@
           <a:bodyPr rtlCol="0" anchor="ctr"/>
           <a:lstStyle/>
           <a:p>
-            <a:pPr algn="ctr"/>
+            <a:pPr algn="ctr">
+              <a:defRPr/>
+            </a:pPr>
           </a:p>
         </p:txBody>
       </p:sp>
@@ -3225,7 +3229,7 @@
         <p:spPr>
           <a:xfrm>
             <a:off x="457200" y="2468880"/>
-            <a:ext cx="8229600" cy="274320"/>
+            <a:ext cx="8229600" cy="304799"/>
           </a:xfrm>
           <a:prstGeom prst="rect">
             <a:avLst/>
@@ -3247,6 +3251,7 @@
               </a:defRPr>
             </a:pPr>
             <a:r>
+              <a:rPr/>
               <a:t>全スタッフ向け 20分</a:t>
             </a:r>
           </a:p>
@@ -3291,7 +3296,9 @@
           <a:bodyPr rtlCol="0" anchor="ctr"/>
           <a:lstStyle/>
           <a:p>
-            <a:pPr algn="ctr"/>
+            <a:pPr algn="ctr">
+              <a:defRPr/>
+            </a:pPr>
           </a:p>
         </p:txBody>
       </p:sp>
@@ -3326,6 +3333,7 @@
               </a:defRPr>
             </a:pPr>
             <a:r>
+              <a:rPr/>
               <a:t>80%超の医師がAIを臨床で使い始めている</a:t>
             </a:r>
           </a:p>
@@ -3362,6 +3370,7 @@
               </a:defRPr>
             </a:pPr>
             <a:r>
+              <a:rPr/>
               <a:t>でも「使い方」を教わった人はほとんどいない</a:t>
             </a:r>
           </a:p>
@@ -3402,7 +3411,7 @@
         <p:spPr>
           <a:xfrm>
             <a:off x="457200" y="274320"/>
-            <a:ext cx="8229600" cy="457200"/>
+            <a:ext cx="8229600" cy="482600"/>
           </a:xfrm>
           <a:prstGeom prst="rect">
             <a:avLst/>
@@ -3424,6 +3433,7 @@
               </a:defRPr>
             </a:pPr>
             <a:r>
+              <a:rPr/>
               <a:t>AIにできること・できないこと</a:t>
             </a:r>
           </a:p>
@@ -3468,7 +3478,9 @@
           <a:bodyPr rtlCol="0" anchor="ctr"/>
           <a:lstStyle/>
           <a:p>
-            <a:pPr algn="ctr"/>
+            <a:pPr algn="ctr">
+              <a:defRPr/>
+            </a:pPr>
           </a:p>
         </p:txBody>
       </p:sp>
@@ -3511,7 +3523,9 @@
           <a:bodyPr rtlCol="0" anchor="ctr"/>
           <a:lstStyle/>
           <a:p>
-            <a:pPr algn="ctr"/>
+            <a:pPr algn="ctr">
+              <a:defRPr/>
+            </a:pPr>
           </a:p>
         </p:txBody>
       </p:sp>
@@ -3524,7 +3538,7 @@
         <p:spPr>
           <a:xfrm>
             <a:off x="457200" y="1143000"/>
-            <a:ext cx="3931920" cy="365760"/>
+            <a:ext cx="3931920" cy="375920"/>
           </a:xfrm>
           <a:prstGeom prst="rect">
             <a:avLst/>
@@ -3546,6 +3560,7 @@
               </a:defRPr>
             </a:pPr>
             <a:r>
+              <a:rPr/>
               <a:t>得意なこと</a:t>
             </a:r>
           </a:p>
@@ -3583,6 +3598,7 @@
               <a:buChar char="●"/>
             </a:pPr>
             <a:r>
+              <a:rPr/>
               <a:t>大量の情報を素早く整理</a:t>
             </a:r>
           </a:p>
@@ -3597,6 +3613,7 @@
               <a:buChar char="●"/>
             </a:pPr>
             <a:r>
+              <a:rPr/>
               <a:t>文章の要約・翻訳</a:t>
             </a:r>
           </a:p>
@@ -3611,6 +3628,7 @@
               <a:buChar char="●"/>
             </a:pPr>
             <a:r>
+              <a:rPr/>
               <a:t>パターンの認識（画像・数値）</a:t>
             </a:r>
           </a:p>
@@ -3625,6 +3643,7 @@
               <a:buChar char="●"/>
             </a:pPr>
             <a:r>
+              <a:rPr/>
               <a:t>24時間365日、疲れない</a:t>
             </a:r>
           </a:p>
@@ -3671,7 +3690,9 @@
           <a:bodyPr rtlCol="0" anchor="ctr"/>
           <a:lstStyle/>
           <a:p>
-            <a:pPr algn="ctr"/>
+            <a:pPr algn="ctr">
+              <a:defRPr/>
+            </a:pPr>
           </a:p>
         </p:txBody>
       </p:sp>
@@ -3684,7 +3705,7 @@
         <p:spPr>
           <a:xfrm>
             <a:off x="4754880" y="1143000"/>
-            <a:ext cx="4114800" cy="365760"/>
+            <a:ext cx="4114800" cy="375920"/>
           </a:xfrm>
           <a:prstGeom prst="rect">
             <a:avLst/>
@@ -3706,6 +3727,7 @@
               </a:defRPr>
             </a:pPr>
             <a:r>
+              <a:rPr/>
               <a:t>苦手なこと</a:t>
             </a:r>
           </a:p>
@@ -3743,6 +3765,7 @@
               <a:buChar char="●"/>
             </a:pPr>
             <a:r>
+              <a:rPr/>
               <a:t>患者さんの気持ちを理解する</a:t>
             </a:r>
           </a:p>
@@ -3757,6 +3780,7 @@
               <a:buChar char="●"/>
             </a:pPr>
             <a:r>
+              <a:rPr/>
               <a:t>「いつもと違う」に気づく</a:t>
             </a:r>
           </a:p>
@@ -3771,6 +3795,7 @@
               <a:buChar char="●"/>
             </a:pPr>
             <a:r>
+              <a:rPr/>
               <a:t>責任を持って判断する</a:t>
             </a:r>
           </a:p>
@@ -3785,6 +3810,7 @@
               <a:buChar char="●"/>
             </a:pPr>
             <a:r>
+              <a:rPr/>
               <a:t>嘘をつくことがある（ハルシネーション）</a:t>
             </a:r>
           </a:p>
@@ -3829,7 +3855,9 @@
           <a:bodyPr rtlCol="0" anchor="ctr"/>
           <a:lstStyle/>
           <a:p>
-            <a:pPr algn="ctr"/>
+            <a:pPr algn="ctr">
+              <a:defRPr/>
+            </a:pPr>
           </a:p>
         </p:txBody>
       </p:sp>
@@ -3874,7 +3902,9 @@
           <a:bodyPr rtlCol="0" anchor="ctr"/>
           <a:lstStyle/>
           <a:p>
-            <a:pPr algn="ctr"/>
+            <a:pPr algn="ctr">
+              <a:defRPr/>
+            </a:pPr>
           </a:p>
         </p:txBody>
       </p:sp>
@@ -3909,10 +3939,12 @@
               </a:defRPr>
             </a:pPr>
             <a:r>
+              <a:rPr/>
               <a:t>AIは「道具」であって「判断者」ではない。</a:t>
             </a:r>
             <a:br/>
             <a:r>
+              <a:rPr/>
               <a:t>使う人の責任と判断が常に必要です。</a:t>
             </a:r>
           </a:p>
@@ -3953,7 +3985,7 @@
         <p:spPr>
           <a:xfrm>
             <a:off x="457200" y="274320"/>
-            <a:ext cx="8229600" cy="457200"/>
+            <a:ext cx="8229600" cy="482600"/>
           </a:xfrm>
           <a:prstGeom prst="rect">
             <a:avLst/>
@@ -3975,6 +4007,7 @@
               </a:defRPr>
             </a:pPr>
             <a:r>
+              <a:rPr/>
               <a:t>AI同士が協力する時代</a:t>
             </a:r>
           </a:p>
@@ -4019,7 +4052,9 @@
           <a:bodyPr rtlCol="0" anchor="ctr"/>
           <a:lstStyle/>
           <a:p>
-            <a:pPr algn="ctr"/>
+            <a:pPr algn="ctr">
+              <a:defRPr/>
+            </a:pPr>
           </a:p>
         </p:txBody>
       </p:sp>
@@ -4054,6 +4089,7 @@
               </a:defRPr>
             </a:pPr>
             <a:r>
+              <a:rPr/>
               <a:t>チーム医療と同じ。1人の天才より、専門家チームが強い。</a:t>
             </a:r>
           </a:p>
@@ -4098,7 +4134,9 @@
           <a:bodyPr rtlCol="0" anchor="ctr"/>
           <a:lstStyle/>
           <a:p>
-            <a:pPr algn="ctr"/>
+            <a:pPr algn="ctr">
+              <a:defRPr/>
+            </a:pPr>
           </a:p>
         </p:txBody>
       </p:sp>
@@ -4133,6 +4171,7 @@
               </a:defRPr>
             </a:pPr>
             <a:r>
+              <a:rPr/>
               <a:t>リーダーAI（総合調整）</a:t>
             </a:r>
           </a:p>
@@ -4179,7 +4218,9 @@
           <a:bodyPr rtlCol="0" anchor="ctr"/>
           <a:lstStyle/>
           <a:p>
-            <a:pPr algn="ctr"/>
+            <a:pPr algn="ctr">
+              <a:defRPr/>
+            </a:pPr>
           </a:p>
         </p:txBody>
       </p:sp>
@@ -4214,6 +4255,7 @@
               </a:defRPr>
             </a:pPr>
             <a:r>
+              <a:rPr/>
               <a:t>検査AI</a:t>
             </a:r>
           </a:p>
@@ -4260,7 +4302,9 @@
           <a:bodyPr rtlCol="0" anchor="ctr"/>
           <a:lstStyle/>
           <a:p>
-            <a:pPr algn="ctr"/>
+            <a:pPr algn="ctr">
+              <a:defRPr/>
+            </a:pPr>
           </a:p>
         </p:txBody>
       </p:sp>
@@ -4295,6 +4339,7 @@
               </a:defRPr>
             </a:pPr>
             <a:r>
+              <a:rPr/>
               <a:t>画像AI</a:t>
             </a:r>
           </a:p>
@@ -4341,7 +4386,9 @@
           <a:bodyPr rtlCol="0" anchor="ctr"/>
           <a:lstStyle/>
           <a:p>
-            <a:pPr algn="ctr"/>
+            <a:pPr algn="ctr">
+              <a:defRPr/>
+            </a:pPr>
           </a:p>
         </p:txBody>
       </p:sp>
@@ -4376,6 +4423,7 @@
               </a:defRPr>
             </a:pPr>
             <a:r>
+              <a:rPr/>
               <a:t>薬剤AI</a:t>
             </a:r>
           </a:p>
@@ -4422,7 +4470,9 @@
           <a:bodyPr rtlCol="0" anchor="ctr"/>
           <a:lstStyle/>
           <a:p>
-            <a:pPr algn="ctr"/>
+            <a:pPr algn="ctr">
+              <a:defRPr/>
+            </a:pPr>
           </a:p>
         </p:txBody>
       </p:sp>
@@ -4457,6 +4507,7 @@
               </a:defRPr>
             </a:pPr>
             <a:r>
+              <a:rPr/>
               <a:t>文献AI</a:t>
             </a:r>
           </a:p>
@@ -4471,7 +4522,7 @@
         <p:spPr>
           <a:xfrm>
             <a:off x="457200" y="3291840"/>
-            <a:ext cx="8229600" cy="274320"/>
+            <a:ext cx="8229600" cy="322579"/>
           </a:xfrm>
           <a:prstGeom prst="rect">
             <a:avLst/>
@@ -4493,6 +4544,7 @@
               </a:defRPr>
             </a:pPr>
             <a:r>
+              <a:rPr/>
               <a:t>実際の成果（Mount Sinai研究）:</a:t>
             </a:r>
           </a:p>
@@ -4530,6 +4582,7 @@
               <a:buChar char="●"/>
             </a:pPr>
             <a:r>
+              <a:rPr/>
               <a:t>チームAIが単独AIより正確</a:t>
             </a:r>
           </a:p>
@@ -4544,6 +4597,7 @@
               <a:buChar char="●"/>
             </a:pPr>
             <a:r>
+              <a:rPr/>
               <a:t>コストは最大65分の1に削減</a:t>
             </a:r>
           </a:p>
@@ -4558,6 +4612,7 @@
               <a:buChar char="●"/>
             </a:pPr>
             <a:r>
+              <a:rPr/>
               <a:t>患者が増えても質が落ちない</a:t>
             </a:r>
           </a:p>
@@ -4598,7 +4653,7 @@
         <p:spPr>
           <a:xfrm>
             <a:off x="457200" y="274320"/>
-            <a:ext cx="8229600" cy="457200"/>
+            <a:ext cx="8229600" cy="482600"/>
           </a:xfrm>
           <a:prstGeom prst="rect">
             <a:avLst/>
@@ -4620,6 +4675,7 @@
               </a:defRPr>
             </a:pPr>
             <a:r>
+              <a:rPr/>
               <a:t>AIを使うときに気をつけること</a:t>
             </a:r>
           </a:p>
@@ -4664,7 +4720,9 @@
           <a:bodyPr rtlCol="0" anchor="ctr"/>
           <a:lstStyle/>
           <a:p>
-            <a:pPr algn="ctr"/>
+            <a:pPr algn="ctr">
+              <a:defRPr/>
+            </a:pPr>
           </a:p>
         </p:txBody>
       </p:sp>
@@ -4709,7 +4767,9 @@
           <a:bodyPr rtlCol="0" anchor="ctr"/>
           <a:lstStyle/>
           <a:p>
-            <a:pPr algn="ctr"/>
+            <a:pPr algn="ctr">
+              <a:defRPr/>
+            </a:pPr>
           </a:p>
         </p:txBody>
       </p:sp>
@@ -4744,6 +4804,7 @@
               </a:defRPr>
             </a:pPr>
             <a:r>
+              <a:rPr/>
               <a:t>⚠ もっともらしい嘘</a:t>
             </a:r>
           </a:p>
@@ -4780,10 +4841,12 @@
               </a:defRPr>
             </a:pPr>
             <a:r>
+              <a:rPr/>
               <a:t>AIは自信満々に間違えます。</a:t>
             </a:r>
             <a:br/>
             <a:r>
+              <a:rPr/>
               <a:t>必ず確認を。</a:t>
             </a:r>
           </a:p>
@@ -4830,7 +4893,9 @@
           <a:bodyPr rtlCol="0" anchor="ctr"/>
           <a:lstStyle/>
           <a:p>
-            <a:pPr algn="ctr"/>
+            <a:pPr algn="ctr">
+              <a:defRPr/>
+            </a:pPr>
           </a:p>
         </p:txBody>
       </p:sp>
@@ -4865,6 +4930,7 @@
               </a:defRPr>
             </a:pPr>
             <a:r>
+              <a:rPr/>
               <a:t>⚠ 引きずられる危険</a:t>
             </a:r>
           </a:p>
@@ -4901,10 +4967,12 @@
               </a:defRPr>
             </a:pPr>
             <a:r>
+              <a:rPr/>
               <a:t>AIの最初の答えに引きずられがち。</a:t>
             </a:r>
             <a:br/>
             <a:r>
+              <a:rPr/>
               <a:t>自分の判断を先に持つ。</a:t>
             </a:r>
           </a:p>
@@ -4951,7 +5019,9 @@
           <a:bodyPr rtlCol="0" anchor="ctr"/>
           <a:lstStyle/>
           <a:p>
-            <a:pPr algn="ctr"/>
+            <a:pPr algn="ctr">
+              <a:defRPr/>
+            </a:pPr>
           </a:p>
         </p:txBody>
       </p:sp>
@@ -4986,6 +5056,7 @@
               </a:defRPr>
             </a:pPr>
             <a:r>
+              <a:rPr/>
               <a:t>⚠ 個人情報の取り扱い</a:t>
             </a:r>
           </a:p>
@@ -5022,10 +5093,12 @@
               </a:defRPr>
             </a:pPr>
             <a:r>
+              <a:rPr/>
               <a:t>患者情報をAIに入力する際は</a:t>
             </a:r>
             <a:br/>
             <a:r>
+              <a:rPr/>
               <a:t>施設のルールを確認。</a:t>
             </a:r>
           </a:p>
@@ -5066,7 +5139,7 @@
         <p:spPr>
           <a:xfrm>
             <a:off x="457200" y="274320"/>
-            <a:ext cx="8229600" cy="457200"/>
+            <a:ext cx="8229600" cy="484632"/>
           </a:xfrm>
           <a:prstGeom prst="rect">
             <a:avLst/>
@@ -5088,6 +5161,7 @@
               </a:defRPr>
             </a:pPr>
             <a:r>
+              <a:rPr/>
               <a:t>隣の人と話してみましょう</a:t>
             </a:r>
           </a:p>
@@ -5132,7 +5206,9 @@
           <a:bodyPr rtlCol="0" anchor="ctr"/>
           <a:lstStyle/>
           <a:p>
-            <a:pPr algn="ctr"/>
+            <a:pPr algn="ctr">
+              <a:defRPr/>
+            </a:pPr>
           </a:p>
         </p:txBody>
       </p:sp>
@@ -5145,7 +5221,7 @@
         <p:spPr>
           <a:xfrm>
             <a:off x="3200400" y="1097280"/>
-            <a:ext cx="2743200" cy="457200"/>
+            <a:ext cx="2743200" cy="589279"/>
           </a:xfrm>
           <a:prstGeom prst="rect">
             <a:avLst/>
@@ -5167,6 +5243,7 @@
               </a:defRPr>
             </a:pPr>
             <a:r>
+              <a:rPr/>
               <a:t>3分間</a:t>
             </a:r>
           </a:p>
@@ -5211,7 +5288,9 @@
           <a:bodyPr rtlCol="0" anchor="ctr"/>
           <a:lstStyle/>
           <a:p>
-            <a:pPr algn="ctr"/>
+            <a:pPr algn="ctr">
+              <a:defRPr/>
+            </a:pPr>
           </a:p>
         </p:txBody>
       </p:sp>
@@ -5256,7 +5335,9 @@
           <a:bodyPr rtlCol="0" anchor="ctr"/>
           <a:lstStyle/>
           <a:p>
-            <a:pPr algn="ctr"/>
+            <a:pPr algn="ctr">
+              <a:defRPr/>
+            </a:pPr>
           </a:p>
         </p:txBody>
       </p:sp>
@@ -5291,15 +5372,18 @@
               </a:defRPr>
             </a:pPr>
             <a:r>
+              <a:rPr/>
               <a:t>あなたの業務で、AIが役立ちそうな場面は</a:t>
             </a:r>
             <a:br/>
             <a:r>
+              <a:rPr/>
               <a:t>どんなところですか？</a:t>
             </a:r>
             <a:br/>
             <a:br/>
             <a:r>
+              <a:rPr/>
               <a:t>逆に、「ここはAIに任せたくない」と思う場面は？</a:t>
             </a:r>
           </a:p>
@@ -5314,7 +5398,7 @@
         <p:spPr>
           <a:xfrm>
             <a:off x="1371600" y="3931920"/>
-            <a:ext cx="6400800" cy="274320"/>
+            <a:ext cx="6400800" cy="304799"/>
           </a:xfrm>
           <a:prstGeom prst="rect">
             <a:avLst/>
@@ -5336,6 +5420,7 @@
               </a:defRPr>
             </a:pPr>
             <a:r>
+              <a:rPr/>
               <a:t>正解はありません。感じたことを共有してください。</a:t>
             </a:r>
           </a:p>
@@ -5398,6 +5483,7 @@
               </a:defRPr>
             </a:pPr>
             <a:r>
+              <a:rPr/>
               <a:t>3つだけ覚えてください</a:t>
             </a:r>
           </a:p>
@@ -5442,7 +5528,9 @@
           <a:bodyPr rtlCol="0" anchor="ctr"/>
           <a:lstStyle/>
           <a:p>
-            <a:pPr algn="ctr"/>
+            <a:pPr algn="ctr">
+              <a:defRPr/>
+            </a:pPr>
           </a:p>
         </p:txBody>
       </p:sp>
@@ -5485,7 +5573,9 @@
           <a:bodyPr rtlCol="0" anchor="ctr"/>
           <a:lstStyle/>
           <a:p>
-            <a:pPr algn="ctr"/>
+            <a:pPr algn="ctr">
+              <a:defRPr/>
+            </a:pPr>
           </a:p>
         </p:txBody>
       </p:sp>
@@ -5520,6 +5610,7 @@
               </a:defRPr>
             </a:pPr>
             <a:r>
+              <a:rPr/>
               <a:t>1</a:t>
             </a:r>
           </a:p>
@@ -5534,7 +5625,7 @@
         <p:spPr>
           <a:xfrm>
             <a:off x="1828800" y="960120"/>
-            <a:ext cx="3657600" cy="365760"/>
+            <a:ext cx="3657600" cy="375920"/>
           </a:xfrm>
           <a:prstGeom prst="rect">
             <a:avLst/>
@@ -5556,6 +5647,7 @@
               </a:defRPr>
             </a:pPr>
             <a:r>
+              <a:rPr/>
               <a:t>AIは道具</a:t>
             </a:r>
           </a:p>
@@ -5592,10 +5684,12 @@
               </a:defRPr>
             </a:pPr>
             <a:r>
+              <a:rPr/>
               <a:t>便利だけど「判断」はしない。</a:t>
             </a:r>
             <a:br/>
             <a:r>
+              <a:rPr/>
               <a:t>責任は常に人間にある。</a:t>
             </a:r>
           </a:p>
@@ -5640,7 +5734,9 @@
           <a:bodyPr rtlCol="0" anchor="ctr"/>
           <a:lstStyle/>
           <a:p>
-            <a:pPr algn="ctr"/>
+            <a:pPr algn="ctr">
+              <a:defRPr/>
+            </a:pPr>
           </a:p>
         </p:txBody>
       </p:sp>
@@ -5675,6 +5771,7 @@
               </a:defRPr>
             </a:pPr>
             <a:r>
+              <a:rPr/>
               <a:t>2</a:t>
             </a:r>
           </a:p>
@@ -5689,7 +5786,7 @@
         <p:spPr>
           <a:xfrm>
             <a:off x="1828800" y="2240279"/>
-            <a:ext cx="3657600" cy="365760"/>
+            <a:ext cx="3657600" cy="375920"/>
           </a:xfrm>
           <a:prstGeom prst="rect">
             <a:avLst/>
@@ -5711,6 +5808,7 @@
               </a:defRPr>
             </a:pPr>
             <a:r>
+              <a:rPr/>
               <a:t>AI同士が協力する時代</a:t>
             </a:r>
           </a:p>
@@ -5747,10 +5845,12 @@
               </a:defRPr>
             </a:pPr>
             <a:r>
+              <a:rPr/>
               <a:t>チーム医療のAI版。</a:t>
             </a:r>
             <a:br/>
             <a:r>
+              <a:rPr/>
               <a:t>1つのAIより正確で安い。</a:t>
             </a:r>
           </a:p>
@@ -5795,7 +5895,9 @@
           <a:bodyPr rtlCol="0" anchor="ctr"/>
           <a:lstStyle/>
           <a:p>
-            <a:pPr algn="ctr"/>
+            <a:pPr algn="ctr">
+              <a:defRPr/>
+            </a:pPr>
           </a:p>
         </p:txBody>
       </p:sp>
@@ -5830,6 +5932,7 @@
               </a:defRPr>
             </a:pPr>
             <a:r>
+              <a:rPr/>
               <a:t>3</a:t>
             </a:r>
           </a:p>
@@ -5844,7 +5947,7 @@
         <p:spPr>
           <a:xfrm>
             <a:off x="1828800" y="3520439"/>
-            <a:ext cx="3657600" cy="365760"/>
+            <a:ext cx="3657600" cy="375920"/>
           </a:xfrm>
           <a:prstGeom prst="rect">
             <a:avLst/>
@@ -5866,6 +5969,7 @@
               </a:defRPr>
             </a:pPr>
             <a:r>
+              <a:rPr/>
               <a:t>使い方を学ぶのは今</a:t>
             </a:r>
           </a:p>
@@ -5902,10 +6006,12 @@
               </a:defRPr>
             </a:pPr>
             <a:r>
+              <a:rPr/>
               <a:t>80%の医師が使い始めた。</a:t>
             </a:r>
             <a:br/>
             <a:r>
+              <a:rPr/>
               <a:t>取り残されないために。</a:t>
             </a:r>
           </a:p>
